--- a/_images/catchsamplingworkflow.pptx
+++ b/_images/catchsamplingworkflow.pptx
@@ -5213,4 +5213,254 @@
     </a:ext>
   </a:extLst>
 </a:theme>
+</file>
+
+<file path=customXml/item1.xml><?xml version="1.0" encoding="utf-8"?>
+<ct:contentTypeSchema xmlns:ct="http://schemas.microsoft.com/office/2006/metadata/contentType" xmlns:ma="http://schemas.microsoft.com/office/2006/metadata/properties/metaAttributes" ct:_="" ma:_="" ma:contentTypeName="Document" ma:contentTypeID="0x010100B79A833CF10F444BBAB252802BF889FD" ma:contentTypeVersion="13" ma:contentTypeDescription="Create a new document." ma:contentTypeScope="" ma:versionID="64f677fd2253f5247049a9cf21871e2a">
+  <xsd:schema xmlns:xsd="http://www.w3.org/2001/XMLSchema" xmlns:xs="http://www.w3.org/2001/XMLSchema" xmlns:p="http://schemas.microsoft.com/office/2006/metadata/properties" xmlns:ns2="c01e712b-8f9b-4625-8219-31b20605feb3" xmlns:ns3="2b166a80-dccc-42cc-be33-87bca7e0d87c" targetNamespace="http://schemas.microsoft.com/office/2006/metadata/properties" ma:root="true" ma:fieldsID="2fddc4c226a27c0868f3cab2348c32e7" ns2:_="" ns3:_="">
+    <xsd:import namespace="c01e712b-8f9b-4625-8219-31b20605feb3"/>
+    <xsd:import namespace="2b166a80-dccc-42cc-be33-87bca7e0d87c"/>
+    <xsd:element name="properties">
+      <xsd:complexType>
+        <xsd:sequence>
+          <xsd:element name="documentManagement">
+            <xsd:complexType>
+              <xsd:all>
+                <xsd:element ref="ns2:MediaServiceMetadata" minOccurs="0"/>
+                <xsd:element ref="ns2:MediaServiceFastMetadata" minOccurs="0"/>
+                <xsd:element ref="ns2:MediaServiceAutoKeyPoints" minOccurs="0"/>
+                <xsd:element ref="ns2:MediaServiceKeyPoints" minOccurs="0"/>
+                <xsd:element ref="ns2:MediaServiceDateTaken" minOccurs="0"/>
+                <xsd:element ref="ns2:MediaLengthInSeconds" minOccurs="0"/>
+                <xsd:element ref="ns2:MediaServiceAutoTags" minOccurs="0"/>
+                <xsd:element ref="ns2:MediaServiceOCR" minOccurs="0"/>
+                <xsd:element ref="ns2:MediaServiceGenerationTime" minOccurs="0"/>
+                <xsd:element ref="ns2:MediaServiceEventHashCode" minOccurs="0"/>
+                <xsd:element ref="ns2:MediaServiceLocation" minOccurs="0"/>
+                <xsd:element ref="ns3:SharedWithUsers" minOccurs="0"/>
+                <xsd:element ref="ns3:SharedWithDetails" minOccurs="0"/>
+              </xsd:all>
+            </xsd:complexType>
+          </xsd:element>
+        </xsd:sequence>
+      </xsd:complexType>
+    </xsd:element>
+  </xsd:schema>
+  <xsd:schema xmlns:xsd="http://www.w3.org/2001/XMLSchema" xmlns:xs="http://www.w3.org/2001/XMLSchema" xmlns:dms="http://schemas.microsoft.com/office/2006/documentManagement/types" xmlns:pc="http://schemas.microsoft.com/office/infopath/2007/PartnerControls" targetNamespace="c01e712b-8f9b-4625-8219-31b20605feb3" elementFormDefault="qualified">
+    <xsd:import namespace="http://schemas.microsoft.com/office/2006/documentManagement/types"/>
+    <xsd:import namespace="http://schemas.microsoft.com/office/infopath/2007/PartnerControls"/>
+    <xsd:element name="MediaServiceMetadata" ma:index="8" nillable="true" ma:displayName="MediaServiceMetadata" ma:hidden="true" ma:internalName="MediaServiceMetadata" ma:readOnly="true">
+      <xsd:simpleType>
+        <xsd:restriction base="dms:Note"/>
+      </xsd:simpleType>
+    </xsd:element>
+    <xsd:element name="MediaServiceFastMetadata" ma:index="9" nillable="true" ma:displayName="MediaServiceFastMetadata" ma:hidden="true" ma:internalName="MediaServiceFastMetadata" ma:readOnly="true">
+      <xsd:simpleType>
+        <xsd:restriction base="dms:Note"/>
+      </xsd:simpleType>
+    </xsd:element>
+    <xsd:element name="MediaServiceAutoKeyPoints" ma:index="10" nillable="true" ma:displayName="MediaServiceAutoKeyPoints" ma:hidden="true" ma:internalName="MediaServiceAutoKeyPoints" ma:readOnly="true">
+      <xsd:simpleType>
+        <xsd:restriction base="dms:Note"/>
+      </xsd:simpleType>
+    </xsd:element>
+    <xsd:element name="MediaServiceKeyPoints" ma:index="11" nillable="true" ma:displayName="KeyPoints" ma:internalName="MediaServiceKeyPoints" ma:readOnly="true">
+      <xsd:simpleType>
+        <xsd:restriction base="dms:Note">
+          <xsd:maxLength value="255"/>
+        </xsd:restriction>
+      </xsd:simpleType>
+    </xsd:element>
+    <xsd:element name="MediaServiceDateTaken" ma:index="12" nillable="true" ma:displayName="MediaServiceDateTaken" ma:hidden="true" ma:internalName="MediaServiceDateTaken" ma:readOnly="true">
+      <xsd:simpleType>
+        <xsd:restriction base="dms:Text"/>
+      </xsd:simpleType>
+    </xsd:element>
+    <xsd:element name="MediaLengthInSeconds" ma:index="13" nillable="true" ma:displayName="Length (seconds)" ma:internalName="MediaLengthInSeconds" ma:readOnly="true">
+      <xsd:simpleType>
+        <xsd:restriction base="dms:Unknown"/>
+      </xsd:simpleType>
+    </xsd:element>
+    <xsd:element name="MediaServiceAutoTags" ma:index="14" nillable="true" ma:displayName="Tags" ma:internalName="MediaServiceAutoTags" ma:readOnly="true">
+      <xsd:simpleType>
+        <xsd:restriction base="dms:Text"/>
+      </xsd:simpleType>
+    </xsd:element>
+    <xsd:element name="MediaServiceOCR" ma:index="15" nillable="true" ma:displayName="Extracted Text" ma:internalName="MediaServiceOCR" ma:readOnly="true">
+      <xsd:simpleType>
+        <xsd:restriction base="dms:Note">
+          <xsd:maxLength value="255"/>
+        </xsd:restriction>
+      </xsd:simpleType>
+    </xsd:element>
+    <xsd:element name="MediaServiceGenerationTime" ma:index="16" nillable="true" ma:displayName="MediaServiceGenerationTime" ma:hidden="true" ma:internalName="MediaServiceGenerationTime" ma:readOnly="true">
+      <xsd:simpleType>
+        <xsd:restriction base="dms:Text"/>
+      </xsd:simpleType>
+    </xsd:element>
+    <xsd:element name="MediaServiceEventHashCode" ma:index="17" nillable="true" ma:displayName="MediaServiceEventHashCode" ma:hidden="true" ma:internalName="MediaServiceEventHashCode" ma:readOnly="true">
+      <xsd:simpleType>
+        <xsd:restriction base="dms:Text"/>
+      </xsd:simpleType>
+    </xsd:element>
+    <xsd:element name="MediaServiceLocation" ma:index="18" nillable="true" ma:displayName="Location" ma:internalName="MediaServiceLocation" ma:readOnly="true">
+      <xsd:simpleType>
+        <xsd:restriction base="dms:Text"/>
+      </xsd:simpleType>
+    </xsd:element>
+  </xsd:schema>
+  <xsd:schema xmlns:xsd="http://www.w3.org/2001/XMLSchema" xmlns:xs="http://www.w3.org/2001/XMLSchema" xmlns:dms="http://schemas.microsoft.com/office/2006/documentManagement/types" xmlns:pc="http://schemas.microsoft.com/office/infopath/2007/PartnerControls" targetNamespace="2b166a80-dccc-42cc-be33-87bca7e0d87c" elementFormDefault="qualified">
+    <xsd:import namespace="http://schemas.microsoft.com/office/2006/documentManagement/types"/>
+    <xsd:import namespace="http://schemas.microsoft.com/office/infopath/2007/PartnerControls"/>
+    <xsd:element name="SharedWithUsers" ma:index="19" nillable="true" ma:displayName="Shared With" ma:internalName="SharedWithUsers" ma:readOnly="true">
+      <xsd:complexType>
+        <xsd:complexContent>
+          <xsd:extension base="dms:UserMulti">
+            <xsd:sequence>
+              <xsd:element name="UserInfo" minOccurs="0" maxOccurs="unbounded">
+                <xsd:complexType>
+                  <xsd:sequence>
+                    <xsd:element name="DisplayName" type="xsd:string" minOccurs="0"/>
+                    <xsd:element name="AccountId" type="dms:UserId" minOccurs="0" nillable="true"/>
+                    <xsd:element name="AccountType" type="xsd:string" minOccurs="0"/>
+                  </xsd:sequence>
+                </xsd:complexType>
+              </xsd:element>
+            </xsd:sequence>
+          </xsd:extension>
+        </xsd:complexContent>
+      </xsd:complexType>
+    </xsd:element>
+    <xsd:element name="SharedWithDetails" ma:index="20" nillable="true" ma:displayName="Shared With Details" ma:internalName="SharedWithDetails" ma:readOnly="true">
+      <xsd:simpleType>
+        <xsd:restriction base="dms:Note">
+          <xsd:maxLength value="255"/>
+        </xsd:restriction>
+      </xsd:simpleType>
+    </xsd:element>
+  </xsd:schema>
+  <xsd:schema xmlns="http://schemas.openxmlformats.org/package/2006/metadata/core-properties" xmlns:xsd="http://www.w3.org/2001/XMLSchema" xmlns:xsi="http://www.w3.org/2001/XMLSchema-instance" xmlns:dc="http://purl.org/dc/elements/1.1/" xmlns:dcterms="http://purl.org/dc/terms/" xmlns:odoc="http://schemas.microsoft.com/internal/obd" targetNamespace="http://schemas.openxmlformats.org/package/2006/metadata/core-properties" elementFormDefault="qualified" attributeFormDefault="unqualified" blockDefault="#all">
+    <xsd:import namespace="http://purl.org/dc/elements/1.1/" schemaLocation="http://dublincore.org/schemas/xmls/qdc/2003/04/02/dc.xsd"/>
+    <xsd:import namespace="http://purl.org/dc/terms/" schemaLocation="http://dublincore.org/schemas/xmls/qdc/2003/04/02/dcterms.xsd"/>
+    <xsd:element name="coreProperties" type="CT_coreProperties"/>
+    <xsd:complexType name="CT_coreProperties">
+      <xsd:all>
+        <xsd:element ref="dc:creator" minOccurs="0" maxOccurs="1"/>
+        <xsd:element ref="dcterms:created" minOccurs="0" maxOccurs="1"/>
+        <xsd:element ref="dc:identifier" minOccurs="0" maxOccurs="1"/>
+        <xsd:element name="contentType" minOccurs="0" maxOccurs="1" type="xsd:string" ma:index="0" ma:displayName="Content Type"/>
+        <xsd:element ref="dc:title" minOccurs="0" maxOccurs="1" ma:index="4" ma:displayName="Title"/>
+        <xsd:element ref="dc:subject" minOccurs="0" maxOccurs="1"/>
+        <xsd:element ref="dc:description" minOccurs="0" maxOccurs="1"/>
+        <xsd:element name="keywords" minOccurs="0" maxOccurs="1" type="xsd:string"/>
+        <xsd:element ref="dc:language" minOccurs="0" maxOccurs="1"/>
+        <xsd:element name="category" minOccurs="0" maxOccurs="1" type="xsd:string"/>
+        <xsd:element name="version" minOccurs="0" maxOccurs="1" type="xsd:string"/>
+        <xsd:element name="revision" minOccurs="0" maxOccurs="1" type="xsd:string">
+          <xsd:annotation>
+            <xsd:documentation>
+                        This value indicates the number of saves or revisions. The application is responsible for updating this value after each revision.
+                    </xsd:documentation>
+          </xsd:annotation>
+        </xsd:element>
+        <xsd:element name="lastModifiedBy" minOccurs="0" maxOccurs="1" type="xsd:string"/>
+        <xsd:element ref="dcterms:modified" minOccurs="0" maxOccurs="1"/>
+        <xsd:element name="contentStatus" minOccurs="0" maxOccurs="1" type="xsd:string"/>
+      </xsd:all>
+    </xsd:complexType>
+  </xsd:schema>
+  <xs:schema xmlns:pc="http://schemas.microsoft.com/office/infopath/2007/PartnerControls" xmlns:xs="http://www.w3.org/2001/XMLSchema" targetNamespace="http://schemas.microsoft.com/office/infopath/2007/PartnerControls" elementFormDefault="qualified" attributeFormDefault="unqualified">
+    <xs:element name="Person">
+      <xs:complexType>
+        <xs:sequence>
+          <xs:element ref="pc:DisplayName" minOccurs="0"/>
+          <xs:element ref="pc:AccountId" minOccurs="0"/>
+          <xs:element ref="pc:AccountType" minOccurs="0"/>
+        </xs:sequence>
+      </xs:complexType>
+    </xs:element>
+    <xs:element name="DisplayName" type="xs:string"/>
+    <xs:element name="AccountId" type="xs:string"/>
+    <xs:element name="AccountType" type="xs:string"/>
+    <xs:element name="BDCAssociatedEntity">
+      <xs:complexType>
+        <xs:sequence>
+          <xs:element ref="pc:BDCEntity" minOccurs="0" maxOccurs="unbounded"/>
+        </xs:sequence>
+        <xs:attribute ref="pc:EntityNamespace"/>
+        <xs:attribute ref="pc:EntityName"/>
+        <xs:attribute ref="pc:SystemInstanceName"/>
+        <xs:attribute ref="pc:AssociationName"/>
+      </xs:complexType>
+    </xs:element>
+    <xs:attribute name="EntityNamespace" type="xs:string"/>
+    <xs:attribute name="EntityName" type="xs:string"/>
+    <xs:attribute name="SystemInstanceName" type="xs:string"/>
+    <xs:attribute name="AssociationName" type="xs:string"/>
+    <xs:element name="BDCEntity">
+      <xs:complexType>
+        <xs:sequence>
+          <xs:element ref="pc:EntityDisplayName" minOccurs="0"/>
+          <xs:element ref="pc:EntityInstanceReference" minOccurs="0"/>
+          <xs:element ref="pc:EntityId1" minOccurs="0"/>
+          <xs:element ref="pc:EntityId2" minOccurs="0"/>
+          <xs:element ref="pc:EntityId3" minOccurs="0"/>
+          <xs:element ref="pc:EntityId4" minOccurs="0"/>
+          <xs:element ref="pc:EntityId5" minOccurs="0"/>
+        </xs:sequence>
+      </xs:complexType>
+    </xs:element>
+    <xs:element name="EntityDisplayName" type="xs:string"/>
+    <xs:element name="EntityInstanceReference" type="xs:string"/>
+    <xs:element name="EntityId1" type="xs:string"/>
+    <xs:element name="EntityId2" type="xs:string"/>
+    <xs:element name="EntityId3" type="xs:string"/>
+    <xs:element name="EntityId4" type="xs:string"/>
+    <xs:element name="EntityId5" type="xs:string"/>
+    <xs:element name="Terms">
+      <xs:complexType>
+        <xs:sequence>
+          <xs:element ref="pc:TermInfo" minOccurs="0" maxOccurs="unbounded"/>
+        </xs:sequence>
+      </xs:complexType>
+    </xs:element>
+    <xs:element name="TermInfo">
+      <xs:complexType>
+        <xs:sequence>
+          <xs:element ref="pc:TermName" minOccurs="0"/>
+          <xs:element ref="pc:TermId" minOccurs="0"/>
+        </xs:sequence>
+      </xs:complexType>
+    </xs:element>
+    <xs:element name="TermName" type="xs:string"/>
+    <xs:element name="TermId" type="xs:string"/>
+  </xs:schema>
+</ct:contentTypeSchema>
+</file>
+
+<file path=customXml/item2.xml><?xml version="1.0" encoding="utf-8"?>
+<?mso-contentType ?>
+<FormTemplates xmlns="http://schemas.microsoft.com/sharepoint/v3/contenttype/forms">
+  <Display>DocumentLibraryForm</Display>
+  <Edit>DocumentLibraryForm</Edit>
+  <New>DocumentLibraryForm</New>
+</FormTemplates>
+</file>
+
+<file path=customXml/item3.xml><?xml version="1.0" encoding="utf-8"?>
+<p:properties xmlns:p="http://schemas.microsoft.com/office/2006/metadata/properties" xmlns:xsi="http://www.w3.org/2001/XMLSchema-instance" xmlns:pc="http://schemas.microsoft.com/office/infopath/2007/PartnerControls">
+  <documentManagement/>
+</p:properties>
+</file>
+
+<file path=customXml/itemProps1.xml><?xml version="1.0" encoding="utf-8"?>
+<ds:datastoreItem xmlns:ds="http://schemas.openxmlformats.org/officeDocument/2006/customXml" ds:itemID="{D97905F4-3D47-463F-9DA1-CA6D37FC938C}"/>
+</file>
+
+<file path=customXml/itemProps2.xml><?xml version="1.0" encoding="utf-8"?>
+<ds:datastoreItem xmlns:ds="http://schemas.openxmlformats.org/officeDocument/2006/customXml" ds:itemID="{EF8CF7F2-AF22-46EE-89BD-3147FAB5A9CC}"/>
+</file>
+
+<file path=customXml/itemProps3.xml><?xml version="1.0" encoding="utf-8"?>
+<ds:datastoreItem xmlns:ds="http://schemas.openxmlformats.org/officeDocument/2006/customXml" ds:itemID="{BC7EDAC7-547A-4BBF-9B74-E65552FEE379}"/>
 </file>
--- a/_images/catchsamplingworkflow.pptx
+++ b/_images/catchsamplingworkflow.pptx
@@ -2,18 +2,18 @@
 <file path=ppt/presentation.xml><?xml version="1.0" encoding="utf-8"?>
 <p:presentation xmlns:a="http://schemas.openxmlformats.org/drawingml/2006/main" xmlns:r="http://schemas.openxmlformats.org/officeDocument/2006/relationships" xmlns:p="http://schemas.openxmlformats.org/presentationml/2006/main" saveSubsetFonts="1">
   <p:sldMasterIdLst>
-    <p:sldMasterId id="2147483816" r:id="rId1"/>
+    <p:sldMasterId id="2147483660" r:id="rId1"/>
   </p:sldMasterIdLst>
   <p:sldIdLst>
     <p:sldId id="256" r:id="rId2"/>
   </p:sldIdLst>
-  <p:sldSz cx="5759450" cy="8999538"/>
+  <p:sldSz cx="12192000" cy="8280400"/>
   <p:notesSz cx="6858000" cy="9144000"/>
   <p:defaultTextStyle>
     <a:defPPr>
       <a:defRPr lang="en-US"/>
     </a:defPPr>
-    <a:lvl1pPr marL="0" algn="l" defTabSz="457200" rtl="0" eaLnBrk="1" latinLnBrk="0" hangingPunct="1">
+    <a:lvl1pPr marL="0" algn="l" defTabSz="457141" rtl="0" eaLnBrk="1" latinLnBrk="0" hangingPunct="1">
       <a:defRPr sz="1800" kern="1200">
         <a:solidFill>
           <a:schemeClr val="tx1"/>
@@ -23,7 +23,7 @@
         <a:cs typeface="+mn-cs"/>
       </a:defRPr>
     </a:lvl1pPr>
-    <a:lvl2pPr marL="457200" algn="l" defTabSz="457200" rtl="0" eaLnBrk="1" latinLnBrk="0" hangingPunct="1">
+    <a:lvl2pPr marL="457141" algn="l" defTabSz="457141" rtl="0" eaLnBrk="1" latinLnBrk="0" hangingPunct="1">
       <a:defRPr sz="1800" kern="1200">
         <a:solidFill>
           <a:schemeClr val="tx1"/>
@@ -33,7 +33,7 @@
         <a:cs typeface="+mn-cs"/>
       </a:defRPr>
     </a:lvl2pPr>
-    <a:lvl3pPr marL="914400" algn="l" defTabSz="457200" rtl="0" eaLnBrk="1" latinLnBrk="0" hangingPunct="1">
+    <a:lvl3pPr marL="914282" algn="l" defTabSz="457141" rtl="0" eaLnBrk="1" latinLnBrk="0" hangingPunct="1">
       <a:defRPr sz="1800" kern="1200">
         <a:solidFill>
           <a:schemeClr val="tx1"/>
@@ -43,7 +43,7 @@
         <a:cs typeface="+mn-cs"/>
       </a:defRPr>
     </a:lvl3pPr>
-    <a:lvl4pPr marL="1371600" algn="l" defTabSz="457200" rtl="0" eaLnBrk="1" latinLnBrk="0" hangingPunct="1">
+    <a:lvl4pPr marL="1371422" algn="l" defTabSz="457141" rtl="0" eaLnBrk="1" latinLnBrk="0" hangingPunct="1">
       <a:defRPr sz="1800" kern="1200">
         <a:solidFill>
           <a:schemeClr val="tx1"/>
@@ -53,7 +53,7 @@
         <a:cs typeface="+mn-cs"/>
       </a:defRPr>
     </a:lvl4pPr>
-    <a:lvl5pPr marL="1828800" algn="l" defTabSz="457200" rtl="0" eaLnBrk="1" latinLnBrk="0" hangingPunct="1">
+    <a:lvl5pPr marL="1828562" algn="l" defTabSz="457141" rtl="0" eaLnBrk="1" latinLnBrk="0" hangingPunct="1">
       <a:defRPr sz="1800" kern="1200">
         <a:solidFill>
           <a:schemeClr val="tx1"/>
@@ -63,7 +63,7 @@
         <a:cs typeface="+mn-cs"/>
       </a:defRPr>
     </a:lvl5pPr>
-    <a:lvl6pPr marL="2286000" algn="l" defTabSz="457200" rtl="0" eaLnBrk="1" latinLnBrk="0" hangingPunct="1">
+    <a:lvl6pPr marL="2285703" algn="l" defTabSz="457141" rtl="0" eaLnBrk="1" latinLnBrk="0" hangingPunct="1">
       <a:defRPr sz="1800" kern="1200">
         <a:solidFill>
           <a:schemeClr val="tx1"/>
@@ -73,7 +73,7 @@
         <a:cs typeface="+mn-cs"/>
       </a:defRPr>
     </a:lvl6pPr>
-    <a:lvl7pPr marL="2743200" algn="l" defTabSz="457200" rtl="0" eaLnBrk="1" latinLnBrk="0" hangingPunct="1">
+    <a:lvl7pPr marL="2742844" algn="l" defTabSz="457141" rtl="0" eaLnBrk="1" latinLnBrk="0" hangingPunct="1">
       <a:defRPr sz="1800" kern="1200">
         <a:solidFill>
           <a:schemeClr val="tx1"/>
@@ -83,7 +83,7 @@
         <a:cs typeface="+mn-cs"/>
       </a:defRPr>
     </a:lvl7pPr>
-    <a:lvl8pPr marL="3200400" algn="l" defTabSz="457200" rtl="0" eaLnBrk="1" latinLnBrk="0" hangingPunct="1">
+    <a:lvl8pPr marL="3199985" algn="l" defTabSz="457141" rtl="0" eaLnBrk="1" latinLnBrk="0" hangingPunct="1">
       <a:defRPr sz="1800" kern="1200">
         <a:solidFill>
           <a:schemeClr val="tx1"/>
@@ -93,7 +93,7 @@
         <a:cs typeface="+mn-cs"/>
       </a:defRPr>
     </a:lvl8pPr>
-    <a:lvl9pPr marL="3657600" algn="l" defTabSz="457200" rtl="0" eaLnBrk="1" latinLnBrk="0" hangingPunct="1">
+    <a:lvl9pPr marL="3657125" algn="l" defTabSz="457141" rtl="0" eaLnBrk="1" latinLnBrk="0" hangingPunct="1">
       <a:defRPr sz="1800" kern="1200">
         <a:solidFill>
           <a:schemeClr val="tx1"/>
@@ -104,22 +104,6 @@
       </a:defRPr>
     </a:lvl9pPr>
   </p:defaultTextStyle>
-  <p:extLst>
-    <p:ext uri="{EFAFB233-063F-42B5-8137-9DF3F51BA10A}">
-      <p15:sldGuideLst xmlns:p15="http://schemas.microsoft.com/office/powerpoint/2012/main">
-        <p15:guide id="1" orient="horz" pos="2837" userDrawn="1">
-          <p15:clr>
-            <a:srgbClr val="A4A3A4"/>
-          </p15:clr>
-        </p15:guide>
-        <p15:guide id="2" pos="1816" userDrawn="1">
-          <p15:clr>
-            <a:srgbClr val="A4A3A4"/>
-          </p15:clr>
-        </p15:guide>
-      </p15:sldGuideLst>
-    </p:ext>
-  </p:extLst>
 </p:presentation>
 </file>
 
@@ -152,15 +136,15 @@
         </p:nvSpPr>
         <p:spPr>
           <a:xfrm>
-            <a:off x="431959" y="1472842"/>
-            <a:ext cx="4895533" cy="3133172"/>
+            <a:off x="914401" y="1355149"/>
+            <a:ext cx="10363200" cy="2882806"/>
           </a:xfrm>
         </p:spPr>
         <p:txBody>
           <a:bodyPr anchor="b"/>
           <a:lstStyle>
             <a:lvl1pPr algn="ctr">
-              <a:defRPr sz="3779"/>
+              <a:defRPr sz="7244"/>
             </a:lvl1pPr>
           </a:lstStyle>
           <a:p>
@@ -184,8 +168,8 @@
         </p:nvSpPr>
         <p:spPr>
           <a:xfrm>
-            <a:off x="719931" y="4726842"/>
-            <a:ext cx="4319588" cy="2172804"/>
+            <a:off x="1524000" y="4349128"/>
+            <a:ext cx="9144000" cy="1999179"/>
           </a:xfrm>
         </p:spPr>
         <p:txBody>
@@ -193,39 +177,39 @@
           <a:lstStyle>
             <a:lvl1pPr marL="0" indent="0" algn="ctr">
               <a:buNone/>
-              <a:defRPr sz="1512"/>
+              <a:defRPr sz="2898"/>
             </a:lvl1pPr>
-            <a:lvl2pPr marL="287990" indent="0" algn="ctr">
-              <a:buNone/>
-              <a:defRPr sz="1260"/>
+            <a:lvl2pPr marL="552022" indent="0" algn="ctr">
+              <a:buNone/>
+              <a:defRPr sz="2415"/>
             </a:lvl2pPr>
-            <a:lvl3pPr marL="575981" indent="0" algn="ctr">
-              <a:buNone/>
-              <a:defRPr sz="1134"/>
+            <a:lvl3pPr marL="1104044" indent="0" algn="ctr">
+              <a:buNone/>
+              <a:defRPr sz="2173"/>
             </a:lvl3pPr>
-            <a:lvl4pPr marL="863971" indent="0" algn="ctr">
-              <a:buNone/>
-              <a:defRPr sz="1008"/>
+            <a:lvl4pPr marL="1656067" indent="0" algn="ctr">
+              <a:buNone/>
+              <a:defRPr sz="1932"/>
             </a:lvl4pPr>
-            <a:lvl5pPr marL="1151961" indent="0" algn="ctr">
-              <a:buNone/>
-              <a:defRPr sz="1008"/>
+            <a:lvl5pPr marL="2208088" indent="0" algn="ctr">
+              <a:buNone/>
+              <a:defRPr sz="1932"/>
             </a:lvl5pPr>
-            <a:lvl6pPr marL="1439951" indent="0" algn="ctr">
-              <a:buNone/>
-              <a:defRPr sz="1008"/>
+            <a:lvl6pPr marL="2760110" indent="0" algn="ctr">
+              <a:buNone/>
+              <a:defRPr sz="1932"/>
             </a:lvl6pPr>
-            <a:lvl7pPr marL="1727942" indent="0" algn="ctr">
-              <a:buNone/>
-              <a:defRPr sz="1008"/>
+            <a:lvl7pPr marL="3312133" indent="0" algn="ctr">
+              <a:buNone/>
+              <a:defRPr sz="1932"/>
             </a:lvl7pPr>
-            <a:lvl8pPr marL="2015932" indent="0" algn="ctr">
-              <a:buNone/>
-              <a:defRPr sz="1008"/>
+            <a:lvl8pPr marL="3864154" indent="0" algn="ctr">
+              <a:buNone/>
+              <a:defRPr sz="1932"/>
             </a:lvl8pPr>
-            <a:lvl9pPr marL="2303922" indent="0" algn="ctr">
-              <a:buNone/>
-              <a:defRPr sz="1008"/>
+            <a:lvl9pPr marL="4416177" indent="0" algn="ctr">
+              <a:buNone/>
+              <a:defRPr sz="1932"/>
             </a:lvl9pPr>
           </a:lstStyle>
           <a:p>
@@ -252,11 +236,11 @@
           <a:bodyPr/>
           <a:lstStyle/>
           <a:p>
-            <a:fld id="{6B954015-A75A-4F9C-8FD1-6C02F3E98E5C}" type="datetimeFigureOut">
-              <a:rPr lang="el-GR" smtClean="0"/>
-              <a:t>18/4/2022</a:t>
+            <a:fld id="{5DDB4FAB-BF9E-489C-AE0E-F4FE448E7587}" type="datetimeFigureOut">
+              <a:rPr lang="nb-NO" smtClean="0"/>
+              <a:t>13.05.2022</a:t>
             </a:fld>
-            <a:endParaRPr lang="el-GR"/>
+            <a:endParaRPr lang="nb-NO"/>
           </a:p>
         </p:txBody>
       </p:sp>
@@ -275,7 +259,7 @@
           <a:bodyPr/>
           <a:lstStyle/>
           <a:p>
-            <a:endParaRPr lang="el-GR"/>
+            <a:endParaRPr lang="nb-NO"/>
           </a:p>
         </p:txBody>
       </p:sp>
@@ -294,18 +278,18 @@
           <a:bodyPr/>
           <a:lstStyle/>
           <a:p>
-            <a:fld id="{98DE7590-B40F-4748-B751-EBB86AFFAEC2}" type="slidenum">
-              <a:rPr lang="el-GR" smtClean="0"/>
+            <a:fld id="{644E7A17-C0D5-4824-AF87-B4C1390AAE69}" type="slidenum">
+              <a:rPr lang="nb-NO" smtClean="0"/>
               <a:t>‹#›</a:t>
             </a:fld>
-            <a:endParaRPr lang="el-GR"/>
+            <a:endParaRPr lang="nb-NO"/>
           </a:p>
         </p:txBody>
       </p:sp>
     </p:spTree>
     <p:extLst>
       <p:ext uri="{BB962C8B-B14F-4D97-AF65-F5344CB8AC3E}">
-        <p14:creationId xmlns:p14="http://schemas.microsoft.com/office/powerpoint/2010/main" val="3376731603"/>
+        <p14:creationId xmlns:p14="http://schemas.microsoft.com/office/powerpoint/2010/main" val="3395893693"/>
       </p:ext>
     </p:extLst>
   </p:cSld>
@@ -422,11 +406,11 @@
           <a:bodyPr/>
           <a:lstStyle/>
           <a:p>
-            <a:fld id="{6B954015-A75A-4F9C-8FD1-6C02F3E98E5C}" type="datetimeFigureOut">
-              <a:rPr lang="el-GR" smtClean="0"/>
-              <a:t>18/4/2022</a:t>
+            <a:fld id="{5DDB4FAB-BF9E-489C-AE0E-F4FE448E7587}" type="datetimeFigureOut">
+              <a:rPr lang="nb-NO" smtClean="0"/>
+              <a:t>13.05.2022</a:t>
             </a:fld>
-            <a:endParaRPr lang="el-GR"/>
+            <a:endParaRPr lang="nb-NO"/>
           </a:p>
         </p:txBody>
       </p:sp>
@@ -445,7 +429,7 @@
           <a:bodyPr/>
           <a:lstStyle/>
           <a:p>
-            <a:endParaRPr lang="el-GR"/>
+            <a:endParaRPr lang="nb-NO"/>
           </a:p>
         </p:txBody>
       </p:sp>
@@ -464,18 +448,18 @@
           <a:bodyPr/>
           <a:lstStyle/>
           <a:p>
-            <a:fld id="{98DE7590-B40F-4748-B751-EBB86AFFAEC2}" type="slidenum">
-              <a:rPr lang="el-GR" smtClean="0"/>
+            <a:fld id="{644E7A17-C0D5-4824-AF87-B4C1390AAE69}" type="slidenum">
+              <a:rPr lang="nb-NO" smtClean="0"/>
               <a:t>‹#›</a:t>
             </a:fld>
-            <a:endParaRPr lang="el-GR"/>
+            <a:endParaRPr lang="nb-NO"/>
           </a:p>
         </p:txBody>
       </p:sp>
     </p:spTree>
     <p:extLst>
       <p:ext uri="{BB962C8B-B14F-4D97-AF65-F5344CB8AC3E}">
-        <p14:creationId xmlns:p14="http://schemas.microsoft.com/office/powerpoint/2010/main" val="1650468900"/>
+        <p14:creationId xmlns:p14="http://schemas.microsoft.com/office/powerpoint/2010/main" val="689741805"/>
       </p:ext>
     </p:extLst>
   </p:cSld>
@@ -514,8 +498,8 @@
         </p:nvSpPr>
         <p:spPr>
           <a:xfrm>
-            <a:off x="4121607" y="479142"/>
-            <a:ext cx="1241881" cy="7626692"/>
+            <a:off x="8724901" y="440855"/>
+            <a:ext cx="2628900" cy="7017256"/>
           </a:xfrm>
         </p:spPr>
         <p:txBody>
@@ -542,8 +526,8 @@
         </p:nvSpPr>
         <p:spPr>
           <a:xfrm>
-            <a:off x="395963" y="479142"/>
-            <a:ext cx="3653651" cy="7626692"/>
+            <a:off x="838201" y="440855"/>
+            <a:ext cx="7734300" cy="7017256"/>
           </a:xfrm>
         </p:spPr>
         <p:txBody>
@@ -602,11 +586,11 @@
           <a:bodyPr/>
           <a:lstStyle/>
           <a:p>
-            <a:fld id="{6B954015-A75A-4F9C-8FD1-6C02F3E98E5C}" type="datetimeFigureOut">
-              <a:rPr lang="el-GR" smtClean="0"/>
-              <a:t>18/4/2022</a:t>
+            <a:fld id="{5DDB4FAB-BF9E-489C-AE0E-F4FE448E7587}" type="datetimeFigureOut">
+              <a:rPr lang="nb-NO" smtClean="0"/>
+              <a:t>13.05.2022</a:t>
             </a:fld>
-            <a:endParaRPr lang="el-GR"/>
+            <a:endParaRPr lang="nb-NO"/>
           </a:p>
         </p:txBody>
       </p:sp>
@@ -625,7 +609,7 @@
           <a:bodyPr/>
           <a:lstStyle/>
           <a:p>
-            <a:endParaRPr lang="el-GR"/>
+            <a:endParaRPr lang="nb-NO"/>
           </a:p>
         </p:txBody>
       </p:sp>
@@ -644,18 +628,18 @@
           <a:bodyPr/>
           <a:lstStyle/>
           <a:p>
-            <a:fld id="{98DE7590-B40F-4748-B751-EBB86AFFAEC2}" type="slidenum">
-              <a:rPr lang="el-GR" smtClean="0"/>
+            <a:fld id="{644E7A17-C0D5-4824-AF87-B4C1390AAE69}" type="slidenum">
+              <a:rPr lang="nb-NO" smtClean="0"/>
               <a:t>‹#›</a:t>
             </a:fld>
-            <a:endParaRPr lang="el-GR"/>
+            <a:endParaRPr lang="nb-NO"/>
           </a:p>
         </p:txBody>
       </p:sp>
     </p:spTree>
     <p:extLst>
       <p:ext uri="{BB962C8B-B14F-4D97-AF65-F5344CB8AC3E}">
-        <p14:creationId xmlns:p14="http://schemas.microsoft.com/office/powerpoint/2010/main" val="2316325043"/>
+        <p14:creationId xmlns:p14="http://schemas.microsoft.com/office/powerpoint/2010/main" val="27189712"/>
       </p:ext>
     </p:extLst>
   </p:cSld>
@@ -772,11 +756,11 @@
           <a:bodyPr/>
           <a:lstStyle/>
           <a:p>
-            <a:fld id="{6B954015-A75A-4F9C-8FD1-6C02F3E98E5C}" type="datetimeFigureOut">
-              <a:rPr lang="el-GR" smtClean="0"/>
-              <a:t>18/4/2022</a:t>
+            <a:fld id="{5DDB4FAB-BF9E-489C-AE0E-F4FE448E7587}" type="datetimeFigureOut">
+              <a:rPr lang="nb-NO" smtClean="0"/>
+              <a:t>13.05.2022</a:t>
             </a:fld>
-            <a:endParaRPr lang="el-GR"/>
+            <a:endParaRPr lang="nb-NO"/>
           </a:p>
         </p:txBody>
       </p:sp>
@@ -795,7 +779,7 @@
           <a:bodyPr/>
           <a:lstStyle/>
           <a:p>
-            <a:endParaRPr lang="el-GR"/>
+            <a:endParaRPr lang="nb-NO"/>
           </a:p>
         </p:txBody>
       </p:sp>
@@ -814,18 +798,18 @@
           <a:bodyPr/>
           <a:lstStyle/>
           <a:p>
-            <a:fld id="{98DE7590-B40F-4748-B751-EBB86AFFAEC2}" type="slidenum">
-              <a:rPr lang="el-GR" smtClean="0"/>
+            <a:fld id="{644E7A17-C0D5-4824-AF87-B4C1390AAE69}" type="slidenum">
+              <a:rPr lang="nb-NO" smtClean="0"/>
               <a:t>‹#›</a:t>
             </a:fld>
-            <a:endParaRPr lang="el-GR"/>
+            <a:endParaRPr lang="nb-NO"/>
           </a:p>
         </p:txBody>
       </p:sp>
     </p:spTree>
     <p:extLst>
       <p:ext uri="{BB962C8B-B14F-4D97-AF65-F5344CB8AC3E}">
-        <p14:creationId xmlns:p14="http://schemas.microsoft.com/office/powerpoint/2010/main" val="1628444331"/>
+        <p14:creationId xmlns:p14="http://schemas.microsoft.com/office/powerpoint/2010/main" val="1394860212"/>
       </p:ext>
     </p:extLst>
   </p:cSld>
@@ -864,15 +848,15 @@
         </p:nvSpPr>
         <p:spPr>
           <a:xfrm>
-            <a:off x="392963" y="2243638"/>
-            <a:ext cx="4967526" cy="3743557"/>
+            <a:off x="831851" y="2064352"/>
+            <a:ext cx="10515600" cy="3444416"/>
           </a:xfrm>
         </p:spPr>
         <p:txBody>
           <a:bodyPr anchor="b"/>
           <a:lstStyle>
             <a:lvl1pPr>
-              <a:defRPr sz="3779"/>
+              <a:defRPr sz="7244"/>
             </a:lvl1pPr>
           </a:lstStyle>
           <a:p>
@@ -896,8 +880,8 @@
         </p:nvSpPr>
         <p:spPr>
           <a:xfrm>
-            <a:off x="392963" y="6022610"/>
-            <a:ext cx="4967526" cy="1968648"/>
+            <a:off x="831851" y="5541354"/>
+            <a:ext cx="10515600" cy="1811337"/>
           </a:xfrm>
         </p:spPr>
         <p:txBody>
@@ -905,15 +889,15 @@
           <a:lstStyle>
             <a:lvl1pPr marL="0" indent="0">
               <a:buNone/>
-              <a:defRPr sz="1512">
+              <a:defRPr sz="2898">
                 <a:solidFill>
                   <a:schemeClr val="tx1"/>
                 </a:solidFill>
               </a:defRPr>
             </a:lvl1pPr>
-            <a:lvl2pPr marL="287990" indent="0">
-              <a:buNone/>
-              <a:defRPr sz="1260">
+            <a:lvl2pPr marL="552022" indent="0">
+              <a:buNone/>
+              <a:defRPr sz="2415">
                 <a:solidFill>
                   <a:schemeClr val="tx1">
                     <a:tint val="75000"/>
@@ -921,9 +905,9 @@
                 </a:solidFill>
               </a:defRPr>
             </a:lvl2pPr>
-            <a:lvl3pPr marL="575981" indent="0">
-              <a:buNone/>
-              <a:defRPr sz="1134">
+            <a:lvl3pPr marL="1104044" indent="0">
+              <a:buNone/>
+              <a:defRPr sz="2173">
                 <a:solidFill>
                   <a:schemeClr val="tx1">
                     <a:tint val="75000"/>
@@ -931,9 +915,9 @@
                 </a:solidFill>
               </a:defRPr>
             </a:lvl3pPr>
-            <a:lvl4pPr marL="863971" indent="0">
-              <a:buNone/>
-              <a:defRPr sz="1008">
+            <a:lvl4pPr marL="1656067" indent="0">
+              <a:buNone/>
+              <a:defRPr sz="1932">
                 <a:solidFill>
                   <a:schemeClr val="tx1">
                     <a:tint val="75000"/>
@@ -941,9 +925,9 @@
                 </a:solidFill>
               </a:defRPr>
             </a:lvl4pPr>
-            <a:lvl5pPr marL="1151961" indent="0">
-              <a:buNone/>
-              <a:defRPr sz="1008">
+            <a:lvl5pPr marL="2208088" indent="0">
+              <a:buNone/>
+              <a:defRPr sz="1932">
                 <a:solidFill>
                   <a:schemeClr val="tx1">
                     <a:tint val="75000"/>
@@ -951,9 +935,9 @@
                 </a:solidFill>
               </a:defRPr>
             </a:lvl5pPr>
-            <a:lvl6pPr marL="1439951" indent="0">
-              <a:buNone/>
-              <a:defRPr sz="1008">
+            <a:lvl6pPr marL="2760110" indent="0">
+              <a:buNone/>
+              <a:defRPr sz="1932">
                 <a:solidFill>
                   <a:schemeClr val="tx1">
                     <a:tint val="75000"/>
@@ -961,9 +945,9 @@
                 </a:solidFill>
               </a:defRPr>
             </a:lvl6pPr>
-            <a:lvl7pPr marL="1727942" indent="0">
-              <a:buNone/>
-              <a:defRPr sz="1008">
+            <a:lvl7pPr marL="3312133" indent="0">
+              <a:buNone/>
+              <a:defRPr sz="1932">
                 <a:solidFill>
                   <a:schemeClr val="tx1">
                     <a:tint val="75000"/>
@@ -971,9 +955,9 @@
                 </a:solidFill>
               </a:defRPr>
             </a:lvl7pPr>
-            <a:lvl8pPr marL="2015932" indent="0">
-              <a:buNone/>
-              <a:defRPr sz="1008">
+            <a:lvl8pPr marL="3864154" indent="0">
+              <a:buNone/>
+              <a:defRPr sz="1932">
                 <a:solidFill>
                   <a:schemeClr val="tx1">
                     <a:tint val="75000"/>
@@ -981,9 +965,9 @@
                 </a:solidFill>
               </a:defRPr>
             </a:lvl8pPr>
-            <a:lvl9pPr marL="2303922" indent="0">
-              <a:buNone/>
-              <a:defRPr sz="1008">
+            <a:lvl9pPr marL="4416177" indent="0">
+              <a:buNone/>
+              <a:defRPr sz="1932">
                 <a:solidFill>
                   <a:schemeClr val="tx1">
                     <a:tint val="75000"/>
@@ -1016,11 +1000,11 @@
           <a:bodyPr/>
           <a:lstStyle/>
           <a:p>
-            <a:fld id="{6B954015-A75A-4F9C-8FD1-6C02F3E98E5C}" type="datetimeFigureOut">
-              <a:rPr lang="el-GR" smtClean="0"/>
-              <a:t>18/4/2022</a:t>
+            <a:fld id="{5DDB4FAB-BF9E-489C-AE0E-F4FE448E7587}" type="datetimeFigureOut">
+              <a:rPr lang="nb-NO" smtClean="0"/>
+              <a:t>13.05.2022</a:t>
             </a:fld>
-            <a:endParaRPr lang="el-GR"/>
+            <a:endParaRPr lang="nb-NO"/>
           </a:p>
         </p:txBody>
       </p:sp>
@@ -1039,7 +1023,7 @@
           <a:bodyPr/>
           <a:lstStyle/>
           <a:p>
-            <a:endParaRPr lang="el-GR"/>
+            <a:endParaRPr lang="nb-NO"/>
           </a:p>
         </p:txBody>
       </p:sp>
@@ -1058,18 +1042,18 @@
           <a:bodyPr/>
           <a:lstStyle/>
           <a:p>
-            <a:fld id="{98DE7590-B40F-4748-B751-EBB86AFFAEC2}" type="slidenum">
-              <a:rPr lang="el-GR" smtClean="0"/>
+            <a:fld id="{644E7A17-C0D5-4824-AF87-B4C1390AAE69}" type="slidenum">
+              <a:rPr lang="nb-NO" smtClean="0"/>
               <a:t>‹#›</a:t>
             </a:fld>
-            <a:endParaRPr lang="el-GR"/>
+            <a:endParaRPr lang="nb-NO"/>
           </a:p>
         </p:txBody>
       </p:sp>
     </p:spTree>
     <p:extLst>
       <p:ext uri="{BB962C8B-B14F-4D97-AF65-F5344CB8AC3E}">
-        <p14:creationId xmlns:p14="http://schemas.microsoft.com/office/powerpoint/2010/main" val="3030751123"/>
+        <p14:creationId xmlns:p14="http://schemas.microsoft.com/office/powerpoint/2010/main" val="1255602967"/>
       </p:ext>
     </p:extLst>
   </p:cSld>
@@ -1131,8 +1115,8 @@
         </p:nvSpPr>
         <p:spPr>
           <a:xfrm>
-            <a:off x="395962" y="2395710"/>
-            <a:ext cx="2447766" cy="5710124"/>
+            <a:off x="838201" y="2204274"/>
+            <a:ext cx="5181600" cy="5253838"/>
           </a:xfrm>
         </p:spPr>
         <p:txBody>
@@ -1188,8 +1172,8 @@
         </p:nvSpPr>
         <p:spPr>
           <a:xfrm>
-            <a:off x="2915722" y="2395710"/>
-            <a:ext cx="2447766" cy="5710124"/>
+            <a:off x="6172200" y="2204274"/>
+            <a:ext cx="5181600" cy="5253838"/>
           </a:xfrm>
         </p:spPr>
         <p:txBody>
@@ -1248,11 +1232,11 @@
           <a:bodyPr/>
           <a:lstStyle/>
           <a:p>
-            <a:fld id="{6B954015-A75A-4F9C-8FD1-6C02F3E98E5C}" type="datetimeFigureOut">
-              <a:rPr lang="el-GR" smtClean="0"/>
-              <a:t>18/4/2022</a:t>
+            <a:fld id="{5DDB4FAB-BF9E-489C-AE0E-F4FE448E7587}" type="datetimeFigureOut">
+              <a:rPr lang="nb-NO" smtClean="0"/>
+              <a:t>13.05.2022</a:t>
             </a:fld>
-            <a:endParaRPr lang="el-GR"/>
+            <a:endParaRPr lang="nb-NO"/>
           </a:p>
         </p:txBody>
       </p:sp>
@@ -1271,7 +1255,7 @@
           <a:bodyPr/>
           <a:lstStyle/>
           <a:p>
-            <a:endParaRPr lang="el-GR"/>
+            <a:endParaRPr lang="nb-NO"/>
           </a:p>
         </p:txBody>
       </p:sp>
@@ -1290,18 +1274,18 @@
           <a:bodyPr/>
           <a:lstStyle/>
           <a:p>
-            <a:fld id="{98DE7590-B40F-4748-B751-EBB86AFFAEC2}" type="slidenum">
-              <a:rPr lang="el-GR" smtClean="0"/>
+            <a:fld id="{644E7A17-C0D5-4824-AF87-B4C1390AAE69}" type="slidenum">
+              <a:rPr lang="nb-NO" smtClean="0"/>
               <a:t>‹#›</a:t>
             </a:fld>
-            <a:endParaRPr lang="el-GR"/>
+            <a:endParaRPr lang="nb-NO"/>
           </a:p>
         </p:txBody>
       </p:sp>
     </p:spTree>
     <p:extLst>
       <p:ext uri="{BB962C8B-B14F-4D97-AF65-F5344CB8AC3E}">
-        <p14:creationId xmlns:p14="http://schemas.microsoft.com/office/powerpoint/2010/main" val="2053754938"/>
+        <p14:creationId xmlns:p14="http://schemas.microsoft.com/office/powerpoint/2010/main" val="1311759861"/>
       </p:ext>
     </p:extLst>
   </p:cSld>
@@ -1340,8 +1324,8 @@
         </p:nvSpPr>
         <p:spPr>
           <a:xfrm>
-            <a:off x="396712" y="479144"/>
-            <a:ext cx="4967526" cy="1739495"/>
+            <a:off x="839788" y="440856"/>
+            <a:ext cx="10515600" cy="1600495"/>
           </a:xfrm>
         </p:spPr>
         <p:txBody>
@@ -1368,8 +1352,8 @@
         </p:nvSpPr>
         <p:spPr>
           <a:xfrm>
-            <a:off x="396713" y="2206137"/>
-            <a:ext cx="2436517" cy="1081194"/>
+            <a:off x="839790" y="2029850"/>
+            <a:ext cx="5157787" cy="994797"/>
           </a:xfrm>
         </p:spPr>
         <p:txBody>
@@ -1377,39 +1361,39 @@
           <a:lstStyle>
             <a:lvl1pPr marL="0" indent="0">
               <a:buNone/>
-              <a:defRPr sz="1512" b="1"/>
+              <a:defRPr sz="2898" b="1"/>
             </a:lvl1pPr>
-            <a:lvl2pPr marL="287990" indent="0">
-              <a:buNone/>
-              <a:defRPr sz="1260" b="1"/>
+            <a:lvl2pPr marL="552022" indent="0">
+              <a:buNone/>
+              <a:defRPr sz="2415" b="1"/>
             </a:lvl2pPr>
-            <a:lvl3pPr marL="575981" indent="0">
-              <a:buNone/>
-              <a:defRPr sz="1134" b="1"/>
+            <a:lvl3pPr marL="1104044" indent="0">
+              <a:buNone/>
+              <a:defRPr sz="2173" b="1"/>
             </a:lvl3pPr>
-            <a:lvl4pPr marL="863971" indent="0">
-              <a:buNone/>
-              <a:defRPr sz="1008" b="1"/>
+            <a:lvl4pPr marL="1656067" indent="0">
+              <a:buNone/>
+              <a:defRPr sz="1932" b="1"/>
             </a:lvl4pPr>
-            <a:lvl5pPr marL="1151961" indent="0">
-              <a:buNone/>
-              <a:defRPr sz="1008" b="1"/>
+            <a:lvl5pPr marL="2208088" indent="0">
+              <a:buNone/>
+              <a:defRPr sz="1932" b="1"/>
             </a:lvl5pPr>
-            <a:lvl6pPr marL="1439951" indent="0">
-              <a:buNone/>
-              <a:defRPr sz="1008" b="1"/>
+            <a:lvl6pPr marL="2760110" indent="0">
+              <a:buNone/>
+              <a:defRPr sz="1932" b="1"/>
             </a:lvl6pPr>
-            <a:lvl7pPr marL="1727942" indent="0">
-              <a:buNone/>
-              <a:defRPr sz="1008" b="1"/>
+            <a:lvl7pPr marL="3312133" indent="0">
+              <a:buNone/>
+              <a:defRPr sz="1932" b="1"/>
             </a:lvl7pPr>
-            <a:lvl8pPr marL="2015932" indent="0">
-              <a:buNone/>
-              <a:defRPr sz="1008" b="1"/>
+            <a:lvl8pPr marL="3864154" indent="0">
+              <a:buNone/>
+              <a:defRPr sz="1932" b="1"/>
             </a:lvl8pPr>
-            <a:lvl9pPr marL="2303922" indent="0">
-              <a:buNone/>
-              <a:defRPr sz="1008" b="1"/>
+            <a:lvl9pPr marL="4416177" indent="0">
+              <a:buNone/>
+              <a:defRPr sz="1932" b="1"/>
             </a:lvl9pPr>
           </a:lstStyle>
           <a:p>
@@ -1433,8 +1417,8 @@
         </p:nvSpPr>
         <p:spPr>
           <a:xfrm>
-            <a:off x="396713" y="3287331"/>
-            <a:ext cx="2436517" cy="4835169"/>
+            <a:off x="839790" y="3024646"/>
+            <a:ext cx="5157787" cy="4448799"/>
           </a:xfrm>
         </p:spPr>
         <p:txBody>
@@ -1490,8 +1474,8 @@
         </p:nvSpPr>
         <p:spPr>
           <a:xfrm>
-            <a:off x="2915722" y="2206137"/>
-            <a:ext cx="2448516" cy="1081194"/>
+            <a:off x="6172201" y="2029850"/>
+            <a:ext cx="5183188" cy="994797"/>
           </a:xfrm>
         </p:spPr>
         <p:txBody>
@@ -1499,39 +1483,39 @@
           <a:lstStyle>
             <a:lvl1pPr marL="0" indent="0">
               <a:buNone/>
-              <a:defRPr sz="1512" b="1"/>
+              <a:defRPr sz="2898" b="1"/>
             </a:lvl1pPr>
-            <a:lvl2pPr marL="287990" indent="0">
-              <a:buNone/>
-              <a:defRPr sz="1260" b="1"/>
+            <a:lvl2pPr marL="552022" indent="0">
+              <a:buNone/>
+              <a:defRPr sz="2415" b="1"/>
             </a:lvl2pPr>
-            <a:lvl3pPr marL="575981" indent="0">
-              <a:buNone/>
-              <a:defRPr sz="1134" b="1"/>
+            <a:lvl3pPr marL="1104044" indent="0">
+              <a:buNone/>
+              <a:defRPr sz="2173" b="1"/>
             </a:lvl3pPr>
-            <a:lvl4pPr marL="863971" indent="0">
-              <a:buNone/>
-              <a:defRPr sz="1008" b="1"/>
+            <a:lvl4pPr marL="1656067" indent="0">
+              <a:buNone/>
+              <a:defRPr sz="1932" b="1"/>
             </a:lvl4pPr>
-            <a:lvl5pPr marL="1151961" indent="0">
-              <a:buNone/>
-              <a:defRPr sz="1008" b="1"/>
+            <a:lvl5pPr marL="2208088" indent="0">
+              <a:buNone/>
+              <a:defRPr sz="1932" b="1"/>
             </a:lvl5pPr>
-            <a:lvl6pPr marL="1439951" indent="0">
-              <a:buNone/>
-              <a:defRPr sz="1008" b="1"/>
+            <a:lvl6pPr marL="2760110" indent="0">
+              <a:buNone/>
+              <a:defRPr sz="1932" b="1"/>
             </a:lvl6pPr>
-            <a:lvl7pPr marL="1727942" indent="0">
-              <a:buNone/>
-              <a:defRPr sz="1008" b="1"/>
+            <a:lvl7pPr marL="3312133" indent="0">
+              <a:buNone/>
+              <a:defRPr sz="1932" b="1"/>
             </a:lvl7pPr>
-            <a:lvl8pPr marL="2015932" indent="0">
-              <a:buNone/>
-              <a:defRPr sz="1008" b="1"/>
+            <a:lvl8pPr marL="3864154" indent="0">
+              <a:buNone/>
+              <a:defRPr sz="1932" b="1"/>
             </a:lvl8pPr>
-            <a:lvl9pPr marL="2303922" indent="0">
-              <a:buNone/>
-              <a:defRPr sz="1008" b="1"/>
+            <a:lvl9pPr marL="4416177" indent="0">
+              <a:buNone/>
+              <a:defRPr sz="1932" b="1"/>
             </a:lvl9pPr>
           </a:lstStyle>
           <a:p>
@@ -1555,8 +1539,8 @@
         </p:nvSpPr>
         <p:spPr>
           <a:xfrm>
-            <a:off x="2915722" y="3287331"/>
-            <a:ext cx="2448516" cy="4835169"/>
+            <a:off x="6172201" y="3024646"/>
+            <a:ext cx="5183188" cy="4448799"/>
           </a:xfrm>
         </p:spPr>
         <p:txBody>
@@ -1615,11 +1599,11 @@
           <a:bodyPr/>
           <a:lstStyle/>
           <a:p>
-            <a:fld id="{6B954015-A75A-4F9C-8FD1-6C02F3E98E5C}" type="datetimeFigureOut">
-              <a:rPr lang="el-GR" smtClean="0"/>
-              <a:t>18/4/2022</a:t>
+            <a:fld id="{5DDB4FAB-BF9E-489C-AE0E-F4FE448E7587}" type="datetimeFigureOut">
+              <a:rPr lang="nb-NO" smtClean="0"/>
+              <a:t>13.05.2022</a:t>
             </a:fld>
-            <a:endParaRPr lang="el-GR"/>
+            <a:endParaRPr lang="nb-NO"/>
           </a:p>
         </p:txBody>
       </p:sp>
@@ -1638,7 +1622,7 @@
           <a:bodyPr/>
           <a:lstStyle/>
           <a:p>
-            <a:endParaRPr lang="el-GR"/>
+            <a:endParaRPr lang="nb-NO"/>
           </a:p>
         </p:txBody>
       </p:sp>
@@ -1657,18 +1641,18 @@
           <a:bodyPr/>
           <a:lstStyle/>
           <a:p>
-            <a:fld id="{98DE7590-B40F-4748-B751-EBB86AFFAEC2}" type="slidenum">
-              <a:rPr lang="el-GR" smtClean="0"/>
+            <a:fld id="{644E7A17-C0D5-4824-AF87-B4C1390AAE69}" type="slidenum">
+              <a:rPr lang="nb-NO" smtClean="0"/>
               <a:t>‹#›</a:t>
             </a:fld>
-            <a:endParaRPr lang="el-GR"/>
+            <a:endParaRPr lang="nb-NO"/>
           </a:p>
         </p:txBody>
       </p:sp>
     </p:spTree>
     <p:extLst>
       <p:ext uri="{BB962C8B-B14F-4D97-AF65-F5344CB8AC3E}">
-        <p14:creationId xmlns:p14="http://schemas.microsoft.com/office/powerpoint/2010/main" val="490591820"/>
+        <p14:creationId xmlns:p14="http://schemas.microsoft.com/office/powerpoint/2010/main" val="1669834912"/>
       </p:ext>
     </p:extLst>
   </p:cSld>
@@ -1733,11 +1717,11 @@
           <a:bodyPr/>
           <a:lstStyle/>
           <a:p>
-            <a:fld id="{6B954015-A75A-4F9C-8FD1-6C02F3E98E5C}" type="datetimeFigureOut">
-              <a:rPr lang="el-GR" smtClean="0"/>
-              <a:t>18/4/2022</a:t>
+            <a:fld id="{5DDB4FAB-BF9E-489C-AE0E-F4FE448E7587}" type="datetimeFigureOut">
+              <a:rPr lang="nb-NO" smtClean="0"/>
+              <a:t>13.05.2022</a:t>
             </a:fld>
-            <a:endParaRPr lang="el-GR"/>
+            <a:endParaRPr lang="nb-NO"/>
           </a:p>
         </p:txBody>
       </p:sp>
@@ -1756,7 +1740,7 @@
           <a:bodyPr/>
           <a:lstStyle/>
           <a:p>
-            <a:endParaRPr lang="el-GR"/>
+            <a:endParaRPr lang="nb-NO"/>
           </a:p>
         </p:txBody>
       </p:sp>
@@ -1775,18 +1759,18 @@
           <a:bodyPr/>
           <a:lstStyle/>
           <a:p>
-            <a:fld id="{98DE7590-B40F-4748-B751-EBB86AFFAEC2}" type="slidenum">
-              <a:rPr lang="el-GR" smtClean="0"/>
+            <a:fld id="{644E7A17-C0D5-4824-AF87-B4C1390AAE69}" type="slidenum">
+              <a:rPr lang="nb-NO" smtClean="0"/>
               <a:t>‹#›</a:t>
             </a:fld>
-            <a:endParaRPr lang="el-GR"/>
+            <a:endParaRPr lang="nb-NO"/>
           </a:p>
         </p:txBody>
       </p:sp>
     </p:spTree>
     <p:extLst>
       <p:ext uri="{BB962C8B-B14F-4D97-AF65-F5344CB8AC3E}">
-        <p14:creationId xmlns:p14="http://schemas.microsoft.com/office/powerpoint/2010/main" val="4187740618"/>
+        <p14:creationId xmlns:p14="http://schemas.microsoft.com/office/powerpoint/2010/main" val="1833448513"/>
       </p:ext>
     </p:extLst>
   </p:cSld>
@@ -1828,11 +1812,11 @@
           <a:bodyPr/>
           <a:lstStyle/>
           <a:p>
-            <a:fld id="{6B954015-A75A-4F9C-8FD1-6C02F3E98E5C}" type="datetimeFigureOut">
-              <a:rPr lang="el-GR" smtClean="0"/>
-              <a:t>18/4/2022</a:t>
+            <a:fld id="{5DDB4FAB-BF9E-489C-AE0E-F4FE448E7587}" type="datetimeFigureOut">
+              <a:rPr lang="nb-NO" smtClean="0"/>
+              <a:t>13.05.2022</a:t>
             </a:fld>
-            <a:endParaRPr lang="el-GR"/>
+            <a:endParaRPr lang="nb-NO"/>
           </a:p>
         </p:txBody>
       </p:sp>
@@ -1851,7 +1835,7 @@
           <a:bodyPr/>
           <a:lstStyle/>
           <a:p>
-            <a:endParaRPr lang="el-GR"/>
+            <a:endParaRPr lang="nb-NO"/>
           </a:p>
         </p:txBody>
       </p:sp>
@@ -1870,18 +1854,18 @@
           <a:bodyPr/>
           <a:lstStyle/>
           <a:p>
-            <a:fld id="{98DE7590-B40F-4748-B751-EBB86AFFAEC2}" type="slidenum">
-              <a:rPr lang="el-GR" smtClean="0"/>
+            <a:fld id="{644E7A17-C0D5-4824-AF87-B4C1390AAE69}" type="slidenum">
+              <a:rPr lang="nb-NO" smtClean="0"/>
               <a:t>‹#›</a:t>
             </a:fld>
-            <a:endParaRPr lang="el-GR"/>
+            <a:endParaRPr lang="nb-NO"/>
           </a:p>
         </p:txBody>
       </p:sp>
     </p:spTree>
     <p:extLst>
       <p:ext uri="{BB962C8B-B14F-4D97-AF65-F5344CB8AC3E}">
-        <p14:creationId xmlns:p14="http://schemas.microsoft.com/office/powerpoint/2010/main" val="1457462894"/>
+        <p14:creationId xmlns:p14="http://schemas.microsoft.com/office/powerpoint/2010/main" val="1280655500"/>
       </p:ext>
     </p:extLst>
   </p:cSld>
@@ -1920,15 +1904,15 @@
         </p:nvSpPr>
         <p:spPr>
           <a:xfrm>
-            <a:off x="396712" y="599969"/>
-            <a:ext cx="1857573" cy="2099892"/>
+            <a:off x="839789" y="552027"/>
+            <a:ext cx="3932237" cy="1932093"/>
           </a:xfrm>
         </p:spPr>
         <p:txBody>
           <a:bodyPr anchor="b"/>
           <a:lstStyle>
             <a:lvl1pPr>
-              <a:defRPr sz="2016"/>
+              <a:defRPr sz="3864"/>
             </a:lvl1pPr>
           </a:lstStyle>
           <a:p>
@@ -1952,39 +1936,39 @@
         </p:nvSpPr>
         <p:spPr>
           <a:xfrm>
-            <a:off x="2448516" y="1295769"/>
-            <a:ext cx="2915722" cy="6395505"/>
+            <a:off x="5183188" y="1192227"/>
+            <a:ext cx="6172200" cy="5884451"/>
           </a:xfrm>
         </p:spPr>
         <p:txBody>
           <a:bodyPr/>
           <a:lstStyle>
             <a:lvl1pPr>
-              <a:defRPr sz="2016"/>
+              <a:defRPr sz="3864"/>
             </a:lvl1pPr>
             <a:lvl2pPr>
-              <a:defRPr sz="1764"/>
+              <a:defRPr sz="3381"/>
             </a:lvl2pPr>
             <a:lvl3pPr>
-              <a:defRPr sz="1512"/>
+              <a:defRPr sz="2898"/>
             </a:lvl3pPr>
             <a:lvl4pPr>
-              <a:defRPr sz="1260"/>
+              <a:defRPr sz="2415"/>
             </a:lvl4pPr>
             <a:lvl5pPr>
-              <a:defRPr sz="1260"/>
+              <a:defRPr sz="2415"/>
             </a:lvl5pPr>
             <a:lvl6pPr>
-              <a:defRPr sz="1260"/>
+              <a:defRPr sz="2415"/>
             </a:lvl6pPr>
             <a:lvl7pPr>
-              <a:defRPr sz="1260"/>
+              <a:defRPr sz="2415"/>
             </a:lvl7pPr>
             <a:lvl8pPr>
-              <a:defRPr sz="1260"/>
+              <a:defRPr sz="2415"/>
             </a:lvl8pPr>
             <a:lvl9pPr>
-              <a:defRPr sz="1260"/>
+              <a:defRPr sz="2415"/>
             </a:lvl9pPr>
           </a:lstStyle>
           <a:p>
@@ -2037,8 +2021,8 @@
         </p:nvSpPr>
         <p:spPr>
           <a:xfrm>
-            <a:off x="396712" y="2699862"/>
-            <a:ext cx="1857573" cy="5001827"/>
+            <a:off x="839789" y="2484120"/>
+            <a:ext cx="3932237" cy="4602140"/>
           </a:xfrm>
         </p:spPr>
         <p:txBody>
@@ -2046,39 +2030,39 @@
           <a:lstStyle>
             <a:lvl1pPr marL="0" indent="0">
               <a:buNone/>
-              <a:defRPr sz="1008"/>
+              <a:defRPr sz="1932"/>
             </a:lvl1pPr>
-            <a:lvl2pPr marL="287990" indent="0">
-              <a:buNone/>
-              <a:defRPr sz="882"/>
+            <a:lvl2pPr marL="552022" indent="0">
+              <a:buNone/>
+              <a:defRPr sz="1690"/>
             </a:lvl2pPr>
-            <a:lvl3pPr marL="575981" indent="0">
-              <a:buNone/>
-              <a:defRPr sz="756"/>
+            <a:lvl3pPr marL="1104044" indent="0">
+              <a:buNone/>
+              <a:defRPr sz="1449"/>
             </a:lvl3pPr>
-            <a:lvl4pPr marL="863971" indent="0">
-              <a:buNone/>
-              <a:defRPr sz="630"/>
+            <a:lvl4pPr marL="1656067" indent="0">
+              <a:buNone/>
+              <a:defRPr sz="1207"/>
             </a:lvl4pPr>
-            <a:lvl5pPr marL="1151961" indent="0">
-              <a:buNone/>
-              <a:defRPr sz="630"/>
+            <a:lvl5pPr marL="2208088" indent="0">
+              <a:buNone/>
+              <a:defRPr sz="1207"/>
             </a:lvl5pPr>
-            <a:lvl6pPr marL="1439951" indent="0">
-              <a:buNone/>
-              <a:defRPr sz="630"/>
+            <a:lvl6pPr marL="2760110" indent="0">
+              <a:buNone/>
+              <a:defRPr sz="1207"/>
             </a:lvl6pPr>
-            <a:lvl7pPr marL="1727942" indent="0">
-              <a:buNone/>
-              <a:defRPr sz="630"/>
+            <a:lvl7pPr marL="3312133" indent="0">
+              <a:buNone/>
+              <a:defRPr sz="1207"/>
             </a:lvl7pPr>
-            <a:lvl8pPr marL="2015932" indent="0">
-              <a:buNone/>
-              <a:defRPr sz="630"/>
+            <a:lvl8pPr marL="3864154" indent="0">
+              <a:buNone/>
+              <a:defRPr sz="1207"/>
             </a:lvl8pPr>
-            <a:lvl9pPr marL="2303922" indent="0">
-              <a:buNone/>
-              <a:defRPr sz="630"/>
+            <a:lvl9pPr marL="4416177" indent="0">
+              <a:buNone/>
+              <a:defRPr sz="1207"/>
             </a:lvl9pPr>
           </a:lstStyle>
           <a:p>
@@ -2105,11 +2089,11 @@
           <a:bodyPr/>
           <a:lstStyle/>
           <a:p>
-            <a:fld id="{6B954015-A75A-4F9C-8FD1-6C02F3E98E5C}" type="datetimeFigureOut">
-              <a:rPr lang="el-GR" smtClean="0"/>
-              <a:t>18/4/2022</a:t>
+            <a:fld id="{5DDB4FAB-BF9E-489C-AE0E-F4FE448E7587}" type="datetimeFigureOut">
+              <a:rPr lang="nb-NO" smtClean="0"/>
+              <a:t>13.05.2022</a:t>
             </a:fld>
-            <a:endParaRPr lang="el-GR"/>
+            <a:endParaRPr lang="nb-NO"/>
           </a:p>
         </p:txBody>
       </p:sp>
@@ -2128,7 +2112,7 @@
           <a:bodyPr/>
           <a:lstStyle/>
           <a:p>
-            <a:endParaRPr lang="el-GR"/>
+            <a:endParaRPr lang="nb-NO"/>
           </a:p>
         </p:txBody>
       </p:sp>
@@ -2147,18 +2131,18 @@
           <a:bodyPr/>
           <a:lstStyle/>
           <a:p>
-            <a:fld id="{98DE7590-B40F-4748-B751-EBB86AFFAEC2}" type="slidenum">
-              <a:rPr lang="el-GR" smtClean="0"/>
+            <a:fld id="{644E7A17-C0D5-4824-AF87-B4C1390AAE69}" type="slidenum">
+              <a:rPr lang="nb-NO" smtClean="0"/>
               <a:t>‹#›</a:t>
             </a:fld>
-            <a:endParaRPr lang="el-GR"/>
+            <a:endParaRPr lang="nb-NO"/>
           </a:p>
         </p:txBody>
       </p:sp>
     </p:spTree>
     <p:extLst>
       <p:ext uri="{BB962C8B-B14F-4D97-AF65-F5344CB8AC3E}">
-        <p14:creationId xmlns:p14="http://schemas.microsoft.com/office/powerpoint/2010/main" val="1820842745"/>
+        <p14:creationId xmlns:p14="http://schemas.microsoft.com/office/powerpoint/2010/main" val="2125214948"/>
       </p:ext>
     </p:extLst>
   </p:cSld>
@@ -2197,15 +2181,15 @@
         </p:nvSpPr>
         <p:spPr>
           <a:xfrm>
-            <a:off x="396712" y="599969"/>
-            <a:ext cx="1857573" cy="2099892"/>
+            <a:off x="839789" y="552027"/>
+            <a:ext cx="3932237" cy="1932093"/>
           </a:xfrm>
         </p:spPr>
         <p:txBody>
           <a:bodyPr anchor="b"/>
           <a:lstStyle>
             <a:lvl1pPr>
-              <a:defRPr sz="2016"/>
+              <a:defRPr sz="3864"/>
             </a:lvl1pPr>
           </a:lstStyle>
           <a:p>
@@ -2229,8 +2213,8 @@
         </p:nvSpPr>
         <p:spPr>
           <a:xfrm>
-            <a:off x="2448516" y="1295769"/>
-            <a:ext cx="2915722" cy="6395505"/>
+            <a:off x="5183188" y="1192227"/>
+            <a:ext cx="6172200" cy="5884451"/>
           </a:xfrm>
         </p:spPr>
         <p:txBody>
@@ -2238,39 +2222,39 @@
           <a:lstStyle>
             <a:lvl1pPr marL="0" indent="0">
               <a:buNone/>
-              <a:defRPr sz="2016"/>
+              <a:defRPr sz="3864"/>
             </a:lvl1pPr>
-            <a:lvl2pPr marL="287990" indent="0">
-              <a:buNone/>
-              <a:defRPr sz="1764"/>
+            <a:lvl2pPr marL="552022" indent="0">
+              <a:buNone/>
+              <a:defRPr sz="3381"/>
             </a:lvl2pPr>
-            <a:lvl3pPr marL="575981" indent="0">
-              <a:buNone/>
-              <a:defRPr sz="1512"/>
+            <a:lvl3pPr marL="1104044" indent="0">
+              <a:buNone/>
+              <a:defRPr sz="2898"/>
             </a:lvl3pPr>
-            <a:lvl4pPr marL="863971" indent="0">
-              <a:buNone/>
-              <a:defRPr sz="1260"/>
+            <a:lvl4pPr marL="1656067" indent="0">
+              <a:buNone/>
+              <a:defRPr sz="2415"/>
             </a:lvl4pPr>
-            <a:lvl5pPr marL="1151961" indent="0">
-              <a:buNone/>
-              <a:defRPr sz="1260"/>
+            <a:lvl5pPr marL="2208088" indent="0">
+              <a:buNone/>
+              <a:defRPr sz="2415"/>
             </a:lvl5pPr>
-            <a:lvl6pPr marL="1439951" indent="0">
-              <a:buNone/>
-              <a:defRPr sz="1260"/>
+            <a:lvl6pPr marL="2760110" indent="0">
+              <a:buNone/>
+              <a:defRPr sz="2415"/>
             </a:lvl6pPr>
-            <a:lvl7pPr marL="1727942" indent="0">
-              <a:buNone/>
-              <a:defRPr sz="1260"/>
+            <a:lvl7pPr marL="3312133" indent="0">
+              <a:buNone/>
+              <a:defRPr sz="2415"/>
             </a:lvl7pPr>
-            <a:lvl8pPr marL="2015932" indent="0">
-              <a:buNone/>
-              <a:defRPr sz="1260"/>
+            <a:lvl8pPr marL="3864154" indent="0">
+              <a:buNone/>
+              <a:defRPr sz="2415"/>
             </a:lvl8pPr>
-            <a:lvl9pPr marL="2303922" indent="0">
-              <a:buNone/>
-              <a:defRPr sz="1260"/>
+            <a:lvl9pPr marL="4416177" indent="0">
+              <a:buNone/>
+              <a:defRPr sz="2415"/>
             </a:lvl9pPr>
           </a:lstStyle>
           <a:p>
@@ -2294,8 +2278,8 @@
         </p:nvSpPr>
         <p:spPr>
           <a:xfrm>
-            <a:off x="396712" y="2699862"/>
-            <a:ext cx="1857573" cy="5001827"/>
+            <a:off x="839789" y="2484120"/>
+            <a:ext cx="3932237" cy="4602140"/>
           </a:xfrm>
         </p:spPr>
         <p:txBody>
@@ -2303,39 +2287,39 @@
           <a:lstStyle>
             <a:lvl1pPr marL="0" indent="0">
               <a:buNone/>
-              <a:defRPr sz="1008"/>
+              <a:defRPr sz="1932"/>
             </a:lvl1pPr>
-            <a:lvl2pPr marL="287990" indent="0">
-              <a:buNone/>
-              <a:defRPr sz="882"/>
+            <a:lvl2pPr marL="552022" indent="0">
+              <a:buNone/>
+              <a:defRPr sz="1690"/>
             </a:lvl2pPr>
-            <a:lvl3pPr marL="575981" indent="0">
-              <a:buNone/>
-              <a:defRPr sz="756"/>
+            <a:lvl3pPr marL="1104044" indent="0">
+              <a:buNone/>
+              <a:defRPr sz="1449"/>
             </a:lvl3pPr>
-            <a:lvl4pPr marL="863971" indent="0">
-              <a:buNone/>
-              <a:defRPr sz="630"/>
+            <a:lvl4pPr marL="1656067" indent="0">
+              <a:buNone/>
+              <a:defRPr sz="1207"/>
             </a:lvl4pPr>
-            <a:lvl5pPr marL="1151961" indent="0">
-              <a:buNone/>
-              <a:defRPr sz="630"/>
+            <a:lvl5pPr marL="2208088" indent="0">
+              <a:buNone/>
+              <a:defRPr sz="1207"/>
             </a:lvl5pPr>
-            <a:lvl6pPr marL="1439951" indent="0">
-              <a:buNone/>
-              <a:defRPr sz="630"/>
+            <a:lvl6pPr marL="2760110" indent="0">
+              <a:buNone/>
+              <a:defRPr sz="1207"/>
             </a:lvl6pPr>
-            <a:lvl7pPr marL="1727942" indent="0">
-              <a:buNone/>
-              <a:defRPr sz="630"/>
+            <a:lvl7pPr marL="3312133" indent="0">
+              <a:buNone/>
+              <a:defRPr sz="1207"/>
             </a:lvl7pPr>
-            <a:lvl8pPr marL="2015932" indent="0">
-              <a:buNone/>
-              <a:defRPr sz="630"/>
+            <a:lvl8pPr marL="3864154" indent="0">
+              <a:buNone/>
+              <a:defRPr sz="1207"/>
             </a:lvl8pPr>
-            <a:lvl9pPr marL="2303922" indent="0">
-              <a:buNone/>
-              <a:defRPr sz="630"/>
+            <a:lvl9pPr marL="4416177" indent="0">
+              <a:buNone/>
+              <a:defRPr sz="1207"/>
             </a:lvl9pPr>
           </a:lstStyle>
           <a:p>
@@ -2362,11 +2346,11 @@
           <a:bodyPr/>
           <a:lstStyle/>
           <a:p>
-            <a:fld id="{6B954015-A75A-4F9C-8FD1-6C02F3E98E5C}" type="datetimeFigureOut">
-              <a:rPr lang="el-GR" smtClean="0"/>
-              <a:t>18/4/2022</a:t>
+            <a:fld id="{5DDB4FAB-BF9E-489C-AE0E-F4FE448E7587}" type="datetimeFigureOut">
+              <a:rPr lang="nb-NO" smtClean="0"/>
+              <a:t>13.05.2022</a:t>
             </a:fld>
-            <a:endParaRPr lang="el-GR"/>
+            <a:endParaRPr lang="nb-NO"/>
           </a:p>
         </p:txBody>
       </p:sp>
@@ -2385,7 +2369,7 @@
           <a:bodyPr/>
           <a:lstStyle/>
           <a:p>
-            <a:endParaRPr lang="el-GR"/>
+            <a:endParaRPr lang="nb-NO"/>
           </a:p>
         </p:txBody>
       </p:sp>
@@ -2404,18 +2388,18 @@
           <a:bodyPr/>
           <a:lstStyle/>
           <a:p>
-            <a:fld id="{98DE7590-B40F-4748-B751-EBB86AFFAEC2}" type="slidenum">
-              <a:rPr lang="el-GR" smtClean="0"/>
+            <a:fld id="{644E7A17-C0D5-4824-AF87-B4C1390AAE69}" type="slidenum">
+              <a:rPr lang="nb-NO" smtClean="0"/>
               <a:t>‹#›</a:t>
             </a:fld>
-            <a:endParaRPr lang="el-GR"/>
+            <a:endParaRPr lang="nb-NO"/>
           </a:p>
         </p:txBody>
       </p:sp>
     </p:spTree>
     <p:extLst>
       <p:ext uri="{BB962C8B-B14F-4D97-AF65-F5344CB8AC3E}">
-        <p14:creationId xmlns:p14="http://schemas.microsoft.com/office/powerpoint/2010/main" val="2924065990"/>
+        <p14:creationId xmlns:p14="http://schemas.microsoft.com/office/powerpoint/2010/main" val="3161917535"/>
       </p:ext>
     </p:extLst>
   </p:cSld>
@@ -2459,8 +2443,8 @@
         </p:nvSpPr>
         <p:spPr>
           <a:xfrm>
-            <a:off x="395962" y="479144"/>
-            <a:ext cx="4967526" cy="1739495"/>
+            <a:off x="838200" y="440856"/>
+            <a:ext cx="10515600" cy="1600495"/>
           </a:xfrm>
           <a:prstGeom prst="rect">
             <a:avLst/>
@@ -2492,8 +2476,8 @@
         </p:nvSpPr>
         <p:spPr>
           <a:xfrm>
-            <a:off x="395962" y="2395710"/>
-            <a:ext cx="4967526" cy="5710124"/>
+            <a:off x="838200" y="2204274"/>
+            <a:ext cx="10515600" cy="5253838"/>
           </a:xfrm>
           <a:prstGeom prst="rect">
             <a:avLst/>
@@ -2554,8 +2538,8 @@
         </p:nvSpPr>
         <p:spPr>
           <a:xfrm>
-            <a:off x="395962" y="8341240"/>
-            <a:ext cx="1295876" cy="479142"/>
+            <a:off x="838200" y="7674707"/>
+            <a:ext cx="2743200" cy="440855"/>
           </a:xfrm>
           <a:prstGeom prst="rect">
             <a:avLst/>
@@ -2565,7 +2549,7 @@
           <a:bodyPr vert="horz" lIns="91440" tIns="45720" rIns="91440" bIns="45720" rtlCol="0" anchor="ctr"/>
           <a:lstStyle>
             <a:lvl1pPr algn="l">
-              <a:defRPr sz="756">
+              <a:defRPr sz="1449">
                 <a:solidFill>
                   <a:schemeClr val="tx1">
                     <a:tint val="75000"/>
@@ -2575,11 +2559,11 @@
             </a:lvl1pPr>
           </a:lstStyle>
           <a:p>
-            <a:fld id="{6B954015-A75A-4F9C-8FD1-6C02F3E98E5C}" type="datetimeFigureOut">
-              <a:rPr lang="el-GR" smtClean="0"/>
-              <a:t>18/4/2022</a:t>
+            <a:fld id="{5DDB4FAB-BF9E-489C-AE0E-F4FE448E7587}" type="datetimeFigureOut">
+              <a:rPr lang="nb-NO" smtClean="0"/>
+              <a:t>13.05.2022</a:t>
             </a:fld>
-            <a:endParaRPr lang="el-GR"/>
+            <a:endParaRPr lang="nb-NO"/>
           </a:p>
         </p:txBody>
       </p:sp>
@@ -2595,8 +2579,8 @@
         </p:nvSpPr>
         <p:spPr>
           <a:xfrm>
-            <a:off x="1907818" y="8341240"/>
-            <a:ext cx="1943814" cy="479142"/>
+            <a:off x="4038600" y="7674707"/>
+            <a:ext cx="4114800" cy="440855"/>
           </a:xfrm>
           <a:prstGeom prst="rect">
             <a:avLst/>
@@ -2606,7 +2590,7 @@
           <a:bodyPr vert="horz" lIns="91440" tIns="45720" rIns="91440" bIns="45720" rtlCol="0" anchor="ctr"/>
           <a:lstStyle>
             <a:lvl1pPr algn="ctr">
-              <a:defRPr sz="756">
+              <a:defRPr sz="1449">
                 <a:solidFill>
                   <a:schemeClr val="tx1">
                     <a:tint val="75000"/>
@@ -2616,7 +2600,7 @@
             </a:lvl1pPr>
           </a:lstStyle>
           <a:p>
-            <a:endParaRPr lang="el-GR"/>
+            <a:endParaRPr lang="nb-NO"/>
           </a:p>
         </p:txBody>
       </p:sp>
@@ -2632,8 +2616,8 @@
         </p:nvSpPr>
         <p:spPr>
           <a:xfrm>
-            <a:off x="4067612" y="8341240"/>
-            <a:ext cx="1295876" cy="479142"/>
+            <a:off x="8610600" y="7674707"/>
+            <a:ext cx="2743200" cy="440855"/>
           </a:xfrm>
           <a:prstGeom prst="rect">
             <a:avLst/>
@@ -2643,7 +2627,7 @@
           <a:bodyPr vert="horz" lIns="91440" tIns="45720" rIns="91440" bIns="45720" rtlCol="0" anchor="ctr"/>
           <a:lstStyle>
             <a:lvl1pPr algn="r">
-              <a:defRPr sz="756">
+              <a:defRPr sz="1449">
                 <a:solidFill>
                   <a:schemeClr val="tx1">
                     <a:tint val="75000"/>
@@ -2653,38 +2637,38 @@
             </a:lvl1pPr>
           </a:lstStyle>
           <a:p>
-            <a:fld id="{98DE7590-B40F-4748-B751-EBB86AFFAEC2}" type="slidenum">
-              <a:rPr lang="el-GR" smtClean="0"/>
+            <a:fld id="{644E7A17-C0D5-4824-AF87-B4C1390AAE69}" type="slidenum">
+              <a:rPr lang="nb-NO" smtClean="0"/>
               <a:t>‹#›</a:t>
             </a:fld>
-            <a:endParaRPr lang="el-GR"/>
+            <a:endParaRPr lang="nb-NO"/>
           </a:p>
         </p:txBody>
       </p:sp>
     </p:spTree>
     <p:extLst>
       <p:ext uri="{BB962C8B-B14F-4D97-AF65-F5344CB8AC3E}">
-        <p14:creationId xmlns:p14="http://schemas.microsoft.com/office/powerpoint/2010/main" val="2372585098"/>
+        <p14:creationId xmlns:p14="http://schemas.microsoft.com/office/powerpoint/2010/main" val="683809889"/>
       </p:ext>
     </p:extLst>
   </p:cSld>
   <p:clrMap bg1="lt1" tx1="dk1" bg2="lt2" tx2="dk2" accent1="accent1" accent2="accent2" accent3="accent3" accent4="accent4" accent5="accent5" accent6="accent6" hlink="hlink" folHlink="folHlink"/>
   <p:sldLayoutIdLst>
-    <p:sldLayoutId id="2147483817" r:id="rId1"/>
-    <p:sldLayoutId id="2147483818" r:id="rId2"/>
-    <p:sldLayoutId id="2147483819" r:id="rId3"/>
-    <p:sldLayoutId id="2147483820" r:id="rId4"/>
-    <p:sldLayoutId id="2147483821" r:id="rId5"/>
-    <p:sldLayoutId id="2147483822" r:id="rId6"/>
-    <p:sldLayoutId id="2147483823" r:id="rId7"/>
-    <p:sldLayoutId id="2147483824" r:id="rId8"/>
-    <p:sldLayoutId id="2147483825" r:id="rId9"/>
-    <p:sldLayoutId id="2147483826" r:id="rId10"/>
-    <p:sldLayoutId id="2147483827" r:id="rId11"/>
+    <p:sldLayoutId id="2147483661" r:id="rId1"/>
+    <p:sldLayoutId id="2147483662" r:id="rId2"/>
+    <p:sldLayoutId id="2147483663" r:id="rId3"/>
+    <p:sldLayoutId id="2147483664" r:id="rId4"/>
+    <p:sldLayoutId id="2147483665" r:id="rId5"/>
+    <p:sldLayoutId id="2147483666" r:id="rId6"/>
+    <p:sldLayoutId id="2147483667" r:id="rId7"/>
+    <p:sldLayoutId id="2147483668" r:id="rId8"/>
+    <p:sldLayoutId id="2147483669" r:id="rId9"/>
+    <p:sldLayoutId id="2147483670" r:id="rId10"/>
+    <p:sldLayoutId id="2147483671" r:id="rId11"/>
   </p:sldLayoutIdLst>
   <p:txStyles>
     <p:titleStyle>
-      <a:lvl1pPr algn="l" defTabSz="575981" rtl="0" eaLnBrk="1" latinLnBrk="0" hangingPunct="1">
+      <a:lvl1pPr algn="l" defTabSz="1104044" rtl="0" eaLnBrk="1" latinLnBrk="0" hangingPunct="1">
         <a:lnSpc>
           <a:spcPct val="90000"/>
         </a:lnSpc>
@@ -2692,7 +2676,7 @@
           <a:spcPct val="0"/>
         </a:spcBef>
         <a:buNone/>
-        <a:defRPr sz="2772" kern="1200">
+        <a:defRPr sz="5313" kern="1200">
           <a:solidFill>
             <a:schemeClr val="tx1"/>
           </a:solidFill>
@@ -2703,16 +2687,16 @@
       </a:lvl1pPr>
     </p:titleStyle>
     <p:bodyStyle>
-      <a:lvl1pPr marL="143995" indent="-143995" algn="l" defTabSz="575981" rtl="0" eaLnBrk="1" latinLnBrk="0" hangingPunct="1">
+      <a:lvl1pPr marL="276011" indent="-276011" algn="l" defTabSz="1104044" rtl="0" eaLnBrk="1" latinLnBrk="0" hangingPunct="1">
         <a:lnSpc>
           <a:spcPct val="90000"/>
         </a:lnSpc>
         <a:spcBef>
-          <a:spcPts val="630"/>
+          <a:spcPts val="1207"/>
         </a:spcBef>
         <a:buFont typeface="Arial" panose="020B0604020202020204" pitchFamily="34" charset="0"/>
         <a:buChar char="•"/>
-        <a:defRPr sz="1764" kern="1200">
+        <a:defRPr sz="3381" kern="1200">
           <a:solidFill>
             <a:schemeClr val="tx1"/>
           </a:solidFill>
@@ -2721,16 +2705,16 @@
           <a:cs typeface="+mn-cs"/>
         </a:defRPr>
       </a:lvl1pPr>
-      <a:lvl2pPr marL="431985" indent="-143995" algn="l" defTabSz="575981" rtl="0" eaLnBrk="1" latinLnBrk="0" hangingPunct="1">
+      <a:lvl2pPr marL="828033" indent="-276011" algn="l" defTabSz="1104044" rtl="0" eaLnBrk="1" latinLnBrk="0" hangingPunct="1">
         <a:lnSpc>
           <a:spcPct val="90000"/>
         </a:lnSpc>
         <a:spcBef>
-          <a:spcPts val="315"/>
+          <a:spcPts val="604"/>
         </a:spcBef>
         <a:buFont typeface="Arial" panose="020B0604020202020204" pitchFamily="34" charset="0"/>
         <a:buChar char="•"/>
-        <a:defRPr sz="1512" kern="1200">
+        <a:defRPr sz="2898" kern="1200">
           <a:solidFill>
             <a:schemeClr val="tx1"/>
           </a:solidFill>
@@ -2739,16 +2723,16 @@
           <a:cs typeface="+mn-cs"/>
         </a:defRPr>
       </a:lvl2pPr>
-      <a:lvl3pPr marL="719976" indent="-143995" algn="l" defTabSz="575981" rtl="0" eaLnBrk="1" latinLnBrk="0" hangingPunct="1">
+      <a:lvl3pPr marL="1380055" indent="-276011" algn="l" defTabSz="1104044" rtl="0" eaLnBrk="1" latinLnBrk="0" hangingPunct="1">
         <a:lnSpc>
           <a:spcPct val="90000"/>
         </a:lnSpc>
         <a:spcBef>
-          <a:spcPts val="315"/>
+          <a:spcPts val="604"/>
         </a:spcBef>
         <a:buFont typeface="Arial" panose="020B0604020202020204" pitchFamily="34" charset="0"/>
         <a:buChar char="•"/>
-        <a:defRPr sz="1260" kern="1200">
+        <a:defRPr sz="2415" kern="1200">
           <a:solidFill>
             <a:schemeClr val="tx1"/>
           </a:solidFill>
@@ -2757,16 +2741,16 @@
           <a:cs typeface="+mn-cs"/>
         </a:defRPr>
       </a:lvl3pPr>
-      <a:lvl4pPr marL="1007966" indent="-143995" algn="l" defTabSz="575981" rtl="0" eaLnBrk="1" latinLnBrk="0" hangingPunct="1">
+      <a:lvl4pPr marL="1932077" indent="-276011" algn="l" defTabSz="1104044" rtl="0" eaLnBrk="1" latinLnBrk="0" hangingPunct="1">
         <a:lnSpc>
           <a:spcPct val="90000"/>
         </a:lnSpc>
         <a:spcBef>
-          <a:spcPts val="315"/>
+          <a:spcPts val="604"/>
         </a:spcBef>
         <a:buFont typeface="Arial" panose="020B0604020202020204" pitchFamily="34" charset="0"/>
         <a:buChar char="•"/>
-        <a:defRPr sz="1134" kern="1200">
+        <a:defRPr sz="2173" kern="1200">
           <a:solidFill>
             <a:schemeClr val="tx1"/>
           </a:solidFill>
@@ -2775,16 +2759,16 @@
           <a:cs typeface="+mn-cs"/>
         </a:defRPr>
       </a:lvl4pPr>
-      <a:lvl5pPr marL="1295956" indent="-143995" algn="l" defTabSz="575981" rtl="0" eaLnBrk="1" latinLnBrk="0" hangingPunct="1">
+      <a:lvl5pPr marL="2484100" indent="-276011" algn="l" defTabSz="1104044" rtl="0" eaLnBrk="1" latinLnBrk="0" hangingPunct="1">
         <a:lnSpc>
           <a:spcPct val="90000"/>
         </a:lnSpc>
         <a:spcBef>
-          <a:spcPts val="315"/>
+          <a:spcPts val="604"/>
         </a:spcBef>
         <a:buFont typeface="Arial" panose="020B0604020202020204" pitchFamily="34" charset="0"/>
         <a:buChar char="•"/>
-        <a:defRPr sz="1134" kern="1200">
+        <a:defRPr sz="2173" kern="1200">
           <a:solidFill>
             <a:schemeClr val="tx1"/>
           </a:solidFill>
@@ -2793,16 +2777,16 @@
           <a:cs typeface="+mn-cs"/>
         </a:defRPr>
       </a:lvl5pPr>
-      <a:lvl6pPr marL="1583947" indent="-143995" algn="l" defTabSz="575981" rtl="0" eaLnBrk="1" latinLnBrk="0" hangingPunct="1">
+      <a:lvl6pPr marL="3036121" indent="-276011" algn="l" defTabSz="1104044" rtl="0" eaLnBrk="1" latinLnBrk="0" hangingPunct="1">
         <a:lnSpc>
           <a:spcPct val="90000"/>
         </a:lnSpc>
         <a:spcBef>
-          <a:spcPts val="315"/>
+          <a:spcPts val="604"/>
         </a:spcBef>
         <a:buFont typeface="Arial" panose="020B0604020202020204" pitchFamily="34" charset="0"/>
         <a:buChar char="•"/>
-        <a:defRPr sz="1134" kern="1200">
+        <a:defRPr sz="2173" kern="1200">
           <a:solidFill>
             <a:schemeClr val="tx1"/>
           </a:solidFill>
@@ -2811,16 +2795,16 @@
           <a:cs typeface="+mn-cs"/>
         </a:defRPr>
       </a:lvl6pPr>
-      <a:lvl7pPr marL="1871937" indent="-143995" algn="l" defTabSz="575981" rtl="0" eaLnBrk="1" latinLnBrk="0" hangingPunct="1">
+      <a:lvl7pPr marL="3588143" indent="-276011" algn="l" defTabSz="1104044" rtl="0" eaLnBrk="1" latinLnBrk="0" hangingPunct="1">
         <a:lnSpc>
           <a:spcPct val="90000"/>
         </a:lnSpc>
         <a:spcBef>
-          <a:spcPts val="315"/>
+          <a:spcPts val="604"/>
         </a:spcBef>
         <a:buFont typeface="Arial" panose="020B0604020202020204" pitchFamily="34" charset="0"/>
         <a:buChar char="•"/>
-        <a:defRPr sz="1134" kern="1200">
+        <a:defRPr sz="2173" kern="1200">
           <a:solidFill>
             <a:schemeClr val="tx1"/>
           </a:solidFill>
@@ -2829,16 +2813,16 @@
           <a:cs typeface="+mn-cs"/>
         </a:defRPr>
       </a:lvl7pPr>
-      <a:lvl8pPr marL="2159927" indent="-143995" algn="l" defTabSz="575981" rtl="0" eaLnBrk="1" latinLnBrk="0" hangingPunct="1">
+      <a:lvl8pPr marL="4140166" indent="-276011" algn="l" defTabSz="1104044" rtl="0" eaLnBrk="1" latinLnBrk="0" hangingPunct="1">
         <a:lnSpc>
           <a:spcPct val="90000"/>
         </a:lnSpc>
         <a:spcBef>
-          <a:spcPts val="315"/>
+          <a:spcPts val="604"/>
         </a:spcBef>
         <a:buFont typeface="Arial" panose="020B0604020202020204" pitchFamily="34" charset="0"/>
         <a:buChar char="•"/>
-        <a:defRPr sz="1134" kern="1200">
+        <a:defRPr sz="2173" kern="1200">
           <a:solidFill>
             <a:schemeClr val="tx1"/>
           </a:solidFill>
@@ -2847,16 +2831,16 @@
           <a:cs typeface="+mn-cs"/>
         </a:defRPr>
       </a:lvl8pPr>
-      <a:lvl9pPr marL="2447917" indent="-143995" algn="l" defTabSz="575981" rtl="0" eaLnBrk="1" latinLnBrk="0" hangingPunct="1">
+      <a:lvl9pPr marL="4692188" indent="-276011" algn="l" defTabSz="1104044" rtl="0" eaLnBrk="1" latinLnBrk="0" hangingPunct="1">
         <a:lnSpc>
           <a:spcPct val="90000"/>
         </a:lnSpc>
         <a:spcBef>
-          <a:spcPts val="315"/>
+          <a:spcPts val="604"/>
         </a:spcBef>
         <a:buFont typeface="Arial" panose="020B0604020202020204" pitchFamily="34" charset="0"/>
         <a:buChar char="•"/>
-        <a:defRPr sz="1134" kern="1200">
+        <a:defRPr sz="2173" kern="1200">
           <a:solidFill>
             <a:schemeClr val="tx1"/>
           </a:solidFill>
@@ -2870,8 +2854,8 @@
       <a:defPPr>
         <a:defRPr lang="en-US"/>
       </a:defPPr>
-      <a:lvl1pPr marL="0" algn="l" defTabSz="575981" rtl="0" eaLnBrk="1" latinLnBrk="0" hangingPunct="1">
-        <a:defRPr sz="1134" kern="1200">
+      <a:lvl1pPr marL="0" algn="l" defTabSz="1104044" rtl="0" eaLnBrk="1" latinLnBrk="0" hangingPunct="1">
+        <a:defRPr sz="2173" kern="1200">
           <a:solidFill>
             <a:schemeClr val="tx1"/>
           </a:solidFill>
@@ -2880,8 +2864,8 @@
           <a:cs typeface="+mn-cs"/>
         </a:defRPr>
       </a:lvl1pPr>
-      <a:lvl2pPr marL="287990" algn="l" defTabSz="575981" rtl="0" eaLnBrk="1" latinLnBrk="0" hangingPunct="1">
-        <a:defRPr sz="1134" kern="1200">
+      <a:lvl2pPr marL="552022" algn="l" defTabSz="1104044" rtl="0" eaLnBrk="1" latinLnBrk="0" hangingPunct="1">
+        <a:defRPr sz="2173" kern="1200">
           <a:solidFill>
             <a:schemeClr val="tx1"/>
           </a:solidFill>
@@ -2890,8 +2874,8 @@
           <a:cs typeface="+mn-cs"/>
         </a:defRPr>
       </a:lvl2pPr>
-      <a:lvl3pPr marL="575981" algn="l" defTabSz="575981" rtl="0" eaLnBrk="1" latinLnBrk="0" hangingPunct="1">
-        <a:defRPr sz="1134" kern="1200">
+      <a:lvl3pPr marL="1104044" algn="l" defTabSz="1104044" rtl="0" eaLnBrk="1" latinLnBrk="0" hangingPunct="1">
+        <a:defRPr sz="2173" kern="1200">
           <a:solidFill>
             <a:schemeClr val="tx1"/>
           </a:solidFill>
@@ -2900,8 +2884,8 @@
           <a:cs typeface="+mn-cs"/>
         </a:defRPr>
       </a:lvl3pPr>
-      <a:lvl4pPr marL="863971" algn="l" defTabSz="575981" rtl="0" eaLnBrk="1" latinLnBrk="0" hangingPunct="1">
-        <a:defRPr sz="1134" kern="1200">
+      <a:lvl4pPr marL="1656067" algn="l" defTabSz="1104044" rtl="0" eaLnBrk="1" latinLnBrk="0" hangingPunct="1">
+        <a:defRPr sz="2173" kern="1200">
           <a:solidFill>
             <a:schemeClr val="tx1"/>
           </a:solidFill>
@@ -2910,8 +2894,8 @@
           <a:cs typeface="+mn-cs"/>
         </a:defRPr>
       </a:lvl4pPr>
-      <a:lvl5pPr marL="1151961" algn="l" defTabSz="575981" rtl="0" eaLnBrk="1" latinLnBrk="0" hangingPunct="1">
-        <a:defRPr sz="1134" kern="1200">
+      <a:lvl5pPr marL="2208088" algn="l" defTabSz="1104044" rtl="0" eaLnBrk="1" latinLnBrk="0" hangingPunct="1">
+        <a:defRPr sz="2173" kern="1200">
           <a:solidFill>
             <a:schemeClr val="tx1"/>
           </a:solidFill>
@@ -2920,8 +2904,8 @@
           <a:cs typeface="+mn-cs"/>
         </a:defRPr>
       </a:lvl5pPr>
-      <a:lvl6pPr marL="1439951" algn="l" defTabSz="575981" rtl="0" eaLnBrk="1" latinLnBrk="0" hangingPunct="1">
-        <a:defRPr sz="1134" kern="1200">
+      <a:lvl6pPr marL="2760110" algn="l" defTabSz="1104044" rtl="0" eaLnBrk="1" latinLnBrk="0" hangingPunct="1">
+        <a:defRPr sz="2173" kern="1200">
           <a:solidFill>
             <a:schemeClr val="tx1"/>
           </a:solidFill>
@@ -2930,8 +2914,8 @@
           <a:cs typeface="+mn-cs"/>
         </a:defRPr>
       </a:lvl6pPr>
-      <a:lvl7pPr marL="1727942" algn="l" defTabSz="575981" rtl="0" eaLnBrk="1" latinLnBrk="0" hangingPunct="1">
-        <a:defRPr sz="1134" kern="1200">
+      <a:lvl7pPr marL="3312133" algn="l" defTabSz="1104044" rtl="0" eaLnBrk="1" latinLnBrk="0" hangingPunct="1">
+        <a:defRPr sz="2173" kern="1200">
           <a:solidFill>
             <a:schemeClr val="tx1"/>
           </a:solidFill>
@@ -2940,8 +2924,8 @@
           <a:cs typeface="+mn-cs"/>
         </a:defRPr>
       </a:lvl7pPr>
-      <a:lvl8pPr marL="2015932" algn="l" defTabSz="575981" rtl="0" eaLnBrk="1" latinLnBrk="0" hangingPunct="1">
-        <a:defRPr sz="1134" kern="1200">
+      <a:lvl8pPr marL="3864154" algn="l" defTabSz="1104044" rtl="0" eaLnBrk="1" latinLnBrk="0" hangingPunct="1">
+        <a:defRPr sz="2173" kern="1200">
           <a:solidFill>
             <a:schemeClr val="tx1"/>
           </a:solidFill>
@@ -2950,8 +2934,8 @@
           <a:cs typeface="+mn-cs"/>
         </a:defRPr>
       </a:lvl8pPr>
-      <a:lvl9pPr marL="2303922" algn="l" defTabSz="575981" rtl="0" eaLnBrk="1" latinLnBrk="0" hangingPunct="1">
-        <a:defRPr sz="1134" kern="1200">
+      <a:lvl9pPr marL="4416177" algn="l" defTabSz="1104044" rtl="0" eaLnBrk="1" latinLnBrk="0" hangingPunct="1">
+        <a:defRPr sz="2173" kern="1200">
           <a:solidFill>
             <a:schemeClr val="tx1"/>
           </a:solidFill>
@@ -2984,10 +2968,10 @@
       </p:grpSpPr>
       <p:sp>
         <p:nvSpPr>
-          <p:cNvPr id="34" name="Text Box 11">
+          <p:cNvPr id="2080" name="Text Box 37">
             <a:extLst>
               <a:ext uri="{FF2B5EF4-FFF2-40B4-BE49-F238E27FC236}">
-                <a16:creationId xmlns:a16="http://schemas.microsoft.com/office/drawing/2014/main" id="{3241D3D7-BA40-4EEF-B6F9-B3B9F754CDCA}"/>
+                <a16:creationId xmlns:a16="http://schemas.microsoft.com/office/drawing/2014/main" id="{3EF69E88-167B-4EC3-A300-A000A4324038}"/>
               </a:ext>
             </a:extLst>
           </p:cNvPr>
@@ -2998,8 +2982,8 @@
         </p:nvSpPr>
         <p:spPr bwMode="auto">
           <a:xfrm>
-            <a:off x="865006" y="2285911"/>
-            <a:ext cx="2360209" cy="356258"/>
+            <a:off x="8923169" y="5787160"/>
+            <a:ext cx="1914300" cy="276225"/>
           </a:xfrm>
           <a:prstGeom prst="rect">
             <a:avLst/>
@@ -3007,7 +2991,7 @@
           <a:solidFill>
             <a:srgbClr val="FFFFFF"/>
           </a:solidFill>
-          <a:ln w="9525">
+          <a:ln w="12700">
             <a:solidFill>
               <a:srgbClr val="000000"/>
             </a:solidFill>
@@ -3017,49 +3001,52 @@
           </a:ln>
         </p:spPr>
         <p:txBody>
-          <a:bodyPr vert="horz" wrap="square" lIns="58297" tIns="29149" rIns="58297" bIns="29149" numCol="1" anchor="t" anchorCtr="0" compatLnSpc="1">
+          <a:bodyPr vert="horz" wrap="square" lIns="91440" tIns="45720" rIns="91440" bIns="45720" numCol="1" anchor="t" anchorCtr="0" compatLnSpc="1">
             <a:prstTxWarp prst="textNoShape">
               <a:avLst/>
             </a:prstTxWarp>
           </a:bodyPr>
           <a:lstStyle/>
           <a:p>
-            <a:pPr algn="ctr" defTabSz="582962" eaLnBrk="0" fontAlgn="base" hangingPunct="0">
+            <a:pPr marL="0" marR="0" lvl="0" indent="0" algn="l" defTabSz="914400" rtl="0" eaLnBrk="0" fontAlgn="base" latinLnBrk="0" hangingPunct="0">
+              <a:lnSpc>
+                <a:spcPct val="100000"/>
+              </a:lnSpc>
               <a:spcBef>
                 <a:spcPct val="0"/>
               </a:spcBef>
               <a:spcAft>
                 <a:spcPct val="0"/>
               </a:spcAft>
+              <a:buClrTx/>
+              <a:buSzTx/>
+              <a:buFontTx/>
+              <a:buNone/>
+              <a:tabLst/>
             </a:pPr>
             <a:r>
-              <a:rPr lang="en-US" altLang="el-GR" sz="1021">
-                <a:latin typeface="Arial" panose="020B0604020202020204" pitchFamily="34" charset="0"/>
-                <a:ea typeface="Times New Roman" panose="02020603050405020304" pitchFamily="18" charset="0"/>
-                <a:cs typeface="Arial" panose="020B0604020202020204" pitchFamily="34" charset="0"/>
+              <a:rPr kumimoji="0" lang="en-US" altLang="nb-NO" sz="1100" b="0" i="0" u="none" strike="noStrike" cap="none" normalizeH="0" baseline="0" dirty="0">
+                <a:ln>
+                  <a:noFill/>
+                </a:ln>
+                <a:solidFill>
+                  <a:schemeClr val="tx1"/>
+                </a:solidFill>
+                <a:effectLst/>
+                <a:latin typeface="Calibri" panose="020F0502020204030204" pitchFamily="34" charset="0"/>
+                <a:ea typeface="Calibri" panose="020F0502020204030204" pitchFamily="34" charset="0"/>
+                <a:cs typeface="Times New Roman" panose="02020603050405020304" pitchFamily="18" charset="0"/>
               </a:rPr>
-              <a:t>Sort sample according to species</a:t>
-            </a:r>
-            <a:endParaRPr lang="en-US" altLang="el-GR" sz="382"/>
-          </a:p>
-          <a:p>
-            <a:pPr algn="ctr" defTabSz="582962" eaLnBrk="0" fontAlgn="base" hangingPunct="0">
-              <a:spcBef>
-                <a:spcPct val="0"/>
-              </a:spcBef>
-              <a:spcAft>
-                <a:spcPct val="0"/>
-              </a:spcAft>
-            </a:pPr>
-            <a:r>
-              <a:rPr lang="en-US" altLang="el-GR" sz="766">
-                <a:latin typeface="Arial" panose="020B0604020202020204" pitchFamily="34" charset="0"/>
-                <a:ea typeface="Times New Roman" panose="02020603050405020304" pitchFamily="18" charset="0"/>
-                <a:cs typeface="Arial" panose="020B0604020202020204" pitchFamily="34" charset="0"/>
-              </a:rPr>
-              <a:t>Record total weight &amp; total number per species</a:t>
-            </a:r>
-            <a:endParaRPr lang="en-US" altLang="el-GR" sz="1149">
+              <a:t>Pollutant -&gt; whole fish frozen</a:t>
+            </a:r>
+            <a:endParaRPr kumimoji="0" lang="en-US" altLang="nb-NO" sz="1800" b="0" i="0" u="none" strike="noStrike" cap="none" normalizeH="0" baseline="0" dirty="0">
+              <a:ln>
+                <a:noFill/>
+              </a:ln>
+              <a:solidFill>
+                <a:schemeClr val="tx1"/>
+              </a:solidFill>
+              <a:effectLst/>
               <a:latin typeface="Arial" panose="020B0604020202020204" pitchFamily="34" charset="0"/>
             </a:endParaRPr>
           </a:p>
@@ -3067,10 +3054,10 @@
       </p:sp>
       <p:sp>
         <p:nvSpPr>
-          <p:cNvPr id="35" name="Text Box 1858232838">
+          <p:cNvPr id="2082" name="Text Box 36">
             <a:extLst>
               <a:ext uri="{FF2B5EF4-FFF2-40B4-BE49-F238E27FC236}">
-                <a16:creationId xmlns:a16="http://schemas.microsoft.com/office/drawing/2014/main" id="{192A343A-9F51-49F4-AAF9-F704CF135225}"/>
+                <a16:creationId xmlns:a16="http://schemas.microsoft.com/office/drawing/2014/main" id="{429A2C2A-BF8B-460D-95F9-620C259618B6}"/>
               </a:ext>
             </a:extLst>
           </p:cNvPr>
@@ -3081,8 +3068,8 @@
         </p:nvSpPr>
         <p:spPr bwMode="auto">
           <a:xfrm>
-            <a:off x="2804381" y="4394736"/>
-            <a:ext cx="1210468" cy="514145"/>
+            <a:off x="5152130" y="6421437"/>
+            <a:ext cx="1915161" cy="238125"/>
           </a:xfrm>
           <a:prstGeom prst="rect">
             <a:avLst/>
@@ -3090,7 +3077,7 @@
           <a:solidFill>
             <a:srgbClr val="FFFFFF"/>
           </a:solidFill>
-          <a:ln w="9525">
+          <a:ln w="12700">
             <a:solidFill>
               <a:srgbClr val="000000"/>
             </a:solidFill>
@@ -3100,1094 +3087,2622 @@
           </a:ln>
         </p:spPr>
         <p:txBody>
-          <a:bodyPr vert="horz" wrap="square" lIns="58297" tIns="29149" rIns="58297" bIns="29149" numCol="1" anchor="t" anchorCtr="0" compatLnSpc="1">
+          <a:bodyPr vert="horz" wrap="square" lIns="91440" tIns="45720" rIns="91440" bIns="45720" numCol="1" anchor="t" anchorCtr="0" compatLnSpc="1">
             <a:prstTxWarp prst="textNoShape">
               <a:avLst/>
             </a:prstTxWarp>
           </a:bodyPr>
           <a:lstStyle/>
           <a:p>
-            <a:pPr algn="ctr" defTabSz="582962" eaLnBrk="0" fontAlgn="base" hangingPunct="0">
+            <a:pPr marL="0" marR="0" lvl="0" indent="0" algn="l" defTabSz="914400" rtl="0" eaLnBrk="0" fontAlgn="base" latinLnBrk="0" hangingPunct="0">
+              <a:lnSpc>
+                <a:spcPct val="100000"/>
+              </a:lnSpc>
               <a:spcBef>
                 <a:spcPct val="0"/>
               </a:spcBef>
               <a:spcAft>
                 <a:spcPct val="0"/>
               </a:spcAft>
+              <a:buClrTx/>
+              <a:buSzTx/>
+              <a:buFontTx/>
+              <a:buNone/>
+              <a:tabLst/>
             </a:pPr>
             <a:r>
-              <a:rPr lang="en-US" altLang="el-GR" sz="1021">
-                <a:latin typeface="Arial" panose="020B0604020202020204" pitchFamily="34" charset="0"/>
-                <a:ea typeface="Times New Roman" panose="02020603050405020304" pitchFamily="18" charset="0"/>
-                <a:cs typeface="Arial" panose="020B0604020202020204" pitchFamily="34" charset="0"/>
+              <a:rPr kumimoji="0" lang="en-US" altLang="nb-NO" sz="1100" b="0" i="0" u="none" strike="noStrike" cap="none" normalizeH="0" baseline="0" dirty="0">
+                <a:ln>
+                  <a:noFill/>
+                </a:ln>
+                <a:solidFill>
+                  <a:schemeClr val="tx1"/>
+                </a:solidFill>
+                <a:effectLst/>
+                <a:latin typeface="Calibri" panose="020F0502020204030204" pitchFamily="34" charset="0"/>
+                <a:ea typeface="Calibri" panose="020F0502020204030204" pitchFamily="34" charset="0"/>
+                <a:cs typeface="Times New Roman" panose="02020603050405020304" pitchFamily="18" charset="0"/>
               </a:rPr>
-              <a:t>Rare/unknown species</a:t>
-            </a:r>
-            <a:endParaRPr lang="en-US" altLang="el-GR" sz="382"/>
-          </a:p>
-          <a:p>
-            <a:pPr algn="ctr" defTabSz="582962" eaLnBrk="0" fontAlgn="base" hangingPunct="0">
-              <a:spcBef>
-                <a:spcPct val="0"/>
-              </a:spcBef>
-              <a:spcAft>
-                <a:spcPct val="0"/>
-              </a:spcAft>
-            </a:pPr>
-            <a:r>
-              <a:rPr lang="en-US" altLang="el-GR" sz="766">
-                <a:latin typeface="Arial" panose="020B0604020202020204" pitchFamily="34" charset="0"/>
-                <a:ea typeface="Times New Roman" panose="02020603050405020304" pitchFamily="18" charset="0"/>
-                <a:cs typeface="Arial" panose="020B0604020202020204" pitchFamily="34" charset="0"/>
-              </a:rPr>
-              <a:t>Photograph/freeze</a:t>
-            </a:r>
-            <a:endParaRPr lang="en-US" altLang="el-GR" sz="1149">
+              <a:t>Parasites -&gt; whole fish frozen</a:t>
+            </a:r>
+            <a:endParaRPr kumimoji="0" lang="en-US" altLang="nb-NO" sz="1800" b="0" i="0" u="none" strike="noStrike" cap="none" normalizeH="0" baseline="0" dirty="0">
+              <a:ln>
+                <a:noFill/>
+              </a:ln>
+              <a:solidFill>
+                <a:schemeClr val="tx1"/>
+              </a:solidFill>
+              <a:effectLst/>
               <a:latin typeface="Arial" panose="020B0604020202020204" pitchFamily="34" charset="0"/>
             </a:endParaRPr>
           </a:p>
         </p:txBody>
       </p:sp>
-      <p:sp>
-        <p:nvSpPr>
-          <p:cNvPr id="36" name="Arrow: Down 35">
+      <p:grpSp>
+        <p:nvGrpSpPr>
+          <p:cNvPr id="93" name="Group 92">
             <a:extLst>
               <a:ext uri="{FF2B5EF4-FFF2-40B4-BE49-F238E27FC236}">
-                <a16:creationId xmlns:a16="http://schemas.microsoft.com/office/drawing/2014/main" id="{0714E55C-B2D2-4020-87E8-C806D2A32130}"/>
+                <a16:creationId xmlns:a16="http://schemas.microsoft.com/office/drawing/2014/main" id="{323A32FC-4F91-403C-ABEA-8D5E09C8364C}"/>
               </a:ext>
             </a:extLst>
           </p:cNvPr>
-          <p:cNvSpPr/>
+          <p:cNvGrpSpPr/>
           <p:nvPr/>
-        </p:nvSpPr>
-        <p:spPr>
+        </p:nvGrpSpPr>
+        <p:grpSpPr>
           <a:xfrm>
-            <a:off x="2932805" y="2759528"/>
-            <a:ext cx="145742" cy="1526241"/>
+            <a:off x="7079969" y="4263160"/>
+            <a:ext cx="2800350" cy="3276600"/>
+            <a:chOff x="0" y="0"/>
+            <a:chExt cx="2800350" cy="3276600"/>
           </a:xfrm>
-          <a:prstGeom prst="downArrow">
-            <a:avLst/>
-          </a:prstGeom>
-        </p:spPr>
-        <p:style>
-          <a:lnRef idx="2">
-            <a:schemeClr val="accent1">
-              <a:shade val="50000"/>
-            </a:schemeClr>
-          </a:lnRef>
-          <a:fillRef idx="1">
-            <a:schemeClr val="accent1"/>
-          </a:fillRef>
-          <a:effectRef idx="0">
-            <a:schemeClr val="accent1"/>
-          </a:effectRef>
-          <a:fontRef idx="minor">
-            <a:schemeClr val="lt1"/>
-          </a:fontRef>
-        </p:style>
-        <p:txBody>
-          <a:bodyPr rot="0" spcFirstLastPara="0" vert="horz" wrap="square" lIns="58297" tIns="29149" rIns="58297" bIns="29149" numCol="1" spcCol="0" rtlCol="0" fromWordArt="0" anchor="ctr" anchorCtr="0" forceAA="0" compatLnSpc="1">
-            <a:prstTxWarp prst="textNoShape">
+        </p:grpSpPr>
+        <p:sp>
+          <p:nvSpPr>
+            <p:cNvPr id="94" name="Arrow: Down 93">
+              <a:extLst>
+                <a:ext uri="{FF2B5EF4-FFF2-40B4-BE49-F238E27FC236}">
+                  <a16:creationId xmlns:a16="http://schemas.microsoft.com/office/drawing/2014/main" id="{A2620406-B7A0-4E57-905A-18B8A2211D86}"/>
+                </a:ext>
+              </a:extLst>
+            </p:cNvPr>
+            <p:cNvSpPr/>
+            <p:nvPr/>
+          </p:nvSpPr>
+          <p:spPr>
+            <a:xfrm>
+              <a:off x="523875" y="371475"/>
+              <a:ext cx="484505" cy="1044575"/>
+            </a:xfrm>
+            <a:prstGeom prst="downArrow">
               <a:avLst/>
-            </a:prstTxWarp>
-            <a:noAutofit/>
-          </a:bodyPr>
-          <a:lstStyle/>
-          <a:p>
-            <a:endParaRPr lang="el-GR" sz="1149"/>
-          </a:p>
-        </p:txBody>
-      </p:sp>
-      <p:sp>
-        <p:nvSpPr>
-          <p:cNvPr id="37" name="Text Box 2">
+            </a:prstGeom>
+          </p:spPr>
+          <p:style>
+            <a:lnRef idx="2">
+              <a:schemeClr val="accent1">
+                <a:shade val="50000"/>
+              </a:schemeClr>
+            </a:lnRef>
+            <a:fillRef idx="1">
+              <a:schemeClr val="accent1"/>
+            </a:fillRef>
+            <a:effectRef idx="0">
+              <a:schemeClr val="accent1"/>
+            </a:effectRef>
+            <a:fontRef idx="minor">
+              <a:schemeClr val="lt1"/>
+            </a:fontRef>
+          </p:style>
+          <p:txBody>
+            <a:bodyPr rot="0" spcFirstLastPara="0" vert="horz" wrap="square" lIns="91440" tIns="45720" rIns="91440" bIns="45720" numCol="1" spcCol="0" rtlCol="0" fromWordArt="0" anchor="ctr" anchorCtr="0" forceAA="0" compatLnSpc="1">
+              <a:prstTxWarp prst="textNoShape">
+                <a:avLst/>
+              </a:prstTxWarp>
+              <a:noAutofit/>
+            </a:bodyPr>
+            <a:lstStyle/>
+            <a:p>
+              <a:endParaRPr lang="nb-NO"/>
+            </a:p>
+          </p:txBody>
+        </p:sp>
+        <p:sp>
+          <p:nvSpPr>
+            <p:cNvPr id="95" name="Text Box 13">
+              <a:extLst>
+                <a:ext uri="{FF2B5EF4-FFF2-40B4-BE49-F238E27FC236}">
+                  <a16:creationId xmlns:a16="http://schemas.microsoft.com/office/drawing/2014/main" id="{F87D082A-8D39-4C0C-9E75-A9317EA8D246}"/>
+                </a:ext>
+              </a:extLst>
+            </p:cNvPr>
+            <p:cNvSpPr txBox="1"/>
+            <p:nvPr/>
+          </p:nvSpPr>
+          <p:spPr>
+            <a:xfrm>
+              <a:off x="952500" y="581025"/>
+              <a:ext cx="400050" cy="304800"/>
+            </a:xfrm>
+            <a:prstGeom prst="rect">
+              <a:avLst/>
+            </a:prstGeom>
+            <a:solidFill>
+              <a:schemeClr val="lt1"/>
+            </a:solidFill>
+            <a:ln w="12700">
+              <a:solidFill>
+                <a:srgbClr val="FF0000"/>
+              </a:solidFill>
+            </a:ln>
+          </p:spPr>
+          <p:txBody>
+            <a:bodyPr rot="0" spcFirstLastPara="0" vert="horz" wrap="square" lIns="91440" tIns="45720" rIns="91440" bIns="45720" numCol="1" spcCol="0" rtlCol="0" fromWordArt="0" anchor="t" anchorCtr="0" forceAA="0" compatLnSpc="1">
+              <a:prstTxWarp prst="textNoShape">
+                <a:avLst/>
+              </a:prstTxWarp>
+              <a:noAutofit/>
+            </a:bodyPr>
+            <a:lstStyle/>
+            <a:p>
+              <a:pPr algn="ctr">
+                <a:lnSpc>
+                  <a:spcPct val="107000"/>
+                </a:lnSpc>
+                <a:spcAft>
+                  <a:spcPts val="800"/>
+                </a:spcAft>
+              </a:pPr>
+              <a:r>
+                <a:rPr lang="en-US" sz="1100" b="1">
+                  <a:solidFill>
+                    <a:srgbClr val="FF0000"/>
+                  </a:solidFill>
+                  <a:effectLst/>
+                  <a:latin typeface="Calibri" panose="020F0502020204030204" pitchFamily="34" charset="0"/>
+                  <a:ea typeface="Calibri" panose="020F0502020204030204" pitchFamily="34" charset="0"/>
+                  <a:cs typeface="Times New Roman" panose="02020603050405020304" pitchFamily="18" charset="0"/>
+                </a:rPr>
+                <a:t>50</a:t>
+              </a:r>
+              <a:endParaRPr lang="nb-NO" sz="1100">
+                <a:effectLst/>
+                <a:latin typeface="Calibri" panose="020F0502020204030204" pitchFamily="34" charset="0"/>
+                <a:ea typeface="Calibri" panose="020F0502020204030204" pitchFamily="34" charset="0"/>
+                <a:cs typeface="Times New Roman" panose="02020603050405020304" pitchFamily="18" charset="0"/>
+              </a:endParaRPr>
+            </a:p>
+          </p:txBody>
+        </p:sp>
+        <p:sp>
+          <p:nvSpPr>
+            <p:cNvPr id="96" name="Text Box 14">
+              <a:extLst>
+                <a:ext uri="{FF2B5EF4-FFF2-40B4-BE49-F238E27FC236}">
+                  <a16:creationId xmlns:a16="http://schemas.microsoft.com/office/drawing/2014/main" id="{758317D1-9D4F-43A4-A484-10BE10677200}"/>
+                </a:ext>
+              </a:extLst>
+            </p:cNvPr>
+            <p:cNvSpPr txBox="1"/>
+            <p:nvPr/>
+          </p:nvSpPr>
+          <p:spPr>
+            <a:xfrm>
+              <a:off x="0" y="1524000"/>
+              <a:ext cx="1524000" cy="276225"/>
+            </a:xfrm>
+            <a:prstGeom prst="rect">
+              <a:avLst/>
+            </a:prstGeom>
+            <a:solidFill>
+              <a:schemeClr val="lt1"/>
+            </a:solidFill>
+            <a:ln w="12700">
+              <a:solidFill>
+                <a:prstClr val="black"/>
+              </a:solidFill>
+            </a:ln>
+          </p:spPr>
+          <p:txBody>
+            <a:bodyPr rot="0" spcFirstLastPara="0" vert="horz" wrap="square" lIns="91440" tIns="45720" rIns="91440" bIns="45720" numCol="1" spcCol="0" rtlCol="0" fromWordArt="0" anchor="t" anchorCtr="0" forceAA="0" compatLnSpc="1">
+              <a:prstTxWarp prst="textNoShape">
+                <a:avLst/>
+              </a:prstTxWarp>
+              <a:noAutofit/>
+            </a:bodyPr>
+            <a:lstStyle/>
+            <a:p>
+              <a:pPr>
+                <a:lnSpc>
+                  <a:spcPct val="107000"/>
+                </a:lnSpc>
+                <a:spcAft>
+                  <a:spcPts val="800"/>
+                </a:spcAft>
+              </a:pPr>
+              <a:r>
+                <a:rPr lang="en-US" sz="1100">
+                  <a:effectLst/>
+                  <a:latin typeface="Calibri" panose="020F0502020204030204" pitchFamily="34" charset="0"/>
+                  <a:ea typeface="Calibri" panose="020F0502020204030204" pitchFamily="34" charset="0"/>
+                  <a:cs typeface="Times New Roman" panose="02020603050405020304" pitchFamily="18" charset="0"/>
+                </a:rPr>
+                <a:t>Sex, maturity, fat stage </a:t>
+              </a:r>
+              <a:endParaRPr lang="nb-NO" sz="1100">
+                <a:effectLst/>
+                <a:latin typeface="Calibri" panose="020F0502020204030204" pitchFamily="34" charset="0"/>
+                <a:ea typeface="Calibri" panose="020F0502020204030204" pitchFamily="34" charset="0"/>
+                <a:cs typeface="Times New Roman" panose="02020603050405020304" pitchFamily="18" charset="0"/>
+              </a:endParaRPr>
+            </a:p>
+          </p:txBody>
+        </p:sp>
+        <p:sp>
+          <p:nvSpPr>
+            <p:cNvPr id="97" name="Arrow: Down 96">
+              <a:extLst>
+                <a:ext uri="{FF2B5EF4-FFF2-40B4-BE49-F238E27FC236}">
+                  <a16:creationId xmlns:a16="http://schemas.microsoft.com/office/drawing/2014/main" id="{7D936B96-3155-455A-8C1D-D685F0BE0635}"/>
+                </a:ext>
+              </a:extLst>
+            </p:cNvPr>
+            <p:cNvSpPr/>
+            <p:nvPr/>
+          </p:nvSpPr>
+          <p:spPr>
+            <a:xfrm>
+              <a:off x="533400" y="1895475"/>
+              <a:ext cx="484505" cy="1035050"/>
+            </a:xfrm>
+            <a:prstGeom prst="downArrow">
+              <a:avLst/>
+            </a:prstGeom>
+          </p:spPr>
+          <p:style>
+            <a:lnRef idx="2">
+              <a:schemeClr val="accent1">
+                <a:shade val="50000"/>
+              </a:schemeClr>
+            </a:lnRef>
+            <a:fillRef idx="1">
+              <a:schemeClr val="accent1"/>
+            </a:fillRef>
+            <a:effectRef idx="0">
+              <a:schemeClr val="accent1"/>
+            </a:effectRef>
+            <a:fontRef idx="minor">
+              <a:schemeClr val="lt1"/>
+            </a:fontRef>
+          </p:style>
+          <p:txBody>
+            <a:bodyPr rot="0" spcFirstLastPara="0" vert="horz" wrap="square" lIns="91440" tIns="45720" rIns="91440" bIns="45720" numCol="1" spcCol="0" rtlCol="0" fromWordArt="0" anchor="ctr" anchorCtr="0" forceAA="0" compatLnSpc="1">
+              <a:prstTxWarp prst="textNoShape">
+                <a:avLst/>
+              </a:prstTxWarp>
+              <a:noAutofit/>
+            </a:bodyPr>
+            <a:lstStyle/>
+            <a:p>
+              <a:endParaRPr lang="nb-NO"/>
+            </a:p>
+          </p:txBody>
+        </p:sp>
+        <p:sp>
+          <p:nvSpPr>
+            <p:cNvPr id="98" name="Text Box 16">
+              <a:extLst>
+                <a:ext uri="{FF2B5EF4-FFF2-40B4-BE49-F238E27FC236}">
+                  <a16:creationId xmlns:a16="http://schemas.microsoft.com/office/drawing/2014/main" id="{A2AE49D6-28BE-4353-80E9-525ADD56F6A6}"/>
+                </a:ext>
+              </a:extLst>
+            </p:cNvPr>
+            <p:cNvSpPr txBox="1"/>
+            <p:nvPr/>
+          </p:nvSpPr>
+          <p:spPr>
+            <a:xfrm>
+              <a:off x="962025" y="2133600"/>
+              <a:ext cx="400050" cy="304800"/>
+            </a:xfrm>
+            <a:prstGeom prst="rect">
+              <a:avLst/>
+            </a:prstGeom>
+            <a:solidFill>
+              <a:schemeClr val="lt1"/>
+            </a:solidFill>
+            <a:ln w="12700">
+              <a:solidFill>
+                <a:srgbClr val="FF0000"/>
+              </a:solidFill>
+            </a:ln>
+          </p:spPr>
+          <p:txBody>
+            <a:bodyPr rot="0" spcFirstLastPara="0" vert="horz" wrap="square" lIns="91440" tIns="45720" rIns="91440" bIns="45720" numCol="1" spcCol="0" rtlCol="0" fromWordArt="0" anchor="t" anchorCtr="0" forceAA="0" compatLnSpc="1">
+              <a:prstTxWarp prst="textNoShape">
+                <a:avLst/>
+              </a:prstTxWarp>
+              <a:noAutofit/>
+            </a:bodyPr>
+            <a:lstStyle/>
+            <a:p>
+              <a:pPr algn="ctr">
+                <a:lnSpc>
+                  <a:spcPct val="107000"/>
+                </a:lnSpc>
+                <a:spcAft>
+                  <a:spcPts val="800"/>
+                </a:spcAft>
+              </a:pPr>
+              <a:r>
+                <a:rPr lang="en-US" sz="1100" b="1">
+                  <a:solidFill>
+                    <a:srgbClr val="FF0000"/>
+                  </a:solidFill>
+                  <a:effectLst/>
+                  <a:latin typeface="Calibri" panose="020F0502020204030204" pitchFamily="34" charset="0"/>
+                  <a:ea typeface="Calibri" panose="020F0502020204030204" pitchFamily="34" charset="0"/>
+                  <a:cs typeface="Times New Roman" panose="02020603050405020304" pitchFamily="18" charset="0"/>
+                </a:rPr>
+                <a:t>20</a:t>
+              </a:r>
+              <a:endParaRPr lang="nb-NO" sz="1100">
+                <a:effectLst/>
+                <a:latin typeface="Calibri" panose="020F0502020204030204" pitchFamily="34" charset="0"/>
+                <a:ea typeface="Calibri" panose="020F0502020204030204" pitchFamily="34" charset="0"/>
+                <a:cs typeface="Times New Roman" panose="02020603050405020304" pitchFamily="18" charset="0"/>
+              </a:endParaRPr>
+            </a:p>
+          </p:txBody>
+        </p:sp>
+        <p:sp>
+          <p:nvSpPr>
+            <p:cNvPr id="99" name="Text Box 17">
+              <a:extLst>
+                <a:ext uri="{FF2B5EF4-FFF2-40B4-BE49-F238E27FC236}">
+                  <a16:creationId xmlns:a16="http://schemas.microsoft.com/office/drawing/2014/main" id="{515CC46F-81A0-4DEB-8C00-B2EFC4D80ED5}"/>
+                </a:ext>
+              </a:extLst>
+            </p:cNvPr>
+            <p:cNvSpPr txBox="1"/>
+            <p:nvPr/>
+          </p:nvSpPr>
+          <p:spPr>
+            <a:xfrm>
+              <a:off x="104775" y="3000375"/>
+              <a:ext cx="1352550" cy="276225"/>
+            </a:xfrm>
+            <a:prstGeom prst="rect">
+              <a:avLst/>
+            </a:prstGeom>
+            <a:solidFill>
+              <a:schemeClr val="lt1"/>
+            </a:solidFill>
+            <a:ln w="12700">
+              <a:solidFill>
+                <a:prstClr val="black"/>
+              </a:solidFill>
+            </a:ln>
+          </p:spPr>
+          <p:txBody>
+            <a:bodyPr rot="0" spcFirstLastPara="0" vert="horz" wrap="square" lIns="91440" tIns="45720" rIns="91440" bIns="45720" numCol="1" spcCol="0" rtlCol="0" fromWordArt="0" anchor="t" anchorCtr="0" forceAA="0" compatLnSpc="1">
+              <a:prstTxWarp prst="textNoShape">
+                <a:avLst/>
+              </a:prstTxWarp>
+              <a:noAutofit/>
+            </a:bodyPr>
+            <a:lstStyle/>
+            <a:p>
+              <a:pPr>
+                <a:lnSpc>
+                  <a:spcPct val="107000"/>
+                </a:lnSpc>
+                <a:spcAft>
+                  <a:spcPts val="800"/>
+                </a:spcAft>
+              </a:pPr>
+              <a:r>
+                <a:rPr lang="en-US" sz="1100">
+                  <a:effectLst/>
+                  <a:latin typeface="Calibri" panose="020F0502020204030204" pitchFamily="34" charset="0"/>
+                  <a:ea typeface="Calibri" panose="020F0502020204030204" pitchFamily="34" charset="0"/>
+                  <a:cs typeface="Times New Roman" panose="02020603050405020304" pitchFamily="18" charset="0"/>
+                </a:rPr>
+                <a:t>Otolith (the first 20)</a:t>
+              </a:r>
+              <a:endParaRPr lang="nb-NO" sz="1100">
+                <a:effectLst/>
+                <a:latin typeface="Calibri" panose="020F0502020204030204" pitchFamily="34" charset="0"/>
+                <a:ea typeface="Calibri" panose="020F0502020204030204" pitchFamily="34" charset="0"/>
+                <a:cs typeface="Times New Roman" panose="02020603050405020304" pitchFamily="18" charset="0"/>
+              </a:endParaRPr>
+            </a:p>
+          </p:txBody>
+        </p:sp>
+        <p:sp>
+          <p:nvSpPr>
+            <p:cNvPr id="100" name="Text Box 38">
+              <a:extLst>
+                <a:ext uri="{FF2B5EF4-FFF2-40B4-BE49-F238E27FC236}">
+                  <a16:creationId xmlns:a16="http://schemas.microsoft.com/office/drawing/2014/main" id="{35F6A3DE-931E-4EBE-B274-440404436E8F}"/>
+                </a:ext>
+              </a:extLst>
+            </p:cNvPr>
+            <p:cNvSpPr txBox="1"/>
+            <p:nvPr/>
+          </p:nvSpPr>
+          <p:spPr>
+            <a:xfrm>
+              <a:off x="2314575" y="552450"/>
+              <a:ext cx="485775" cy="276225"/>
+            </a:xfrm>
+            <a:prstGeom prst="rect">
+              <a:avLst/>
+            </a:prstGeom>
+            <a:solidFill>
+              <a:schemeClr val="lt1"/>
+            </a:solidFill>
+            <a:ln w="12700">
+              <a:solidFill>
+                <a:srgbClr val="FF0000"/>
+              </a:solidFill>
+            </a:ln>
+          </p:spPr>
+          <p:txBody>
+            <a:bodyPr rot="0" spcFirstLastPara="0" vert="horz" wrap="square" lIns="91440" tIns="45720" rIns="91440" bIns="45720" numCol="1" spcCol="0" rtlCol="0" fromWordArt="0" anchor="t" anchorCtr="0" forceAA="0" compatLnSpc="1">
+              <a:prstTxWarp prst="textNoShape">
+                <a:avLst/>
+              </a:prstTxWarp>
+              <a:noAutofit/>
+            </a:bodyPr>
+            <a:lstStyle/>
+            <a:p>
+              <a:pPr>
+                <a:lnSpc>
+                  <a:spcPct val="107000"/>
+                </a:lnSpc>
+                <a:spcAft>
+                  <a:spcPts val="800"/>
+                </a:spcAft>
+              </a:pPr>
+              <a:r>
+                <a:rPr lang="en-US" sz="1100" b="1">
+                  <a:solidFill>
+                    <a:srgbClr val="FF0000"/>
+                  </a:solidFill>
+                  <a:effectLst/>
+                  <a:latin typeface="Calibri" panose="020F0502020204030204" pitchFamily="34" charset="0"/>
+                  <a:ea typeface="Calibri" panose="020F0502020204030204" pitchFamily="34" charset="0"/>
+                  <a:cs typeface="Times New Roman" panose="02020603050405020304" pitchFamily="18" charset="0"/>
+                </a:rPr>
+                <a:t>3x10</a:t>
+              </a:r>
+              <a:r>
+                <a:rPr lang="en-US" sz="1100">
+                  <a:effectLst/>
+                  <a:latin typeface="Calibri" panose="020F0502020204030204" pitchFamily="34" charset="0"/>
+                  <a:ea typeface="Calibri" panose="020F0502020204030204" pitchFamily="34" charset="0"/>
+                  <a:cs typeface="Times New Roman" panose="02020603050405020304" pitchFamily="18" charset="0"/>
+                </a:rPr>
+                <a:t> 0</a:t>
+              </a:r>
+              <a:endParaRPr lang="nb-NO" sz="1100">
+                <a:effectLst/>
+                <a:latin typeface="Calibri" panose="020F0502020204030204" pitchFamily="34" charset="0"/>
+                <a:ea typeface="Calibri" panose="020F0502020204030204" pitchFamily="34" charset="0"/>
+                <a:cs typeface="Times New Roman" panose="02020603050405020304" pitchFamily="18" charset="0"/>
+              </a:endParaRPr>
+            </a:p>
+          </p:txBody>
+        </p:sp>
+        <p:sp>
+          <p:nvSpPr>
+            <p:cNvPr id="101" name="Arrow: Down 100">
+              <a:extLst>
+                <a:ext uri="{FF2B5EF4-FFF2-40B4-BE49-F238E27FC236}">
+                  <a16:creationId xmlns:a16="http://schemas.microsoft.com/office/drawing/2014/main" id="{2F76009E-109C-4154-A954-619EC22C94D1}"/>
+                </a:ext>
+              </a:extLst>
+            </p:cNvPr>
+            <p:cNvSpPr/>
+            <p:nvPr/>
+          </p:nvSpPr>
+          <p:spPr>
+            <a:xfrm>
+              <a:off x="1847850" y="352425"/>
+              <a:ext cx="484505" cy="1063625"/>
+            </a:xfrm>
+            <a:prstGeom prst="downArrow">
+              <a:avLst/>
+            </a:prstGeom>
+          </p:spPr>
+          <p:style>
+            <a:lnRef idx="2">
+              <a:schemeClr val="accent1">
+                <a:shade val="50000"/>
+              </a:schemeClr>
+            </a:lnRef>
+            <a:fillRef idx="1">
+              <a:schemeClr val="accent1"/>
+            </a:fillRef>
+            <a:effectRef idx="0">
+              <a:schemeClr val="accent1"/>
+            </a:effectRef>
+            <a:fontRef idx="minor">
+              <a:schemeClr val="lt1"/>
+            </a:fontRef>
+          </p:style>
+          <p:txBody>
+            <a:bodyPr rot="0" spcFirstLastPara="0" vert="horz" wrap="square" lIns="91440" tIns="45720" rIns="91440" bIns="45720" numCol="1" spcCol="0" rtlCol="0" fromWordArt="0" anchor="ctr" anchorCtr="0" forceAA="0" compatLnSpc="1">
+              <a:prstTxWarp prst="textNoShape">
+                <a:avLst/>
+              </a:prstTxWarp>
+              <a:noAutofit/>
+            </a:bodyPr>
+            <a:lstStyle/>
+            <a:p>
+              <a:endParaRPr lang="nb-NO"/>
+            </a:p>
+          </p:txBody>
+        </p:sp>
+        <p:sp>
+          <p:nvSpPr>
+            <p:cNvPr id="102" name="Text Box 43">
+              <a:extLst>
+                <a:ext uri="{FF2B5EF4-FFF2-40B4-BE49-F238E27FC236}">
+                  <a16:creationId xmlns:a16="http://schemas.microsoft.com/office/drawing/2014/main" id="{C8E3BA15-02FF-4211-96BE-4661C155C7E3}"/>
+                </a:ext>
+              </a:extLst>
+            </p:cNvPr>
+            <p:cNvSpPr txBox="1"/>
+            <p:nvPr/>
+          </p:nvSpPr>
+          <p:spPr>
+            <a:xfrm>
+              <a:off x="495300" y="0"/>
+              <a:ext cx="1800225" cy="285750"/>
+            </a:xfrm>
+            <a:prstGeom prst="rect">
+              <a:avLst/>
+            </a:prstGeom>
+            <a:solidFill>
+              <a:schemeClr val="lt1"/>
+            </a:solidFill>
+            <a:ln w="12700">
+              <a:solidFill>
+                <a:prstClr val="black"/>
+              </a:solidFill>
+            </a:ln>
+          </p:spPr>
+          <p:txBody>
+            <a:bodyPr rot="0" spcFirstLastPara="0" vert="horz" wrap="square" lIns="91440" tIns="45720" rIns="91440" bIns="45720" numCol="1" spcCol="0" rtlCol="0" fromWordArt="0" anchor="t" anchorCtr="0" forceAA="0" compatLnSpc="1">
+              <a:prstTxWarp prst="textNoShape">
+                <a:avLst/>
+              </a:prstTxWarp>
+              <a:noAutofit/>
+            </a:bodyPr>
+            <a:lstStyle/>
+            <a:p>
+              <a:pPr algn="ctr">
+                <a:lnSpc>
+                  <a:spcPct val="107000"/>
+                </a:lnSpc>
+                <a:spcAft>
+                  <a:spcPts val="800"/>
+                </a:spcAft>
+              </a:pPr>
+              <a:r>
+                <a:rPr lang="en-US" sz="1100" b="1" dirty="0">
+                  <a:effectLst/>
+                  <a:latin typeface="Calibri" panose="020F0502020204030204" pitchFamily="34" charset="0"/>
+                  <a:ea typeface="Calibri" panose="020F0502020204030204" pitchFamily="34" charset="0"/>
+                  <a:cs typeface="Times New Roman" panose="02020603050405020304" pitchFamily="18" charset="0"/>
+                </a:rPr>
+                <a:t>ALL THREE (3) SPECIES</a:t>
+              </a:r>
+              <a:endParaRPr lang="nb-NO" sz="1100" dirty="0">
+                <a:effectLst/>
+                <a:latin typeface="Calibri" panose="020F0502020204030204" pitchFamily="34" charset="0"/>
+                <a:ea typeface="Calibri" panose="020F0502020204030204" pitchFamily="34" charset="0"/>
+                <a:cs typeface="Times New Roman" panose="02020603050405020304" pitchFamily="18" charset="0"/>
+              </a:endParaRPr>
+            </a:p>
+          </p:txBody>
+        </p:sp>
+      </p:grpSp>
+      <p:grpSp>
+        <p:nvGrpSpPr>
+          <p:cNvPr id="103" name="Group 102">
             <a:extLst>
               <a:ext uri="{FF2B5EF4-FFF2-40B4-BE49-F238E27FC236}">
-                <a16:creationId xmlns:a16="http://schemas.microsoft.com/office/drawing/2014/main" id="{09C9F389-6DB4-4CDE-B94F-5CB1716AE99C}"/>
+                <a16:creationId xmlns:a16="http://schemas.microsoft.com/office/drawing/2014/main" id="{EC25E69C-F419-441D-805D-8444B61FF617}"/>
               </a:ext>
             </a:extLst>
           </p:cNvPr>
-          <p:cNvSpPr txBox="1">
-            <a:spLocks noChangeArrowheads="1"/>
-          </p:cNvSpPr>
+          <p:cNvGrpSpPr/>
           <p:nvPr/>
-        </p:nvSpPr>
-        <p:spPr bwMode="auto">
+        </p:nvGrpSpPr>
+        <p:grpSpPr>
           <a:xfrm>
-            <a:off x="861356" y="1302724"/>
-            <a:ext cx="3578775" cy="368403"/>
+            <a:off x="838940" y="1916112"/>
+            <a:ext cx="10907012" cy="4448175"/>
+            <a:chOff x="-94569" y="0"/>
+            <a:chExt cx="10907012" cy="4448175"/>
           </a:xfrm>
-          <a:prstGeom prst="rect">
-            <a:avLst/>
-          </a:prstGeom>
-          <a:solidFill>
-            <a:srgbClr val="FFFFFF"/>
-          </a:solidFill>
-          <a:ln w="9525">
+        </p:grpSpPr>
+        <p:sp>
+          <p:nvSpPr>
+            <p:cNvPr id="104" name="Text Box 3">
+              <a:extLst>
+                <a:ext uri="{FF2B5EF4-FFF2-40B4-BE49-F238E27FC236}">
+                  <a16:creationId xmlns:a16="http://schemas.microsoft.com/office/drawing/2014/main" id="{B4517CAF-B410-422A-9BEB-E7241AC0657F}"/>
+                </a:ext>
+              </a:extLst>
+            </p:cNvPr>
+            <p:cNvSpPr txBox="1"/>
+            <p:nvPr/>
+          </p:nvSpPr>
+          <p:spPr>
+            <a:xfrm>
+              <a:off x="4533900" y="1666875"/>
+              <a:ext cx="2000250" cy="304800"/>
+            </a:xfrm>
+            <a:prstGeom prst="rect">
+              <a:avLst/>
+            </a:prstGeom>
             <a:solidFill>
-              <a:srgbClr val="000000"/>
+              <a:schemeClr val="lt1"/>
             </a:solidFill>
-            <a:miter lim="800000"/>
-            <a:headEnd/>
-            <a:tailEnd/>
-          </a:ln>
-        </p:spPr>
-        <p:txBody>
-          <a:bodyPr vert="horz" wrap="square" lIns="58297" tIns="29149" rIns="58297" bIns="29149" numCol="1" anchor="t" anchorCtr="0" compatLnSpc="1">
-            <a:prstTxWarp prst="textNoShape">
+            <a:ln w="12700">
+              <a:solidFill>
+                <a:prstClr val="black"/>
+              </a:solidFill>
+            </a:ln>
+          </p:spPr>
+          <p:txBody>
+            <a:bodyPr rot="0" spcFirstLastPara="0" vert="horz" wrap="square" lIns="91440" tIns="45720" rIns="91440" bIns="45720" numCol="1" spcCol="0" rtlCol="0" fromWordArt="0" anchor="t" anchorCtr="0" forceAA="0" compatLnSpc="1">
+              <a:prstTxWarp prst="textNoShape">
+                <a:avLst/>
+              </a:prstTxWarp>
+              <a:noAutofit/>
+            </a:bodyPr>
+            <a:lstStyle/>
+            <a:p>
+              <a:pPr>
+                <a:lnSpc>
+                  <a:spcPct val="107000"/>
+                </a:lnSpc>
+                <a:spcAft>
+                  <a:spcPts val="800"/>
+                </a:spcAft>
+              </a:pPr>
+              <a:r>
+                <a:rPr lang="en-US" sz="1100" i="1">
+                  <a:effectLst/>
+                  <a:latin typeface="Calibri" panose="020F0502020204030204" pitchFamily="34" charset="0"/>
+                  <a:ea typeface="Calibri" panose="020F0502020204030204" pitchFamily="34" charset="0"/>
+                  <a:cs typeface="Times New Roman" panose="02020603050405020304" pitchFamily="18" charset="0"/>
+                </a:rPr>
+                <a:t>Engraulis encasicolus</a:t>
+              </a:r>
+              <a:r>
+                <a:rPr lang="en-US" sz="1100">
+                  <a:effectLst/>
+                  <a:latin typeface="Calibri" panose="020F0502020204030204" pitchFamily="34" charset="0"/>
+                  <a:ea typeface="Calibri" panose="020F0502020204030204" pitchFamily="34" charset="0"/>
+                  <a:cs typeface="Times New Roman" panose="02020603050405020304" pitchFamily="18" charset="0"/>
+                </a:rPr>
+                <a:t> (anchovy)</a:t>
+              </a:r>
+              <a:endParaRPr lang="nb-NO" sz="1100">
+                <a:effectLst/>
+                <a:latin typeface="Calibri" panose="020F0502020204030204" pitchFamily="34" charset="0"/>
+                <a:ea typeface="Calibri" panose="020F0502020204030204" pitchFamily="34" charset="0"/>
+                <a:cs typeface="Times New Roman" panose="02020603050405020304" pitchFamily="18" charset="0"/>
+              </a:endParaRPr>
+            </a:p>
+          </p:txBody>
+        </p:sp>
+        <p:sp>
+          <p:nvSpPr>
+            <p:cNvPr id="105" name="Text Box 18">
+              <a:extLst>
+                <a:ext uri="{FF2B5EF4-FFF2-40B4-BE49-F238E27FC236}">
+                  <a16:creationId xmlns:a16="http://schemas.microsoft.com/office/drawing/2014/main" id="{9FA8AAFA-5074-4E9B-ADCC-C465A510AB1F}"/>
+                </a:ext>
+              </a:extLst>
+            </p:cNvPr>
+            <p:cNvSpPr txBox="1"/>
+            <p:nvPr/>
+          </p:nvSpPr>
+          <p:spPr>
+            <a:xfrm>
+              <a:off x="4514850" y="1257300"/>
+              <a:ext cx="2981325" cy="285750"/>
+            </a:xfrm>
+            <a:prstGeom prst="rect">
               <a:avLst/>
-            </a:prstTxWarp>
-          </a:bodyPr>
-          <a:lstStyle/>
-          <a:p>
-            <a:pPr algn="ctr" defTabSz="582962" eaLnBrk="0" fontAlgn="base" hangingPunct="0">
-              <a:spcBef>
-                <a:spcPct val="0"/>
-              </a:spcBef>
-              <a:spcAft>
-                <a:spcPct val="0"/>
-              </a:spcAft>
-            </a:pPr>
-            <a:r>
-              <a:rPr lang="en-US" altLang="el-GR" sz="1021">
-                <a:latin typeface="Arial" panose="020B0604020202020204" pitchFamily="34" charset="0"/>
-                <a:ea typeface="Times New Roman" panose="02020603050405020304" pitchFamily="18" charset="0"/>
-                <a:cs typeface="Arial" panose="020B0604020202020204" pitchFamily="34" charset="0"/>
-              </a:rPr>
-              <a:t>Trawl catch</a:t>
-            </a:r>
-            <a:endParaRPr lang="en-US" altLang="el-GR" sz="382"/>
-          </a:p>
-          <a:p>
-            <a:pPr algn="ctr" defTabSz="582962" eaLnBrk="0" fontAlgn="base" hangingPunct="0">
-              <a:spcBef>
-                <a:spcPct val="0"/>
-              </a:spcBef>
-              <a:spcAft>
-                <a:spcPct val="0"/>
-              </a:spcAft>
-            </a:pPr>
-            <a:r>
-              <a:rPr lang="en-US" altLang="el-GR" sz="766">
-                <a:latin typeface="Arial" panose="020B0604020202020204" pitchFamily="34" charset="0"/>
-                <a:ea typeface="Times New Roman" panose="02020603050405020304" pitchFamily="18" charset="0"/>
-                <a:cs typeface="Arial" panose="020B0604020202020204" pitchFamily="34" charset="0"/>
-              </a:rPr>
-              <a:t>Record total catch weight. Take total catch or subsample</a:t>
-            </a:r>
-            <a:endParaRPr lang="en-US" altLang="el-GR" sz="1149">
-              <a:latin typeface="Arial" panose="020B0604020202020204" pitchFamily="34" charset="0"/>
-            </a:endParaRPr>
-          </a:p>
-        </p:txBody>
-      </p:sp>
-      <p:sp>
-        <p:nvSpPr>
-          <p:cNvPr id="38" name="Arrow: Down 37">
+            </a:prstGeom>
+            <a:solidFill>
+              <a:schemeClr val="lt1"/>
+            </a:solidFill>
+            <a:ln w="12700">
+              <a:solidFill>
+                <a:prstClr val="black"/>
+              </a:solidFill>
+            </a:ln>
+          </p:spPr>
+          <p:txBody>
+            <a:bodyPr rot="0" spcFirstLastPara="0" vert="horz" wrap="square" lIns="91440" tIns="45720" rIns="91440" bIns="45720" numCol="1" spcCol="0" rtlCol="0" fromWordArt="0" anchor="t" anchorCtr="0" forceAA="0" compatLnSpc="1">
+              <a:prstTxWarp prst="textNoShape">
+                <a:avLst/>
+              </a:prstTxWarp>
+              <a:noAutofit/>
+            </a:bodyPr>
+            <a:lstStyle/>
+            <a:p>
+              <a:pPr>
+                <a:lnSpc>
+                  <a:spcPct val="107000"/>
+                </a:lnSpc>
+                <a:spcAft>
+                  <a:spcPts val="800"/>
+                </a:spcAft>
+              </a:pPr>
+              <a:r>
+                <a:rPr lang="en-US" sz="1100" i="1">
+                  <a:effectLst/>
+                  <a:latin typeface="Calibri" panose="020F0502020204030204" pitchFamily="34" charset="0"/>
+                  <a:ea typeface="Calibri" panose="020F0502020204030204" pitchFamily="34" charset="0"/>
+                  <a:cs typeface="Times New Roman" panose="02020603050405020304" pitchFamily="18" charset="0"/>
+                </a:rPr>
+                <a:t>Etrumeus whiteheadi</a:t>
+              </a:r>
+              <a:r>
+                <a:rPr lang="en-US" sz="1100">
+                  <a:effectLst/>
+                  <a:latin typeface="Calibri" panose="020F0502020204030204" pitchFamily="34" charset="0"/>
+                  <a:ea typeface="Calibri" panose="020F0502020204030204" pitchFamily="34" charset="0"/>
+                  <a:cs typeface="Times New Roman" panose="02020603050405020304" pitchFamily="18" charset="0"/>
+                </a:rPr>
+                <a:t> (West coast round herring)</a:t>
+              </a:r>
+              <a:endParaRPr lang="nb-NO" sz="1100">
+                <a:effectLst/>
+                <a:latin typeface="Calibri" panose="020F0502020204030204" pitchFamily="34" charset="0"/>
+                <a:ea typeface="Calibri" panose="020F0502020204030204" pitchFamily="34" charset="0"/>
+                <a:cs typeface="Times New Roman" panose="02020603050405020304" pitchFamily="18" charset="0"/>
+              </a:endParaRPr>
+            </a:p>
+          </p:txBody>
+        </p:sp>
+        <p:sp>
+          <p:nvSpPr>
+            <p:cNvPr id="106" name="Text Box 19">
+              <a:extLst>
+                <a:ext uri="{FF2B5EF4-FFF2-40B4-BE49-F238E27FC236}">
+                  <a16:creationId xmlns:a16="http://schemas.microsoft.com/office/drawing/2014/main" id="{382EB243-FA78-40CF-8BBA-14203F7C6AE4}"/>
+                </a:ext>
+              </a:extLst>
+            </p:cNvPr>
+            <p:cNvSpPr txBox="1"/>
+            <p:nvPr/>
+          </p:nvSpPr>
+          <p:spPr>
+            <a:xfrm>
+              <a:off x="4533900" y="2076450"/>
+              <a:ext cx="1666875" cy="276225"/>
+            </a:xfrm>
+            <a:prstGeom prst="rect">
+              <a:avLst/>
+            </a:prstGeom>
+            <a:solidFill>
+              <a:schemeClr val="lt1"/>
+            </a:solidFill>
+            <a:ln w="12700">
+              <a:solidFill>
+                <a:prstClr val="black"/>
+              </a:solidFill>
+            </a:ln>
+          </p:spPr>
+          <p:txBody>
+            <a:bodyPr rot="0" spcFirstLastPara="0" vert="horz" wrap="square" lIns="91440" tIns="45720" rIns="91440" bIns="45720" numCol="1" spcCol="0" rtlCol="0" fromWordArt="0" anchor="t" anchorCtr="0" forceAA="0" compatLnSpc="1">
+              <a:prstTxWarp prst="textNoShape">
+                <a:avLst/>
+              </a:prstTxWarp>
+              <a:noAutofit/>
+            </a:bodyPr>
+            <a:lstStyle/>
+            <a:p>
+              <a:pPr>
+                <a:lnSpc>
+                  <a:spcPct val="107000"/>
+                </a:lnSpc>
+                <a:spcAft>
+                  <a:spcPts val="800"/>
+                </a:spcAft>
+              </a:pPr>
+              <a:r>
+                <a:rPr lang="en-US" sz="1100" i="1">
+                  <a:effectLst/>
+                  <a:latin typeface="Calibri" panose="020F0502020204030204" pitchFamily="34" charset="0"/>
+                  <a:ea typeface="Calibri" panose="020F0502020204030204" pitchFamily="34" charset="0"/>
+                  <a:cs typeface="Times New Roman" panose="02020603050405020304" pitchFamily="18" charset="0"/>
+                </a:rPr>
+                <a:t>Sardinops sagax</a:t>
+              </a:r>
+              <a:r>
+                <a:rPr lang="en-US" sz="1100">
+                  <a:effectLst/>
+                  <a:latin typeface="Calibri" panose="020F0502020204030204" pitchFamily="34" charset="0"/>
+                  <a:ea typeface="Calibri" panose="020F0502020204030204" pitchFamily="34" charset="0"/>
+                  <a:cs typeface="Times New Roman" panose="02020603050405020304" pitchFamily="18" charset="0"/>
+                </a:rPr>
+                <a:t> (sardine)</a:t>
+              </a:r>
+              <a:endParaRPr lang="nb-NO" sz="1100">
+                <a:effectLst/>
+                <a:latin typeface="Calibri" panose="020F0502020204030204" pitchFamily="34" charset="0"/>
+                <a:ea typeface="Calibri" panose="020F0502020204030204" pitchFamily="34" charset="0"/>
+                <a:cs typeface="Times New Roman" panose="02020603050405020304" pitchFamily="18" charset="0"/>
+              </a:endParaRPr>
+            </a:p>
+          </p:txBody>
+        </p:sp>
+        <p:sp>
+          <p:nvSpPr>
+            <p:cNvPr id="107" name="Text Box 21">
+              <a:extLst>
+                <a:ext uri="{FF2B5EF4-FFF2-40B4-BE49-F238E27FC236}">
+                  <a16:creationId xmlns:a16="http://schemas.microsoft.com/office/drawing/2014/main" id="{92F41E31-00F9-4FF1-8672-D5A5FDEA42EC}"/>
+                </a:ext>
+              </a:extLst>
+            </p:cNvPr>
+            <p:cNvSpPr txBox="1"/>
+            <p:nvPr/>
+          </p:nvSpPr>
+          <p:spPr>
+            <a:xfrm>
+              <a:off x="1562100" y="2095500"/>
+              <a:ext cx="2847975" cy="600075"/>
+            </a:xfrm>
+            <a:prstGeom prst="rect">
+              <a:avLst/>
+            </a:prstGeom>
+            <a:solidFill>
+              <a:schemeClr val="lt1"/>
+            </a:solidFill>
+            <a:ln w="12700">
+              <a:solidFill>
+                <a:prstClr val="black"/>
+              </a:solidFill>
+            </a:ln>
+          </p:spPr>
+          <p:txBody>
+            <a:bodyPr rot="0" spcFirstLastPara="0" vert="horz" wrap="square" lIns="91440" tIns="45720" rIns="91440" bIns="45720" numCol="1" spcCol="0" rtlCol="0" fromWordArt="0" anchor="t" anchorCtr="0" forceAA="0" compatLnSpc="1">
+              <a:prstTxWarp prst="textNoShape">
+                <a:avLst/>
+              </a:prstTxWarp>
+              <a:noAutofit/>
+            </a:bodyPr>
+            <a:lstStyle/>
+            <a:p>
+              <a:pPr>
+                <a:lnSpc>
+                  <a:spcPct val="107000"/>
+                </a:lnSpc>
+                <a:spcAft>
+                  <a:spcPts val="800"/>
+                </a:spcAft>
+              </a:pPr>
+              <a:r>
+                <a:rPr lang="en-US" sz="1100" i="1" dirty="0" err="1">
+                  <a:effectLst/>
+                  <a:latin typeface="Calibri" panose="020F0502020204030204" pitchFamily="34" charset="0"/>
+                  <a:ea typeface="Calibri" panose="020F0502020204030204" pitchFamily="34" charset="0"/>
+                  <a:cs typeface="Times New Roman" panose="02020603050405020304" pitchFamily="18" charset="0"/>
+                </a:rPr>
+                <a:t>Lampanyctodes</a:t>
+              </a:r>
+              <a:r>
+                <a:rPr lang="en-US" sz="1100" i="1" dirty="0">
+                  <a:effectLst/>
+                  <a:latin typeface="Calibri" panose="020F0502020204030204" pitchFamily="34" charset="0"/>
+                  <a:ea typeface="Calibri" panose="020F0502020204030204" pitchFamily="34" charset="0"/>
+                  <a:cs typeface="Times New Roman" panose="02020603050405020304" pitchFamily="18" charset="0"/>
+                </a:rPr>
+                <a:t> </a:t>
+              </a:r>
+              <a:r>
+                <a:rPr lang="en-US" sz="1100" i="1" dirty="0" err="1">
+                  <a:effectLst/>
+                  <a:latin typeface="Calibri" panose="020F0502020204030204" pitchFamily="34" charset="0"/>
+                  <a:ea typeface="Calibri" panose="020F0502020204030204" pitchFamily="34" charset="0"/>
+                  <a:cs typeface="Times New Roman" panose="02020603050405020304" pitchFamily="18" charset="0"/>
+                </a:rPr>
+                <a:t>hectoris</a:t>
+              </a:r>
+              <a:r>
+                <a:rPr lang="en-US" sz="1100" i="1" dirty="0">
+                  <a:effectLst/>
+                  <a:latin typeface="Calibri" panose="020F0502020204030204" pitchFamily="34" charset="0"/>
+                  <a:ea typeface="Calibri" panose="020F0502020204030204" pitchFamily="34" charset="0"/>
+                  <a:cs typeface="Times New Roman" panose="02020603050405020304" pitchFamily="18" charset="0"/>
+                </a:rPr>
+                <a:t> </a:t>
+              </a:r>
+              <a:r>
+                <a:rPr lang="en-US" sz="1100" dirty="0">
+                  <a:effectLst/>
+                  <a:latin typeface="Calibri" panose="020F0502020204030204" pitchFamily="34" charset="0"/>
+                  <a:ea typeface="Calibri" panose="020F0502020204030204" pitchFamily="34" charset="0"/>
+                  <a:cs typeface="Times New Roman" panose="02020603050405020304" pitchFamily="18" charset="0"/>
+                </a:rPr>
+                <a:t>(Hector’s lanternfish)</a:t>
+              </a:r>
+              <a:endParaRPr lang="nb-NO" sz="1100" dirty="0">
+                <a:effectLst/>
+                <a:latin typeface="Calibri" panose="020F0502020204030204" pitchFamily="34" charset="0"/>
+                <a:ea typeface="Calibri" panose="020F0502020204030204" pitchFamily="34" charset="0"/>
+                <a:cs typeface="Times New Roman" panose="02020603050405020304" pitchFamily="18" charset="0"/>
+              </a:endParaRPr>
+            </a:p>
+            <a:p>
+              <a:pPr>
+                <a:lnSpc>
+                  <a:spcPct val="107000"/>
+                </a:lnSpc>
+                <a:spcAft>
+                  <a:spcPts val="800"/>
+                </a:spcAft>
+              </a:pPr>
+              <a:r>
+                <a:rPr lang="en-US" sz="1100" i="1" dirty="0" err="1">
+                  <a:effectLst/>
+                  <a:latin typeface="Calibri" panose="020F0502020204030204" pitchFamily="34" charset="0"/>
+                  <a:ea typeface="Calibri" panose="020F0502020204030204" pitchFamily="34" charset="0"/>
+                  <a:cs typeface="Times New Roman" panose="02020603050405020304" pitchFamily="18" charset="0"/>
+                </a:rPr>
+                <a:t>Maurolicus</a:t>
+              </a:r>
+              <a:r>
+                <a:rPr lang="en-US" sz="1100" i="1" dirty="0">
+                  <a:effectLst/>
+                  <a:latin typeface="Calibri" panose="020F0502020204030204" pitchFamily="34" charset="0"/>
+                  <a:ea typeface="Calibri" panose="020F0502020204030204" pitchFamily="34" charset="0"/>
+                  <a:cs typeface="Times New Roman" panose="02020603050405020304" pitchFamily="18" charset="0"/>
+                </a:rPr>
+                <a:t> </a:t>
+              </a:r>
+              <a:r>
+                <a:rPr lang="en-US" sz="1100" i="1" dirty="0" err="1">
+                  <a:effectLst/>
+                  <a:latin typeface="Calibri" panose="020F0502020204030204" pitchFamily="34" charset="0"/>
+                  <a:ea typeface="Calibri" panose="020F0502020204030204" pitchFamily="34" charset="0"/>
+                  <a:cs typeface="Times New Roman" panose="02020603050405020304" pitchFamily="18" charset="0"/>
+                </a:rPr>
+                <a:t>walvisensis</a:t>
+              </a:r>
+              <a:r>
+                <a:rPr lang="en-US" sz="1100" i="1" dirty="0">
+                  <a:effectLst/>
+                  <a:latin typeface="Calibri" panose="020F0502020204030204" pitchFamily="34" charset="0"/>
+                  <a:ea typeface="Calibri" panose="020F0502020204030204" pitchFamily="34" charset="0"/>
+                  <a:cs typeface="Times New Roman" panose="02020603050405020304" pitchFamily="18" charset="0"/>
+                </a:rPr>
+                <a:t> </a:t>
+              </a:r>
+              <a:r>
+                <a:rPr lang="en-US" sz="1100" dirty="0">
+                  <a:effectLst/>
+                  <a:latin typeface="Calibri" panose="020F0502020204030204" pitchFamily="34" charset="0"/>
+                  <a:ea typeface="Calibri" panose="020F0502020204030204" pitchFamily="34" charset="0"/>
+                  <a:cs typeface="Times New Roman" panose="02020603050405020304" pitchFamily="18" charset="0"/>
+                </a:rPr>
+                <a:t>(</a:t>
+              </a:r>
+              <a:r>
+                <a:rPr lang="en-US" sz="1100" dirty="0" err="1">
+                  <a:effectLst/>
+                  <a:latin typeface="Calibri" panose="020F0502020204030204" pitchFamily="34" charset="0"/>
+                  <a:ea typeface="Calibri" panose="020F0502020204030204" pitchFamily="34" charset="0"/>
+                  <a:cs typeface="Times New Roman" panose="02020603050405020304" pitchFamily="18" charset="0"/>
+                </a:rPr>
+                <a:t>lightfish</a:t>
+              </a:r>
+              <a:r>
+                <a:rPr lang="en-US" sz="1100" dirty="0">
+                  <a:effectLst/>
+                  <a:latin typeface="Calibri" panose="020F0502020204030204" pitchFamily="34" charset="0"/>
+                  <a:ea typeface="Calibri" panose="020F0502020204030204" pitchFamily="34" charset="0"/>
+                  <a:cs typeface="Times New Roman" panose="02020603050405020304" pitchFamily="18" charset="0"/>
+                </a:rPr>
+                <a:t>)</a:t>
+              </a:r>
+              <a:endParaRPr lang="nb-NO" sz="1100" dirty="0">
+                <a:effectLst/>
+                <a:latin typeface="Calibri" panose="020F0502020204030204" pitchFamily="34" charset="0"/>
+                <a:ea typeface="Calibri" panose="020F0502020204030204" pitchFamily="34" charset="0"/>
+                <a:cs typeface="Times New Roman" panose="02020603050405020304" pitchFamily="18" charset="0"/>
+              </a:endParaRPr>
+            </a:p>
+            <a:p>
+              <a:pPr>
+                <a:lnSpc>
+                  <a:spcPct val="107000"/>
+                </a:lnSpc>
+                <a:spcAft>
+                  <a:spcPts val="800"/>
+                </a:spcAft>
+              </a:pPr>
+              <a:r>
+                <a:rPr lang="en-US" sz="1100" dirty="0">
+                  <a:effectLst/>
+                  <a:latin typeface="Calibri" panose="020F0502020204030204" pitchFamily="34" charset="0"/>
+                  <a:ea typeface="Calibri" panose="020F0502020204030204" pitchFamily="34" charset="0"/>
+                  <a:cs typeface="Times New Roman" panose="02020603050405020304" pitchFamily="18" charset="0"/>
+                </a:rPr>
+                <a:t> </a:t>
+              </a:r>
+              <a:endParaRPr lang="nb-NO" sz="1100" dirty="0">
+                <a:effectLst/>
+                <a:latin typeface="Calibri" panose="020F0502020204030204" pitchFamily="34" charset="0"/>
+                <a:ea typeface="Calibri" panose="020F0502020204030204" pitchFamily="34" charset="0"/>
+                <a:cs typeface="Times New Roman" panose="02020603050405020304" pitchFamily="18" charset="0"/>
+              </a:endParaRPr>
+            </a:p>
+            <a:p>
+              <a:pPr>
+                <a:lnSpc>
+                  <a:spcPct val="107000"/>
+                </a:lnSpc>
+                <a:spcAft>
+                  <a:spcPts val="800"/>
+                </a:spcAft>
+              </a:pPr>
+              <a:r>
+                <a:rPr lang="en-US" sz="1100" dirty="0">
+                  <a:effectLst/>
+                  <a:latin typeface="Calibri" panose="020F0502020204030204" pitchFamily="34" charset="0"/>
+                  <a:ea typeface="Calibri" panose="020F0502020204030204" pitchFamily="34" charset="0"/>
+                  <a:cs typeface="Times New Roman" panose="02020603050405020304" pitchFamily="18" charset="0"/>
+                </a:rPr>
+                <a:t> </a:t>
+              </a:r>
+              <a:endParaRPr lang="nb-NO" sz="1100" dirty="0">
+                <a:effectLst/>
+                <a:latin typeface="Calibri" panose="020F0502020204030204" pitchFamily="34" charset="0"/>
+                <a:ea typeface="Calibri" panose="020F0502020204030204" pitchFamily="34" charset="0"/>
+                <a:cs typeface="Times New Roman" panose="02020603050405020304" pitchFamily="18" charset="0"/>
+              </a:endParaRPr>
+            </a:p>
+          </p:txBody>
+        </p:sp>
+        <p:sp>
+          <p:nvSpPr>
+            <p:cNvPr id="108" name="Text Box 22">
+              <a:extLst>
+                <a:ext uri="{FF2B5EF4-FFF2-40B4-BE49-F238E27FC236}">
+                  <a16:creationId xmlns:a16="http://schemas.microsoft.com/office/drawing/2014/main" id="{7A181FB2-4C15-4900-85BD-D36E5816F5FE}"/>
+                </a:ext>
+              </a:extLst>
+            </p:cNvPr>
+            <p:cNvSpPr txBox="1"/>
+            <p:nvPr/>
+          </p:nvSpPr>
+          <p:spPr>
+            <a:xfrm>
+              <a:off x="2152650" y="1704975"/>
+              <a:ext cx="2238375" cy="285750"/>
+            </a:xfrm>
+            <a:prstGeom prst="rect">
+              <a:avLst/>
+            </a:prstGeom>
+            <a:solidFill>
+              <a:schemeClr val="lt1"/>
+            </a:solidFill>
+            <a:ln w="12700">
+              <a:solidFill>
+                <a:prstClr val="black"/>
+              </a:solidFill>
+            </a:ln>
+          </p:spPr>
+          <p:txBody>
+            <a:bodyPr rot="0" spcFirstLastPara="0" vert="horz" wrap="square" lIns="91440" tIns="45720" rIns="91440" bIns="45720" numCol="1" spcCol="0" rtlCol="0" fromWordArt="0" anchor="t" anchorCtr="0" forceAA="0" compatLnSpc="1">
+              <a:prstTxWarp prst="textNoShape">
+                <a:avLst/>
+              </a:prstTxWarp>
+              <a:noAutofit/>
+            </a:bodyPr>
+            <a:lstStyle/>
+            <a:p>
+              <a:pPr>
+                <a:lnSpc>
+                  <a:spcPct val="107000"/>
+                </a:lnSpc>
+                <a:spcAft>
+                  <a:spcPts val="800"/>
+                </a:spcAft>
+              </a:pPr>
+              <a:r>
+                <a:rPr lang="en-US" sz="1100" i="1" dirty="0" err="1">
+                  <a:effectLst/>
+                  <a:latin typeface="Calibri" panose="020F0502020204030204" pitchFamily="34" charset="0"/>
+                  <a:ea typeface="Calibri" panose="020F0502020204030204" pitchFamily="34" charset="0"/>
+                  <a:cs typeface="Times New Roman" panose="02020603050405020304" pitchFamily="18" charset="0"/>
+                </a:rPr>
+                <a:t>Scomber</a:t>
+              </a:r>
+              <a:r>
+                <a:rPr lang="en-US" sz="1100" i="1" dirty="0">
+                  <a:effectLst/>
+                  <a:latin typeface="Calibri" panose="020F0502020204030204" pitchFamily="34" charset="0"/>
+                  <a:ea typeface="Calibri" panose="020F0502020204030204" pitchFamily="34" charset="0"/>
+                  <a:cs typeface="Times New Roman" panose="02020603050405020304" pitchFamily="18" charset="0"/>
+                </a:rPr>
+                <a:t> japonicus </a:t>
+              </a:r>
+              <a:r>
+                <a:rPr lang="en-US" sz="1100" dirty="0">
+                  <a:effectLst/>
+                  <a:latin typeface="Calibri" panose="020F0502020204030204" pitchFamily="34" charset="0"/>
+                  <a:ea typeface="Calibri" panose="020F0502020204030204" pitchFamily="34" charset="0"/>
+                  <a:cs typeface="Times New Roman" panose="02020603050405020304" pitchFamily="18" charset="0"/>
+                </a:rPr>
+                <a:t>(chub mackerel)</a:t>
+              </a:r>
+              <a:endParaRPr lang="nb-NO" sz="1100" dirty="0">
+                <a:effectLst/>
+                <a:latin typeface="Calibri" panose="020F0502020204030204" pitchFamily="34" charset="0"/>
+                <a:ea typeface="Calibri" panose="020F0502020204030204" pitchFamily="34" charset="0"/>
+                <a:cs typeface="Times New Roman" panose="02020603050405020304" pitchFamily="18" charset="0"/>
+              </a:endParaRPr>
+            </a:p>
+            <a:p>
+              <a:pPr>
+                <a:lnSpc>
+                  <a:spcPct val="107000"/>
+                </a:lnSpc>
+                <a:spcAft>
+                  <a:spcPts val="800"/>
+                </a:spcAft>
+              </a:pPr>
+              <a:r>
+                <a:rPr lang="en-US" sz="1100" dirty="0">
+                  <a:effectLst/>
+                  <a:latin typeface="Calibri" panose="020F0502020204030204" pitchFamily="34" charset="0"/>
+                  <a:ea typeface="Calibri" panose="020F0502020204030204" pitchFamily="34" charset="0"/>
+                  <a:cs typeface="Times New Roman" panose="02020603050405020304" pitchFamily="18" charset="0"/>
+                </a:rPr>
+                <a:t> </a:t>
+              </a:r>
+              <a:endParaRPr lang="nb-NO" sz="1100" dirty="0">
+                <a:effectLst/>
+                <a:latin typeface="Calibri" panose="020F0502020204030204" pitchFamily="34" charset="0"/>
+                <a:ea typeface="Calibri" panose="020F0502020204030204" pitchFamily="34" charset="0"/>
+                <a:cs typeface="Times New Roman" panose="02020603050405020304" pitchFamily="18" charset="0"/>
+              </a:endParaRPr>
+            </a:p>
+          </p:txBody>
+        </p:sp>
+        <p:sp>
+          <p:nvSpPr>
+            <p:cNvPr id="109" name="Text Box 23">
+              <a:extLst>
+                <a:ext uri="{FF2B5EF4-FFF2-40B4-BE49-F238E27FC236}">
+                  <a16:creationId xmlns:a16="http://schemas.microsoft.com/office/drawing/2014/main" id="{BA8CD84E-7D52-4B23-93B4-4FCC743A1267}"/>
+                </a:ext>
+              </a:extLst>
+            </p:cNvPr>
+            <p:cNvSpPr txBox="1"/>
+            <p:nvPr/>
+          </p:nvSpPr>
+          <p:spPr>
+            <a:xfrm>
+              <a:off x="2085975" y="1257300"/>
+              <a:ext cx="2295525" cy="285750"/>
+            </a:xfrm>
+            <a:prstGeom prst="rect">
+              <a:avLst/>
+            </a:prstGeom>
+            <a:solidFill>
+              <a:schemeClr val="lt1"/>
+            </a:solidFill>
+            <a:ln w="12700">
+              <a:solidFill>
+                <a:prstClr val="black"/>
+              </a:solidFill>
+            </a:ln>
+          </p:spPr>
+          <p:txBody>
+            <a:bodyPr rot="0" spcFirstLastPara="0" vert="horz" wrap="square" lIns="91440" tIns="45720" rIns="91440" bIns="45720" numCol="1" spcCol="0" rtlCol="0" fromWordArt="0" anchor="t" anchorCtr="0" forceAA="0" compatLnSpc="1">
+              <a:prstTxWarp prst="textNoShape">
+                <a:avLst/>
+              </a:prstTxWarp>
+              <a:noAutofit/>
+            </a:bodyPr>
+            <a:lstStyle/>
+            <a:p>
+              <a:pPr>
+                <a:lnSpc>
+                  <a:spcPct val="107000"/>
+                </a:lnSpc>
+                <a:spcAft>
+                  <a:spcPts val="800"/>
+                </a:spcAft>
+              </a:pPr>
+              <a:r>
+                <a:rPr lang="en-US" sz="1100" i="1" dirty="0" err="1">
+                  <a:effectLst/>
+                  <a:latin typeface="Calibri" panose="020F0502020204030204" pitchFamily="34" charset="0"/>
+                  <a:ea typeface="Calibri" panose="020F0502020204030204" pitchFamily="34" charset="0"/>
+                  <a:cs typeface="Times New Roman" panose="02020603050405020304" pitchFamily="18" charset="0"/>
+                </a:rPr>
+                <a:t>Trachurus</a:t>
+              </a:r>
+              <a:r>
+                <a:rPr lang="en-US" sz="1100" i="1" dirty="0">
+                  <a:effectLst/>
+                  <a:latin typeface="Calibri" panose="020F0502020204030204" pitchFamily="34" charset="0"/>
+                  <a:ea typeface="Calibri" panose="020F0502020204030204" pitchFamily="34" charset="0"/>
+                  <a:cs typeface="Times New Roman" panose="02020603050405020304" pitchFamily="18" charset="0"/>
+                </a:rPr>
+                <a:t> capensis </a:t>
+              </a:r>
+              <a:r>
+                <a:rPr lang="en-US" sz="1100" dirty="0">
+                  <a:effectLst/>
+                  <a:latin typeface="Calibri" panose="020F0502020204030204" pitchFamily="34" charset="0"/>
+                  <a:ea typeface="Calibri" panose="020F0502020204030204" pitchFamily="34" charset="0"/>
+                  <a:cs typeface="Times New Roman" panose="02020603050405020304" pitchFamily="18" charset="0"/>
+                </a:rPr>
+                <a:t>(horse mackerel)</a:t>
+              </a:r>
+              <a:endParaRPr lang="nb-NO" sz="1100" dirty="0">
+                <a:effectLst/>
+                <a:latin typeface="Calibri" panose="020F0502020204030204" pitchFamily="34" charset="0"/>
+                <a:ea typeface="Calibri" panose="020F0502020204030204" pitchFamily="34" charset="0"/>
+                <a:cs typeface="Times New Roman" panose="02020603050405020304" pitchFamily="18" charset="0"/>
+              </a:endParaRPr>
+            </a:p>
+            <a:p>
+              <a:pPr>
+                <a:lnSpc>
+                  <a:spcPct val="107000"/>
+                </a:lnSpc>
+                <a:spcAft>
+                  <a:spcPts val="800"/>
+                </a:spcAft>
+              </a:pPr>
+              <a:r>
+                <a:rPr lang="en-US" sz="1100" dirty="0">
+                  <a:effectLst/>
+                  <a:latin typeface="Calibri" panose="020F0502020204030204" pitchFamily="34" charset="0"/>
+                  <a:ea typeface="Calibri" panose="020F0502020204030204" pitchFamily="34" charset="0"/>
+                  <a:cs typeface="Times New Roman" panose="02020603050405020304" pitchFamily="18" charset="0"/>
+                </a:rPr>
+                <a:t> </a:t>
+              </a:r>
+              <a:endParaRPr lang="nb-NO" sz="1100" dirty="0">
+                <a:effectLst/>
+                <a:latin typeface="Calibri" panose="020F0502020204030204" pitchFamily="34" charset="0"/>
+                <a:ea typeface="Calibri" panose="020F0502020204030204" pitchFamily="34" charset="0"/>
+                <a:cs typeface="Times New Roman" panose="02020603050405020304" pitchFamily="18" charset="0"/>
+              </a:endParaRPr>
+            </a:p>
+          </p:txBody>
+        </p:sp>
+        <p:sp>
+          <p:nvSpPr>
+            <p:cNvPr id="110" name="Arrow: Down 109">
+              <a:extLst>
+                <a:ext uri="{FF2B5EF4-FFF2-40B4-BE49-F238E27FC236}">
+                  <a16:creationId xmlns:a16="http://schemas.microsoft.com/office/drawing/2014/main" id="{26727342-EEAE-44D7-9AA7-A3DA3B1A302D}"/>
+                </a:ext>
+              </a:extLst>
+            </p:cNvPr>
+            <p:cNvSpPr/>
+            <p:nvPr/>
+          </p:nvSpPr>
+          <p:spPr>
+            <a:xfrm>
+              <a:off x="2790825" y="2790825"/>
+              <a:ext cx="484505" cy="1035050"/>
+            </a:xfrm>
+            <a:prstGeom prst="downArrow">
+              <a:avLst/>
+            </a:prstGeom>
+          </p:spPr>
+          <p:style>
+            <a:lnRef idx="2">
+              <a:schemeClr val="accent1">
+                <a:shade val="50000"/>
+              </a:schemeClr>
+            </a:lnRef>
+            <a:fillRef idx="1">
+              <a:schemeClr val="accent1"/>
+            </a:fillRef>
+            <a:effectRef idx="0">
+              <a:schemeClr val="accent1"/>
+            </a:effectRef>
+            <a:fontRef idx="minor">
+              <a:schemeClr val="lt1"/>
+            </a:fontRef>
+          </p:style>
+          <p:txBody>
+            <a:bodyPr rot="0" spcFirstLastPara="0" vert="horz" wrap="square" lIns="91440" tIns="45720" rIns="91440" bIns="45720" numCol="1" spcCol="0" rtlCol="0" fromWordArt="0" anchor="ctr" anchorCtr="0" forceAA="0" compatLnSpc="1">
+              <a:prstTxWarp prst="textNoShape">
+                <a:avLst/>
+              </a:prstTxWarp>
+              <a:noAutofit/>
+            </a:bodyPr>
+            <a:lstStyle/>
+            <a:p>
+              <a:endParaRPr lang="nb-NO"/>
+            </a:p>
+          </p:txBody>
+        </p:sp>
+        <p:sp>
+          <p:nvSpPr>
+            <p:cNvPr id="111" name="Text Box 45">
+              <a:extLst>
+                <a:ext uri="{FF2B5EF4-FFF2-40B4-BE49-F238E27FC236}">
+                  <a16:creationId xmlns:a16="http://schemas.microsoft.com/office/drawing/2014/main" id="{15764C6B-E5BE-4463-B5DD-C8C70FC23454}"/>
+                </a:ext>
+              </a:extLst>
+            </p:cNvPr>
+            <p:cNvSpPr txBox="1"/>
+            <p:nvPr/>
+          </p:nvSpPr>
+          <p:spPr>
+            <a:xfrm>
+              <a:off x="2186801" y="3896489"/>
+              <a:ext cx="1758930" cy="304800"/>
+            </a:xfrm>
+            <a:prstGeom prst="rect">
+              <a:avLst/>
+            </a:prstGeom>
+            <a:solidFill>
+              <a:schemeClr val="lt1"/>
+            </a:solidFill>
+            <a:ln w="12700">
+              <a:solidFill>
+                <a:prstClr val="black"/>
+              </a:solidFill>
+            </a:ln>
+          </p:spPr>
+          <p:txBody>
+            <a:bodyPr rot="0" spcFirstLastPara="0" vert="horz" wrap="square" lIns="91440" tIns="45720" rIns="91440" bIns="45720" numCol="1" spcCol="0" rtlCol="0" fromWordArt="0" anchor="t" anchorCtr="0" forceAA="0" compatLnSpc="1">
+              <a:prstTxWarp prst="textNoShape">
+                <a:avLst/>
+              </a:prstTxWarp>
+              <a:noAutofit/>
+            </a:bodyPr>
+            <a:lstStyle/>
+            <a:p>
+              <a:pPr>
+                <a:lnSpc>
+                  <a:spcPct val="107000"/>
+                </a:lnSpc>
+                <a:spcAft>
+                  <a:spcPts val="800"/>
+                </a:spcAft>
+              </a:pPr>
+              <a:r>
+                <a:rPr lang="en-US" sz="1100" dirty="0">
+                  <a:effectLst/>
+                  <a:latin typeface="Calibri" panose="020F0502020204030204" pitchFamily="34" charset="0"/>
+                  <a:ea typeface="Calibri" panose="020F0502020204030204" pitchFamily="34" charset="0"/>
+                  <a:cs typeface="Times New Roman" panose="02020603050405020304" pitchFamily="18" charset="0"/>
+                </a:rPr>
+                <a:t>Biology -&gt; whole fish frozen</a:t>
+              </a:r>
+              <a:endParaRPr lang="nb-NO" sz="1100" dirty="0">
+                <a:effectLst/>
+                <a:latin typeface="Calibri" panose="020F0502020204030204" pitchFamily="34" charset="0"/>
+                <a:ea typeface="Calibri" panose="020F0502020204030204" pitchFamily="34" charset="0"/>
+                <a:cs typeface="Times New Roman" panose="02020603050405020304" pitchFamily="18" charset="0"/>
+              </a:endParaRPr>
+            </a:p>
+          </p:txBody>
+        </p:sp>
+        <p:sp>
+          <p:nvSpPr>
+            <p:cNvPr id="112" name="Text Box 26">
+              <a:extLst>
+                <a:ext uri="{FF2B5EF4-FFF2-40B4-BE49-F238E27FC236}">
+                  <a16:creationId xmlns:a16="http://schemas.microsoft.com/office/drawing/2014/main" id="{676252A6-5B3F-405F-85D8-D45AE81DF81B}"/>
+                </a:ext>
+              </a:extLst>
+            </p:cNvPr>
+            <p:cNvSpPr txBox="1"/>
+            <p:nvPr/>
+          </p:nvSpPr>
+          <p:spPr>
+            <a:xfrm>
+              <a:off x="3238500" y="3028950"/>
+              <a:ext cx="533400" cy="304800"/>
+            </a:xfrm>
+            <a:prstGeom prst="rect">
+              <a:avLst/>
+            </a:prstGeom>
+            <a:solidFill>
+              <a:schemeClr val="lt1"/>
+            </a:solidFill>
+            <a:ln w="12700">
+              <a:solidFill>
+                <a:srgbClr val="FF0000"/>
+              </a:solidFill>
+            </a:ln>
+          </p:spPr>
+          <p:txBody>
+            <a:bodyPr rot="0" spcFirstLastPara="0" vert="horz" wrap="square" lIns="91440" tIns="45720" rIns="91440" bIns="45720" numCol="1" spcCol="0" rtlCol="0" fromWordArt="0" anchor="t" anchorCtr="0" forceAA="0" compatLnSpc="1">
+              <a:prstTxWarp prst="textNoShape">
+                <a:avLst/>
+              </a:prstTxWarp>
+              <a:noAutofit/>
+            </a:bodyPr>
+            <a:lstStyle/>
+            <a:p>
+              <a:pPr algn="ctr">
+                <a:lnSpc>
+                  <a:spcPct val="107000"/>
+                </a:lnSpc>
+                <a:spcAft>
+                  <a:spcPts val="800"/>
+                </a:spcAft>
+              </a:pPr>
+              <a:r>
+                <a:rPr lang="en-US" sz="1100" b="1">
+                  <a:solidFill>
+                    <a:srgbClr val="FF0000"/>
+                  </a:solidFill>
+                  <a:effectLst/>
+                  <a:latin typeface="Calibri" panose="020F0502020204030204" pitchFamily="34" charset="0"/>
+                  <a:ea typeface="Calibri" panose="020F0502020204030204" pitchFamily="34" charset="0"/>
+                  <a:cs typeface="Times New Roman" panose="02020603050405020304" pitchFamily="18" charset="0"/>
+                </a:rPr>
+                <a:t>25-50</a:t>
+              </a:r>
+              <a:endParaRPr lang="nb-NO" sz="1100">
+                <a:effectLst/>
+                <a:latin typeface="Calibri" panose="020F0502020204030204" pitchFamily="34" charset="0"/>
+                <a:ea typeface="Calibri" panose="020F0502020204030204" pitchFamily="34" charset="0"/>
+                <a:cs typeface="Times New Roman" panose="02020603050405020304" pitchFamily="18" charset="0"/>
+              </a:endParaRPr>
+            </a:p>
+          </p:txBody>
+        </p:sp>
+        <p:sp>
+          <p:nvSpPr>
+            <p:cNvPr id="113" name="Text Box 41">
+              <a:extLst>
+                <a:ext uri="{FF2B5EF4-FFF2-40B4-BE49-F238E27FC236}">
+                  <a16:creationId xmlns:a16="http://schemas.microsoft.com/office/drawing/2014/main" id="{27EF3474-58EE-4B2C-9B2E-12F9C0CFB77F}"/>
+                </a:ext>
+              </a:extLst>
+            </p:cNvPr>
+            <p:cNvSpPr txBox="1"/>
+            <p:nvPr/>
+          </p:nvSpPr>
+          <p:spPr>
+            <a:xfrm>
+              <a:off x="-94569" y="3037610"/>
+              <a:ext cx="1892640" cy="314326"/>
+            </a:xfrm>
+            <a:prstGeom prst="rect">
+              <a:avLst/>
+            </a:prstGeom>
+            <a:solidFill>
+              <a:schemeClr val="lt1"/>
+            </a:solidFill>
+            <a:ln w="12700">
+              <a:solidFill>
+                <a:prstClr val="black"/>
+              </a:solidFill>
+            </a:ln>
+          </p:spPr>
+          <p:txBody>
+            <a:bodyPr rot="0" spcFirstLastPara="0" vert="horz" wrap="square" lIns="91440" tIns="45720" rIns="91440" bIns="45720" numCol="1" spcCol="0" rtlCol="0" fromWordArt="0" anchor="t" anchorCtr="0" forceAA="0" compatLnSpc="1">
+              <a:prstTxWarp prst="textNoShape">
+                <a:avLst/>
+              </a:prstTxWarp>
+              <a:noAutofit/>
+            </a:bodyPr>
+            <a:lstStyle/>
+            <a:p>
+              <a:pPr>
+                <a:lnSpc>
+                  <a:spcPct val="107000"/>
+                </a:lnSpc>
+                <a:spcAft>
+                  <a:spcPts val="800"/>
+                </a:spcAft>
+              </a:pPr>
+              <a:r>
+                <a:rPr lang="en-US" sz="1100" dirty="0">
+                  <a:effectLst/>
+                  <a:latin typeface="Calibri" panose="020F0502020204030204" pitchFamily="34" charset="0"/>
+                  <a:ea typeface="Calibri" panose="020F0502020204030204" pitchFamily="34" charset="0"/>
+                  <a:cs typeface="Times New Roman" panose="02020603050405020304" pitchFamily="18" charset="0"/>
+                </a:rPr>
+                <a:t>meristic -&gt; whole fish frozen</a:t>
+              </a:r>
+              <a:endParaRPr lang="nb-NO" sz="1100" dirty="0">
+                <a:effectLst/>
+                <a:latin typeface="Calibri" panose="020F0502020204030204" pitchFamily="34" charset="0"/>
+                <a:ea typeface="Calibri" panose="020F0502020204030204" pitchFamily="34" charset="0"/>
+                <a:cs typeface="Times New Roman" panose="02020603050405020304" pitchFamily="18" charset="0"/>
+              </a:endParaRPr>
+            </a:p>
+          </p:txBody>
+        </p:sp>
+        <p:sp>
+          <p:nvSpPr>
+            <p:cNvPr id="114" name="Arrow: Bent-Up 113">
+              <a:extLst>
+                <a:ext uri="{FF2B5EF4-FFF2-40B4-BE49-F238E27FC236}">
+                  <a16:creationId xmlns:a16="http://schemas.microsoft.com/office/drawing/2014/main" id="{4C5F2892-72CC-4C10-8404-E1E13C6C35CC}"/>
+                </a:ext>
+              </a:extLst>
+            </p:cNvPr>
+            <p:cNvSpPr/>
+            <p:nvPr/>
+          </p:nvSpPr>
+          <p:spPr>
+            <a:xfrm rot="10800000">
+              <a:off x="428625" y="1695450"/>
+              <a:ext cx="1647825" cy="1266825"/>
+            </a:xfrm>
+            <a:prstGeom prst="bentUpArrow">
+              <a:avLst/>
+            </a:prstGeom>
+          </p:spPr>
+          <p:style>
+            <a:lnRef idx="2">
+              <a:schemeClr val="accent1">
+                <a:shade val="50000"/>
+              </a:schemeClr>
+            </a:lnRef>
+            <a:fillRef idx="1">
+              <a:schemeClr val="accent1"/>
+            </a:fillRef>
+            <a:effectRef idx="0">
+              <a:schemeClr val="accent1"/>
+            </a:effectRef>
+            <a:fontRef idx="minor">
+              <a:schemeClr val="lt1"/>
+            </a:fontRef>
+          </p:style>
+          <p:txBody>
+            <a:bodyPr rot="0" spcFirstLastPara="0" vert="horz" wrap="square" lIns="91440" tIns="45720" rIns="91440" bIns="45720" numCol="1" spcCol="0" rtlCol="0" fromWordArt="0" anchor="ctr" anchorCtr="0" forceAA="0" compatLnSpc="1">
+              <a:prstTxWarp prst="textNoShape">
+                <a:avLst/>
+              </a:prstTxWarp>
+              <a:noAutofit/>
+            </a:bodyPr>
+            <a:lstStyle/>
+            <a:p>
+              <a:endParaRPr lang="nb-NO"/>
+            </a:p>
+          </p:txBody>
+        </p:sp>
+        <p:sp>
+          <p:nvSpPr>
+            <p:cNvPr id="115" name="Text Box 28">
+              <a:extLst>
+                <a:ext uri="{FF2B5EF4-FFF2-40B4-BE49-F238E27FC236}">
+                  <a16:creationId xmlns:a16="http://schemas.microsoft.com/office/drawing/2014/main" id="{8D2CC807-8EC3-4559-A5A1-6AEA6CD214EB}"/>
+                </a:ext>
+              </a:extLst>
+            </p:cNvPr>
+            <p:cNvSpPr txBox="1"/>
+            <p:nvPr/>
+          </p:nvSpPr>
+          <p:spPr>
+            <a:xfrm>
+              <a:off x="123825" y="2028825"/>
+              <a:ext cx="400050" cy="304800"/>
+            </a:xfrm>
+            <a:prstGeom prst="rect">
+              <a:avLst/>
+            </a:prstGeom>
+            <a:solidFill>
+              <a:schemeClr val="lt1"/>
+            </a:solidFill>
+            <a:ln w="12700">
+              <a:solidFill>
+                <a:srgbClr val="FF0000"/>
+              </a:solidFill>
+            </a:ln>
+          </p:spPr>
+          <p:txBody>
+            <a:bodyPr rot="0" spcFirstLastPara="0" vert="horz" wrap="square" lIns="91440" tIns="45720" rIns="91440" bIns="45720" numCol="1" spcCol="0" rtlCol="0" fromWordArt="0" anchor="t" anchorCtr="0" forceAA="0" compatLnSpc="1">
+              <a:prstTxWarp prst="textNoShape">
+                <a:avLst/>
+              </a:prstTxWarp>
+              <a:noAutofit/>
+            </a:bodyPr>
+            <a:lstStyle/>
+            <a:p>
+              <a:pPr algn="ctr">
+                <a:lnSpc>
+                  <a:spcPct val="107000"/>
+                </a:lnSpc>
+                <a:spcAft>
+                  <a:spcPts val="800"/>
+                </a:spcAft>
+              </a:pPr>
+              <a:r>
+                <a:rPr lang="en-US" sz="1100" b="1">
+                  <a:solidFill>
+                    <a:srgbClr val="FF0000"/>
+                  </a:solidFill>
+                  <a:effectLst/>
+                  <a:latin typeface="Calibri" panose="020F0502020204030204" pitchFamily="34" charset="0"/>
+                  <a:ea typeface="Calibri" panose="020F0502020204030204" pitchFamily="34" charset="0"/>
+                  <a:cs typeface="Times New Roman" panose="02020603050405020304" pitchFamily="18" charset="0"/>
+                </a:rPr>
+                <a:t>25</a:t>
+              </a:r>
+              <a:endParaRPr lang="nb-NO" sz="1100">
+                <a:effectLst/>
+                <a:latin typeface="Calibri" panose="020F0502020204030204" pitchFamily="34" charset="0"/>
+                <a:ea typeface="Calibri" panose="020F0502020204030204" pitchFamily="34" charset="0"/>
+                <a:cs typeface="Times New Roman" panose="02020603050405020304" pitchFamily="18" charset="0"/>
+              </a:endParaRPr>
+            </a:p>
+          </p:txBody>
+        </p:sp>
+        <p:sp>
+          <p:nvSpPr>
+            <p:cNvPr id="116" name="Text Box 33">
+              <a:extLst>
+                <a:ext uri="{FF2B5EF4-FFF2-40B4-BE49-F238E27FC236}">
+                  <a16:creationId xmlns:a16="http://schemas.microsoft.com/office/drawing/2014/main" id="{E7986E43-468E-4F6A-9E80-185C4DC603E1}"/>
+                </a:ext>
+              </a:extLst>
+            </p:cNvPr>
+            <p:cNvSpPr txBox="1"/>
+            <p:nvPr/>
+          </p:nvSpPr>
+          <p:spPr>
+            <a:xfrm>
+              <a:off x="8725925" y="1310162"/>
+              <a:ext cx="2086518" cy="276225"/>
+            </a:xfrm>
+            <a:prstGeom prst="rect">
+              <a:avLst/>
+            </a:prstGeom>
+            <a:solidFill>
+              <a:schemeClr val="lt1"/>
+            </a:solidFill>
+            <a:ln w="12700">
+              <a:solidFill>
+                <a:prstClr val="black"/>
+              </a:solidFill>
+            </a:ln>
+          </p:spPr>
+          <p:txBody>
+            <a:bodyPr rot="0" spcFirstLastPara="0" vert="horz" wrap="square" lIns="91440" tIns="45720" rIns="91440" bIns="45720" numCol="1" spcCol="0" rtlCol="0" fromWordArt="0" anchor="t" anchorCtr="0" forceAA="0" compatLnSpc="1">
+              <a:prstTxWarp prst="textNoShape">
+                <a:avLst/>
+              </a:prstTxWarp>
+              <a:noAutofit/>
+            </a:bodyPr>
+            <a:lstStyle/>
+            <a:p>
+              <a:pPr>
+                <a:lnSpc>
+                  <a:spcPct val="107000"/>
+                </a:lnSpc>
+                <a:spcAft>
+                  <a:spcPts val="800"/>
+                </a:spcAft>
+              </a:pPr>
+              <a:r>
+                <a:rPr lang="en-US" sz="1100">
+                  <a:effectLst/>
+                  <a:latin typeface="Calibri" panose="020F0502020204030204" pitchFamily="34" charset="0"/>
+                  <a:ea typeface="Calibri" panose="020F0502020204030204" pitchFamily="34" charset="0"/>
+                  <a:cs typeface="Times New Roman" panose="02020603050405020304" pitchFamily="18" charset="0"/>
+                </a:rPr>
+                <a:t>Micro-plastic -&gt; whole fish frozen</a:t>
+              </a:r>
+              <a:endParaRPr lang="nb-NO" sz="1100">
+                <a:effectLst/>
+                <a:latin typeface="Calibri" panose="020F0502020204030204" pitchFamily="34" charset="0"/>
+                <a:ea typeface="Calibri" panose="020F0502020204030204" pitchFamily="34" charset="0"/>
+                <a:cs typeface="Times New Roman" panose="02020603050405020304" pitchFamily="18" charset="0"/>
+              </a:endParaRPr>
+            </a:p>
+          </p:txBody>
+        </p:sp>
+        <p:sp>
+          <p:nvSpPr>
+            <p:cNvPr id="117" name="Arrow: Down 116">
+              <a:extLst>
+                <a:ext uri="{FF2B5EF4-FFF2-40B4-BE49-F238E27FC236}">
+                  <a16:creationId xmlns:a16="http://schemas.microsoft.com/office/drawing/2014/main" id="{D2E1329A-CE21-467C-9E64-022227C1218C}"/>
+                </a:ext>
+              </a:extLst>
+            </p:cNvPr>
+            <p:cNvSpPr/>
+            <p:nvPr/>
+          </p:nvSpPr>
+          <p:spPr>
+            <a:xfrm rot="16200000">
+              <a:off x="7895908" y="961707"/>
+              <a:ext cx="484505" cy="973137"/>
+            </a:xfrm>
+            <a:prstGeom prst="downArrow">
+              <a:avLst/>
+            </a:prstGeom>
+          </p:spPr>
+          <p:style>
+            <a:lnRef idx="2">
+              <a:schemeClr val="accent1">
+                <a:shade val="50000"/>
+              </a:schemeClr>
+            </a:lnRef>
+            <a:fillRef idx="1">
+              <a:schemeClr val="accent1"/>
+            </a:fillRef>
+            <a:effectRef idx="0">
+              <a:schemeClr val="accent1"/>
+            </a:effectRef>
+            <a:fontRef idx="minor">
+              <a:schemeClr val="lt1"/>
+            </a:fontRef>
+          </p:style>
+          <p:txBody>
+            <a:bodyPr rot="0" spcFirstLastPara="0" vert="horz" wrap="square" lIns="91440" tIns="45720" rIns="91440" bIns="45720" numCol="1" spcCol="0" rtlCol="0" fromWordArt="0" anchor="ctr" anchorCtr="0" forceAA="0" compatLnSpc="1">
+              <a:prstTxWarp prst="textNoShape">
+                <a:avLst/>
+              </a:prstTxWarp>
+              <a:noAutofit/>
+            </a:bodyPr>
+            <a:lstStyle/>
+            <a:p>
+              <a:endParaRPr lang="nb-NO"/>
+            </a:p>
+          </p:txBody>
+        </p:sp>
+        <p:sp>
+          <p:nvSpPr>
+            <p:cNvPr id="118" name="Text Box 35">
+              <a:extLst>
+                <a:ext uri="{FF2B5EF4-FFF2-40B4-BE49-F238E27FC236}">
+                  <a16:creationId xmlns:a16="http://schemas.microsoft.com/office/drawing/2014/main" id="{290C5CE3-DE5D-4BEF-AA67-7EABFE1A168F}"/>
+                </a:ext>
+              </a:extLst>
+            </p:cNvPr>
+            <p:cNvSpPr txBox="1"/>
+            <p:nvPr/>
+          </p:nvSpPr>
+          <p:spPr>
+            <a:xfrm>
+              <a:off x="7829550" y="981075"/>
+              <a:ext cx="400050" cy="304800"/>
+            </a:xfrm>
+            <a:prstGeom prst="rect">
+              <a:avLst/>
+            </a:prstGeom>
+            <a:solidFill>
+              <a:schemeClr val="lt1"/>
+            </a:solidFill>
+            <a:ln w="12700">
+              <a:solidFill>
+                <a:srgbClr val="FF0000"/>
+              </a:solidFill>
+            </a:ln>
+          </p:spPr>
+          <p:txBody>
+            <a:bodyPr rot="0" spcFirstLastPara="0" vert="horz" wrap="square" lIns="91440" tIns="45720" rIns="91440" bIns="45720" numCol="1" spcCol="0" rtlCol="0" fromWordArt="0" anchor="t" anchorCtr="0" forceAA="0" compatLnSpc="1">
+              <a:prstTxWarp prst="textNoShape">
+                <a:avLst/>
+              </a:prstTxWarp>
+              <a:noAutofit/>
+            </a:bodyPr>
+            <a:lstStyle/>
+            <a:p>
+              <a:pPr algn="ctr">
+                <a:lnSpc>
+                  <a:spcPct val="107000"/>
+                </a:lnSpc>
+                <a:spcAft>
+                  <a:spcPts val="800"/>
+                </a:spcAft>
+              </a:pPr>
+              <a:r>
+                <a:rPr lang="en-US" sz="1100" b="1">
+                  <a:solidFill>
+                    <a:srgbClr val="FF0000"/>
+                  </a:solidFill>
+                  <a:effectLst/>
+                  <a:latin typeface="Calibri" panose="020F0502020204030204" pitchFamily="34" charset="0"/>
+                  <a:ea typeface="Calibri" panose="020F0502020204030204" pitchFamily="34" charset="0"/>
+                  <a:cs typeface="Times New Roman" panose="02020603050405020304" pitchFamily="18" charset="0"/>
+                </a:rPr>
+                <a:t>50</a:t>
+              </a:r>
+              <a:endParaRPr lang="nb-NO" sz="1100">
+                <a:effectLst/>
+                <a:latin typeface="Calibri" panose="020F0502020204030204" pitchFamily="34" charset="0"/>
+                <a:ea typeface="Calibri" panose="020F0502020204030204" pitchFamily="34" charset="0"/>
+                <a:cs typeface="Times New Roman" panose="02020603050405020304" pitchFamily="18" charset="0"/>
+              </a:endParaRPr>
+            </a:p>
+          </p:txBody>
+        </p:sp>
+        <p:sp>
+          <p:nvSpPr>
+            <p:cNvPr id="119" name="Arrow: Down 118">
+              <a:extLst>
+                <a:ext uri="{FF2B5EF4-FFF2-40B4-BE49-F238E27FC236}">
+                  <a16:creationId xmlns:a16="http://schemas.microsoft.com/office/drawing/2014/main" id="{DA083ADE-056C-4797-92BD-9FA21AA944A2}"/>
+                </a:ext>
+              </a:extLst>
+            </p:cNvPr>
+            <p:cNvSpPr/>
+            <p:nvPr/>
+          </p:nvSpPr>
+          <p:spPr>
+            <a:xfrm>
+              <a:off x="4933950" y="2409825"/>
+              <a:ext cx="484505" cy="2038350"/>
+            </a:xfrm>
+            <a:prstGeom prst="downArrow">
+              <a:avLst/>
+            </a:prstGeom>
+          </p:spPr>
+          <p:style>
+            <a:lnRef idx="2">
+              <a:schemeClr val="accent1">
+                <a:shade val="50000"/>
+              </a:schemeClr>
+            </a:lnRef>
+            <a:fillRef idx="1">
+              <a:schemeClr val="accent1"/>
+            </a:fillRef>
+            <a:effectRef idx="0">
+              <a:schemeClr val="accent1"/>
+            </a:effectRef>
+            <a:fontRef idx="minor">
+              <a:schemeClr val="lt1"/>
+            </a:fontRef>
+          </p:style>
+          <p:txBody>
+            <a:bodyPr rot="0" spcFirstLastPara="0" vert="horz" wrap="square" lIns="91440" tIns="45720" rIns="91440" bIns="45720" numCol="1" spcCol="0" rtlCol="0" fromWordArt="0" anchor="ctr" anchorCtr="0" forceAA="0" compatLnSpc="1">
+              <a:prstTxWarp prst="textNoShape">
+                <a:avLst/>
+              </a:prstTxWarp>
+              <a:noAutofit/>
+            </a:bodyPr>
+            <a:lstStyle/>
+            <a:p>
+              <a:endParaRPr lang="nb-NO"/>
+            </a:p>
+          </p:txBody>
+        </p:sp>
+        <p:sp>
+          <p:nvSpPr>
+            <p:cNvPr id="120" name="Text Box 42">
+              <a:extLst>
+                <a:ext uri="{FF2B5EF4-FFF2-40B4-BE49-F238E27FC236}">
+                  <a16:creationId xmlns:a16="http://schemas.microsoft.com/office/drawing/2014/main" id="{DFFD40B6-FE99-4B9E-BBD2-C1186E299B81}"/>
+                </a:ext>
+              </a:extLst>
+            </p:cNvPr>
+            <p:cNvSpPr txBox="1"/>
+            <p:nvPr/>
+          </p:nvSpPr>
+          <p:spPr>
+            <a:xfrm>
+              <a:off x="5372100" y="2943225"/>
+              <a:ext cx="400050" cy="304800"/>
+            </a:xfrm>
+            <a:prstGeom prst="rect">
+              <a:avLst/>
+            </a:prstGeom>
+            <a:solidFill>
+              <a:schemeClr val="lt1"/>
+            </a:solidFill>
+            <a:ln w="12700">
+              <a:solidFill>
+                <a:srgbClr val="FF0000"/>
+              </a:solidFill>
+            </a:ln>
+          </p:spPr>
+          <p:txBody>
+            <a:bodyPr rot="0" spcFirstLastPara="0" vert="horz" wrap="square" lIns="91440" tIns="45720" rIns="91440" bIns="45720" numCol="1" spcCol="0" rtlCol="0" fromWordArt="0" anchor="t" anchorCtr="0" forceAA="0" compatLnSpc="1">
+              <a:prstTxWarp prst="textNoShape">
+                <a:avLst/>
+              </a:prstTxWarp>
+              <a:noAutofit/>
+            </a:bodyPr>
+            <a:lstStyle/>
+            <a:p>
+              <a:pPr algn="ctr">
+                <a:lnSpc>
+                  <a:spcPct val="107000"/>
+                </a:lnSpc>
+                <a:spcAft>
+                  <a:spcPts val="800"/>
+                </a:spcAft>
+              </a:pPr>
+              <a:r>
+                <a:rPr lang="en-US" sz="1100" b="1">
+                  <a:solidFill>
+                    <a:srgbClr val="FF0000"/>
+                  </a:solidFill>
+                  <a:effectLst/>
+                  <a:latin typeface="Calibri" panose="020F0502020204030204" pitchFamily="34" charset="0"/>
+                  <a:ea typeface="Calibri" panose="020F0502020204030204" pitchFamily="34" charset="0"/>
+                  <a:cs typeface="Times New Roman" panose="02020603050405020304" pitchFamily="18" charset="0"/>
+                </a:rPr>
+                <a:t>50</a:t>
+              </a:r>
+              <a:endParaRPr lang="nb-NO" sz="1100">
+                <a:effectLst/>
+                <a:latin typeface="Calibri" panose="020F0502020204030204" pitchFamily="34" charset="0"/>
+                <a:ea typeface="Calibri" panose="020F0502020204030204" pitchFamily="34" charset="0"/>
+                <a:cs typeface="Times New Roman" panose="02020603050405020304" pitchFamily="18" charset="0"/>
+              </a:endParaRPr>
+            </a:p>
+          </p:txBody>
+        </p:sp>
+        <p:grpSp>
+          <p:nvGrpSpPr>
+            <p:cNvPr id="121" name="Group 120">
+              <a:extLst>
+                <a:ext uri="{FF2B5EF4-FFF2-40B4-BE49-F238E27FC236}">
+                  <a16:creationId xmlns:a16="http://schemas.microsoft.com/office/drawing/2014/main" id="{E81BECD4-1A7E-4BF4-BB43-06B52B85B517}"/>
+                </a:ext>
+              </a:extLst>
+            </p:cNvPr>
+            <p:cNvGrpSpPr/>
+            <p:nvPr/>
+          </p:nvGrpSpPr>
+          <p:grpSpPr>
+            <a:xfrm>
+              <a:off x="638175" y="0"/>
+              <a:ext cx="7991475" cy="1181259"/>
+              <a:chOff x="0" y="0"/>
+              <a:chExt cx="7991475" cy="1181259"/>
+            </a:xfrm>
+          </p:grpSpPr>
+          <p:sp>
+            <p:nvSpPr>
+              <p:cNvPr id="122" name="Text Box 1">
+                <a:extLst>
+                  <a:ext uri="{FF2B5EF4-FFF2-40B4-BE49-F238E27FC236}">
+                    <a16:creationId xmlns:a16="http://schemas.microsoft.com/office/drawing/2014/main" id="{2684513D-0F4A-44F2-9486-3EBC8E7EEB61}"/>
+                  </a:ext>
+                </a:extLst>
+              </p:cNvPr>
+              <p:cNvSpPr txBox="1"/>
+              <p:nvPr/>
+            </p:nvSpPr>
+            <p:spPr>
+              <a:xfrm>
+                <a:off x="2752725" y="190500"/>
+                <a:ext cx="2438400" cy="609600"/>
+              </a:xfrm>
+              <a:prstGeom prst="rect">
+                <a:avLst/>
+              </a:prstGeom>
+              <a:solidFill>
+                <a:schemeClr val="lt1"/>
+              </a:solidFill>
+              <a:ln w="12700">
+                <a:solidFill>
+                  <a:schemeClr val="tx1"/>
+                </a:solidFill>
+              </a:ln>
+            </p:spPr>
+            <p:txBody>
+              <a:bodyPr rot="0" spcFirstLastPara="0" vert="horz" wrap="square" lIns="91440" tIns="45720" rIns="91440" bIns="45720" numCol="1" spcCol="0" rtlCol="0" fromWordArt="0" anchor="t" anchorCtr="0" forceAA="0" compatLnSpc="1">
+                <a:prstTxWarp prst="textNoShape">
+                  <a:avLst/>
+                </a:prstTxWarp>
+                <a:noAutofit/>
+              </a:bodyPr>
+              <a:lstStyle/>
+              <a:p>
+                <a:pPr algn="ctr">
+                  <a:lnSpc>
+                    <a:spcPct val="107000"/>
+                  </a:lnSpc>
+                  <a:spcAft>
+                    <a:spcPts val="800"/>
+                  </a:spcAft>
+                </a:pPr>
+                <a:r>
+                  <a:rPr lang="en-US" sz="1100" b="1">
+                    <a:effectLst/>
+                    <a:latin typeface="Calibri" panose="020F0502020204030204" pitchFamily="34" charset="0"/>
+                    <a:ea typeface="Calibri" panose="020F0502020204030204" pitchFamily="34" charset="0"/>
+                    <a:cs typeface="Times New Roman" panose="02020603050405020304" pitchFamily="18" charset="0"/>
+                  </a:rPr>
+                  <a:t>Catch sorted by species. Identification.</a:t>
+                </a:r>
+                <a:endParaRPr lang="nb-NO" sz="1100">
+                  <a:effectLst/>
+                  <a:latin typeface="Calibri" panose="020F0502020204030204" pitchFamily="34" charset="0"/>
+                  <a:ea typeface="Calibri" panose="020F0502020204030204" pitchFamily="34" charset="0"/>
+                  <a:cs typeface="Times New Roman" panose="02020603050405020304" pitchFamily="18" charset="0"/>
+                </a:endParaRPr>
+              </a:p>
+              <a:p>
+                <a:pPr algn="ctr">
+                  <a:lnSpc>
+                    <a:spcPct val="107000"/>
+                  </a:lnSpc>
+                  <a:spcAft>
+                    <a:spcPts val="800"/>
+                  </a:spcAft>
+                </a:pPr>
+                <a:r>
+                  <a:rPr lang="en-US" sz="1100" b="1">
+                    <a:effectLst/>
+                    <a:latin typeface="Calibri" panose="020F0502020204030204" pitchFamily="34" charset="0"/>
+                    <a:ea typeface="Calibri" panose="020F0502020204030204" pitchFamily="34" charset="0"/>
+                    <a:cs typeface="Times New Roman" panose="02020603050405020304" pitchFamily="18" charset="0"/>
+                  </a:rPr>
+                  <a:t>Total catch weight</a:t>
+                </a:r>
+                <a:endParaRPr lang="nb-NO" sz="1100">
+                  <a:effectLst/>
+                  <a:latin typeface="Calibri" panose="020F0502020204030204" pitchFamily="34" charset="0"/>
+                  <a:ea typeface="Calibri" panose="020F0502020204030204" pitchFamily="34" charset="0"/>
+                  <a:cs typeface="Times New Roman" panose="02020603050405020304" pitchFamily="18" charset="0"/>
+                </a:endParaRPr>
+              </a:p>
+              <a:p>
+                <a:pPr>
+                  <a:lnSpc>
+                    <a:spcPct val="107000"/>
+                  </a:lnSpc>
+                  <a:spcAft>
+                    <a:spcPts val="800"/>
+                  </a:spcAft>
+                </a:pPr>
+                <a:r>
+                  <a:rPr lang="en-US" sz="1100">
+                    <a:effectLst/>
+                    <a:latin typeface="Calibri" panose="020F0502020204030204" pitchFamily="34" charset="0"/>
+                    <a:ea typeface="Calibri" panose="020F0502020204030204" pitchFamily="34" charset="0"/>
+                    <a:cs typeface="Times New Roman" panose="02020603050405020304" pitchFamily="18" charset="0"/>
+                  </a:rPr>
+                  <a:t> </a:t>
+                </a:r>
+                <a:endParaRPr lang="nb-NO" sz="1100">
+                  <a:effectLst/>
+                  <a:latin typeface="Calibri" panose="020F0502020204030204" pitchFamily="34" charset="0"/>
+                  <a:ea typeface="Calibri" panose="020F0502020204030204" pitchFamily="34" charset="0"/>
+                  <a:cs typeface="Times New Roman" panose="02020603050405020304" pitchFamily="18" charset="0"/>
+                </a:endParaRPr>
+              </a:p>
+            </p:txBody>
+          </p:sp>
+          <p:sp>
+            <p:nvSpPr>
+              <p:cNvPr id="123" name="Arrow: Bent 122">
+                <a:extLst>
+                  <a:ext uri="{FF2B5EF4-FFF2-40B4-BE49-F238E27FC236}">
+                    <a16:creationId xmlns:a16="http://schemas.microsoft.com/office/drawing/2014/main" id="{F1C34568-58F9-4D4D-B22C-D0406EBBF467}"/>
+                  </a:ext>
+                </a:extLst>
+              </p:cNvPr>
+              <p:cNvSpPr/>
+              <p:nvPr/>
+            </p:nvSpPr>
+            <p:spPr>
+              <a:xfrm rot="5400000">
+                <a:off x="5459730" y="211455"/>
+                <a:ext cx="813435" cy="1126173"/>
+              </a:xfrm>
+              <a:prstGeom prst="bentArrow">
+                <a:avLst/>
+              </a:prstGeom>
+            </p:spPr>
+            <p:style>
+              <a:lnRef idx="2">
+                <a:schemeClr val="accent1">
+                  <a:shade val="50000"/>
+                </a:schemeClr>
+              </a:lnRef>
+              <a:fillRef idx="1">
+                <a:schemeClr val="accent1"/>
+              </a:fillRef>
+              <a:effectRef idx="0">
+                <a:schemeClr val="accent1"/>
+              </a:effectRef>
+              <a:fontRef idx="minor">
+                <a:schemeClr val="lt1"/>
+              </a:fontRef>
+            </p:style>
+            <p:txBody>
+              <a:bodyPr rot="0" spcFirstLastPara="0" vert="horz" wrap="square" lIns="91440" tIns="45720" rIns="91440" bIns="45720" numCol="1" spcCol="0" rtlCol="0" fromWordArt="0" anchor="ctr" anchorCtr="0" forceAA="0" compatLnSpc="1">
+                <a:prstTxWarp prst="textNoShape">
+                  <a:avLst/>
+                </a:prstTxWarp>
+                <a:noAutofit/>
+              </a:bodyPr>
+              <a:lstStyle/>
+              <a:p>
+                <a:endParaRPr lang="nb-NO"/>
+              </a:p>
+            </p:txBody>
+          </p:sp>
+          <p:sp>
+            <p:nvSpPr>
+              <p:cNvPr id="124" name="Arrow: Bent-Up 123">
+                <a:extLst>
+                  <a:ext uri="{FF2B5EF4-FFF2-40B4-BE49-F238E27FC236}">
+                    <a16:creationId xmlns:a16="http://schemas.microsoft.com/office/drawing/2014/main" id="{E1FBA374-D7B9-45CD-8F3D-D2731EC84A3B}"/>
+                  </a:ext>
+                </a:extLst>
+              </p:cNvPr>
+              <p:cNvSpPr/>
+              <p:nvPr/>
+            </p:nvSpPr>
+            <p:spPr>
+              <a:xfrm rot="10800000">
+                <a:off x="1628775" y="333375"/>
+                <a:ext cx="1047750" cy="731520"/>
+              </a:xfrm>
+              <a:prstGeom prst="bentUpArrow">
+                <a:avLst/>
+              </a:prstGeom>
+            </p:spPr>
+            <p:style>
+              <a:lnRef idx="2">
+                <a:schemeClr val="accent1">
+                  <a:shade val="50000"/>
+                </a:schemeClr>
+              </a:lnRef>
+              <a:fillRef idx="1">
+                <a:schemeClr val="accent1"/>
+              </a:fillRef>
+              <a:effectRef idx="0">
+                <a:schemeClr val="accent1"/>
+              </a:effectRef>
+              <a:fontRef idx="minor">
+                <a:schemeClr val="lt1"/>
+              </a:fontRef>
+            </p:style>
+            <p:txBody>
+              <a:bodyPr rot="0" spcFirstLastPara="0" vert="horz" wrap="square" lIns="91440" tIns="45720" rIns="91440" bIns="45720" numCol="1" spcCol="0" rtlCol="0" fromWordArt="0" anchor="ctr" anchorCtr="0" forceAA="0" compatLnSpc="1">
+                <a:prstTxWarp prst="textNoShape">
+                  <a:avLst/>
+                </a:prstTxWarp>
+                <a:noAutofit/>
+              </a:bodyPr>
+              <a:lstStyle/>
+              <a:p>
+                <a:endParaRPr lang="nb-NO"/>
+              </a:p>
+            </p:txBody>
+          </p:sp>
+          <p:sp>
+            <p:nvSpPr>
+              <p:cNvPr id="125" name="Text Box 5">
+                <a:extLst>
+                  <a:ext uri="{FF2B5EF4-FFF2-40B4-BE49-F238E27FC236}">
+                    <a16:creationId xmlns:a16="http://schemas.microsoft.com/office/drawing/2014/main" id="{09F8C3F0-55D1-4036-88C3-85ADDB38CAFE}"/>
+                  </a:ext>
+                </a:extLst>
+              </p:cNvPr>
+              <p:cNvSpPr txBox="1"/>
+              <p:nvPr/>
+            </p:nvSpPr>
+            <p:spPr>
+              <a:xfrm>
+                <a:off x="5381625" y="57150"/>
+                <a:ext cx="695325" cy="238125"/>
+              </a:xfrm>
+              <a:prstGeom prst="rect">
+                <a:avLst/>
+              </a:prstGeom>
+              <a:solidFill>
+                <a:schemeClr val="lt1"/>
+              </a:solidFill>
+              <a:ln w="12700">
+                <a:solidFill>
+                  <a:srgbClr val="FF0000"/>
+                </a:solidFill>
+              </a:ln>
+            </p:spPr>
+            <p:txBody>
+              <a:bodyPr rot="0" spcFirstLastPara="0" vert="horz" wrap="square" lIns="91440" tIns="45720" rIns="91440" bIns="45720" numCol="1" spcCol="0" rtlCol="0" fromWordArt="0" anchor="t" anchorCtr="0" forceAA="0" compatLnSpc="1">
+                <a:prstTxWarp prst="textNoShape">
+                  <a:avLst/>
+                </a:prstTxWarp>
+                <a:noAutofit/>
+              </a:bodyPr>
+              <a:lstStyle/>
+              <a:p>
+                <a:pPr algn="ctr">
+                  <a:lnSpc>
+                    <a:spcPct val="107000"/>
+                  </a:lnSpc>
+                  <a:spcAft>
+                    <a:spcPts val="800"/>
+                  </a:spcAft>
+                </a:pPr>
+                <a:r>
+                  <a:rPr lang="en-US" sz="1100" b="1">
+                    <a:solidFill>
+                      <a:srgbClr val="FF0000"/>
+                    </a:solidFill>
+                    <a:effectLst/>
+                    <a:latin typeface="Calibri" panose="020F0502020204030204" pitchFamily="34" charset="0"/>
+                    <a:ea typeface="Calibri" panose="020F0502020204030204" pitchFamily="34" charset="0"/>
+                    <a:cs typeface="Times New Roman" panose="02020603050405020304" pitchFamily="18" charset="0"/>
+                  </a:rPr>
+                  <a:t>CL &amp; TW</a:t>
+                </a:r>
+                <a:endParaRPr lang="nb-NO" sz="1100">
+                  <a:effectLst/>
+                  <a:latin typeface="Calibri" panose="020F0502020204030204" pitchFamily="34" charset="0"/>
+                  <a:ea typeface="Calibri" panose="020F0502020204030204" pitchFamily="34" charset="0"/>
+                  <a:cs typeface="Times New Roman" panose="02020603050405020304" pitchFamily="18" charset="0"/>
+                </a:endParaRPr>
+              </a:p>
+            </p:txBody>
+          </p:sp>
+          <p:sp>
+            <p:nvSpPr>
+              <p:cNvPr id="126" name="Text Box 8">
+                <a:extLst>
+                  <a:ext uri="{FF2B5EF4-FFF2-40B4-BE49-F238E27FC236}">
+                    <a16:creationId xmlns:a16="http://schemas.microsoft.com/office/drawing/2014/main" id="{769AAB2F-FED7-40CE-82BE-880A9E7F1F3F}"/>
+                  </a:ext>
+                </a:extLst>
+              </p:cNvPr>
+              <p:cNvSpPr txBox="1"/>
+              <p:nvPr/>
+            </p:nvSpPr>
+            <p:spPr>
+              <a:xfrm>
+                <a:off x="6391275" y="352425"/>
+                <a:ext cx="419100" cy="238125"/>
+              </a:xfrm>
+              <a:prstGeom prst="rect">
+                <a:avLst/>
+              </a:prstGeom>
+              <a:solidFill>
+                <a:schemeClr val="lt1"/>
+              </a:solidFill>
+              <a:ln w="12700">
+                <a:solidFill>
+                  <a:srgbClr val="FF0000"/>
+                </a:solidFill>
+              </a:ln>
+            </p:spPr>
+            <p:txBody>
+              <a:bodyPr rot="0" spcFirstLastPara="0" vert="horz" wrap="square" lIns="91440" tIns="45720" rIns="91440" bIns="45720" numCol="1" spcCol="0" rtlCol="0" fromWordArt="0" anchor="t" anchorCtr="0" forceAA="0" compatLnSpc="1">
+                <a:prstTxWarp prst="textNoShape">
+                  <a:avLst/>
+                </a:prstTxWarp>
+                <a:noAutofit/>
+              </a:bodyPr>
+              <a:lstStyle/>
+              <a:p>
+                <a:pPr algn="just">
+                  <a:lnSpc>
+                    <a:spcPct val="107000"/>
+                  </a:lnSpc>
+                  <a:spcAft>
+                    <a:spcPts val="800"/>
+                  </a:spcAft>
+                </a:pPr>
+                <a:r>
+                  <a:rPr lang="en-US" sz="1100" b="1">
+                    <a:solidFill>
+                      <a:srgbClr val="FF0000"/>
+                    </a:solidFill>
+                    <a:effectLst/>
+                    <a:latin typeface="Calibri" panose="020F0502020204030204" pitchFamily="34" charset="0"/>
+                    <a:ea typeface="Calibri" panose="020F0502020204030204" pitchFamily="34" charset="0"/>
+                    <a:cs typeface="Times New Roman" panose="02020603050405020304" pitchFamily="18" charset="0"/>
+                  </a:rPr>
+                  <a:t>100</a:t>
+                </a:r>
+                <a:endParaRPr lang="nb-NO" sz="1100">
+                  <a:effectLst/>
+                  <a:latin typeface="Calibri" panose="020F0502020204030204" pitchFamily="34" charset="0"/>
+                  <a:ea typeface="Calibri" panose="020F0502020204030204" pitchFamily="34" charset="0"/>
+                  <a:cs typeface="Times New Roman" panose="02020603050405020304" pitchFamily="18" charset="0"/>
+                </a:endParaRPr>
+              </a:p>
+            </p:txBody>
+          </p:sp>
+          <p:sp>
+            <p:nvSpPr>
+              <p:cNvPr id="127" name="Text Box 9">
+                <a:extLst>
+                  <a:ext uri="{FF2B5EF4-FFF2-40B4-BE49-F238E27FC236}">
+                    <a16:creationId xmlns:a16="http://schemas.microsoft.com/office/drawing/2014/main" id="{251AB9E8-3076-4739-88B8-188E340C2749}"/>
+                  </a:ext>
+                </a:extLst>
+              </p:cNvPr>
+              <p:cNvSpPr txBox="1"/>
+              <p:nvPr/>
+            </p:nvSpPr>
+            <p:spPr>
+              <a:xfrm>
+                <a:off x="1924050" y="38100"/>
+                <a:ext cx="695325" cy="238125"/>
+              </a:xfrm>
+              <a:prstGeom prst="rect">
+                <a:avLst/>
+              </a:prstGeom>
+              <a:solidFill>
+                <a:schemeClr val="lt1"/>
+              </a:solidFill>
+              <a:ln w="12700">
+                <a:solidFill>
+                  <a:srgbClr val="FF0000"/>
+                </a:solidFill>
+              </a:ln>
+            </p:spPr>
+            <p:txBody>
+              <a:bodyPr rot="0" spcFirstLastPara="0" vert="horz" wrap="square" lIns="91440" tIns="45720" rIns="91440" bIns="45720" numCol="1" spcCol="0" rtlCol="0" fromWordArt="0" anchor="t" anchorCtr="0" forceAA="0" compatLnSpc="1">
+                <a:prstTxWarp prst="textNoShape">
+                  <a:avLst/>
+                </a:prstTxWarp>
+                <a:noAutofit/>
+              </a:bodyPr>
+              <a:lstStyle/>
+              <a:p>
+                <a:pPr algn="ctr">
+                  <a:lnSpc>
+                    <a:spcPct val="107000"/>
+                  </a:lnSpc>
+                  <a:spcAft>
+                    <a:spcPts val="800"/>
+                  </a:spcAft>
+                </a:pPr>
+                <a:r>
+                  <a:rPr lang="en-US" sz="1100" b="1">
+                    <a:solidFill>
+                      <a:srgbClr val="FF0000"/>
+                    </a:solidFill>
+                    <a:effectLst/>
+                    <a:latin typeface="Calibri" panose="020F0502020204030204" pitchFamily="34" charset="0"/>
+                    <a:ea typeface="Calibri" panose="020F0502020204030204" pitchFamily="34" charset="0"/>
+                    <a:cs typeface="Times New Roman" panose="02020603050405020304" pitchFamily="18" charset="0"/>
+                  </a:rPr>
+                  <a:t>TL &amp; TW</a:t>
+                </a:r>
+                <a:endParaRPr lang="nb-NO" sz="1100">
+                  <a:effectLst/>
+                  <a:latin typeface="Calibri" panose="020F0502020204030204" pitchFamily="34" charset="0"/>
+                  <a:ea typeface="Calibri" panose="020F0502020204030204" pitchFamily="34" charset="0"/>
+                  <a:cs typeface="Times New Roman" panose="02020603050405020304" pitchFamily="18" charset="0"/>
+                </a:endParaRPr>
+              </a:p>
+            </p:txBody>
+          </p:sp>
+          <p:sp>
+            <p:nvSpPr>
+              <p:cNvPr id="128" name="Text Box 10">
+                <a:extLst>
+                  <a:ext uri="{FF2B5EF4-FFF2-40B4-BE49-F238E27FC236}">
+                    <a16:creationId xmlns:a16="http://schemas.microsoft.com/office/drawing/2014/main" id="{CF11A649-2EF1-4217-8827-E119D2401B97}"/>
+                  </a:ext>
+                </a:extLst>
+              </p:cNvPr>
+              <p:cNvSpPr txBox="1"/>
+              <p:nvPr/>
+            </p:nvSpPr>
+            <p:spPr>
+              <a:xfrm>
+                <a:off x="1219200" y="323850"/>
+                <a:ext cx="419100" cy="238125"/>
+              </a:xfrm>
+              <a:prstGeom prst="rect">
+                <a:avLst/>
+              </a:prstGeom>
+              <a:solidFill>
+                <a:schemeClr val="lt1"/>
+              </a:solidFill>
+              <a:ln w="12700">
+                <a:solidFill>
+                  <a:srgbClr val="FF0000"/>
+                </a:solidFill>
+              </a:ln>
+            </p:spPr>
+            <p:txBody>
+              <a:bodyPr rot="0" spcFirstLastPara="0" vert="horz" wrap="square" lIns="91440" tIns="45720" rIns="91440" bIns="45720" numCol="1" spcCol="0" rtlCol="0" fromWordArt="0" anchor="t" anchorCtr="0" forceAA="0" compatLnSpc="1">
+                <a:prstTxWarp prst="textNoShape">
+                  <a:avLst/>
+                </a:prstTxWarp>
+                <a:noAutofit/>
+              </a:bodyPr>
+              <a:lstStyle/>
+              <a:p>
+                <a:pPr algn="just">
+                  <a:lnSpc>
+                    <a:spcPct val="107000"/>
+                  </a:lnSpc>
+                  <a:spcAft>
+                    <a:spcPts val="800"/>
+                  </a:spcAft>
+                </a:pPr>
+                <a:r>
+                  <a:rPr lang="en-US" sz="1100" b="1">
+                    <a:solidFill>
+                      <a:srgbClr val="FF0000"/>
+                    </a:solidFill>
+                    <a:effectLst/>
+                    <a:latin typeface="Calibri" panose="020F0502020204030204" pitchFamily="34" charset="0"/>
+                    <a:ea typeface="Calibri" panose="020F0502020204030204" pitchFamily="34" charset="0"/>
+                    <a:cs typeface="Times New Roman" panose="02020603050405020304" pitchFamily="18" charset="0"/>
+                  </a:rPr>
+                  <a:t>100</a:t>
+                </a:r>
+                <a:endParaRPr lang="nb-NO" sz="1100">
+                  <a:effectLst/>
+                  <a:latin typeface="Calibri" panose="020F0502020204030204" pitchFamily="34" charset="0"/>
+                  <a:ea typeface="Calibri" panose="020F0502020204030204" pitchFamily="34" charset="0"/>
+                  <a:cs typeface="Times New Roman" panose="02020603050405020304" pitchFamily="18" charset="0"/>
+                </a:endParaRPr>
+              </a:p>
+            </p:txBody>
+          </p:sp>
+          <p:sp>
+            <p:nvSpPr>
+              <p:cNvPr id="129" name="Text Box 44">
+                <a:extLst>
+                  <a:ext uri="{FF2B5EF4-FFF2-40B4-BE49-F238E27FC236}">
+                    <a16:creationId xmlns:a16="http://schemas.microsoft.com/office/drawing/2014/main" id="{D84C805D-0D80-4630-B1F2-54D93E08B78B}"/>
+                  </a:ext>
+                </a:extLst>
+              </p:cNvPr>
+              <p:cNvSpPr txBox="1"/>
+              <p:nvPr/>
+            </p:nvSpPr>
+            <p:spPr>
+              <a:xfrm>
+                <a:off x="6191250" y="9525"/>
+                <a:ext cx="1800225" cy="285750"/>
+              </a:xfrm>
+              <a:prstGeom prst="rect">
+                <a:avLst/>
+              </a:prstGeom>
+              <a:solidFill>
+                <a:schemeClr val="lt1"/>
+              </a:solidFill>
+              <a:ln w="12700">
+                <a:solidFill>
+                  <a:prstClr val="black"/>
+                </a:solidFill>
+              </a:ln>
+            </p:spPr>
+            <p:txBody>
+              <a:bodyPr rot="0" spcFirstLastPara="0" vert="horz" wrap="square" lIns="91440" tIns="45720" rIns="91440" bIns="45720" numCol="1" spcCol="0" rtlCol="0" fromWordArt="0" anchor="t" anchorCtr="0" forceAA="0" compatLnSpc="1">
+                <a:prstTxWarp prst="textNoShape">
+                  <a:avLst/>
+                </a:prstTxWarp>
+                <a:noAutofit/>
+              </a:bodyPr>
+              <a:lstStyle/>
+              <a:p>
+                <a:pPr algn="ctr">
+                  <a:lnSpc>
+                    <a:spcPct val="107000"/>
+                  </a:lnSpc>
+                  <a:spcAft>
+                    <a:spcPts val="800"/>
+                  </a:spcAft>
+                </a:pPr>
+                <a:r>
+                  <a:rPr lang="en-US" sz="1100" b="1">
+                    <a:effectLst/>
+                    <a:latin typeface="Calibri" panose="020F0502020204030204" pitchFamily="34" charset="0"/>
+                    <a:ea typeface="Calibri" panose="020F0502020204030204" pitchFamily="34" charset="0"/>
+                    <a:cs typeface="Times New Roman" panose="02020603050405020304" pitchFamily="18" charset="0"/>
+                  </a:rPr>
+                  <a:t>ALL THREE (3) SPECIES</a:t>
+                </a:r>
+                <a:endParaRPr lang="nb-NO" sz="1100">
+                  <a:effectLst/>
+                  <a:latin typeface="Calibri" panose="020F0502020204030204" pitchFamily="34" charset="0"/>
+                  <a:ea typeface="Calibri" panose="020F0502020204030204" pitchFamily="34" charset="0"/>
+                  <a:cs typeface="Times New Roman" panose="02020603050405020304" pitchFamily="18" charset="0"/>
+                </a:endParaRPr>
+              </a:p>
+            </p:txBody>
+          </p:sp>
+          <p:sp>
+            <p:nvSpPr>
+              <p:cNvPr id="130" name="Text Box 46">
+                <a:extLst>
+                  <a:ext uri="{FF2B5EF4-FFF2-40B4-BE49-F238E27FC236}">
+                    <a16:creationId xmlns:a16="http://schemas.microsoft.com/office/drawing/2014/main" id="{F56C8239-0A8C-437E-A55D-A36DB3EA15CE}"/>
+                  </a:ext>
+                </a:extLst>
+              </p:cNvPr>
+              <p:cNvSpPr txBox="1"/>
+              <p:nvPr/>
+            </p:nvSpPr>
+            <p:spPr>
+              <a:xfrm>
+                <a:off x="0" y="0"/>
+                <a:ext cx="1800225" cy="285750"/>
+              </a:xfrm>
+              <a:prstGeom prst="rect">
+                <a:avLst/>
+              </a:prstGeom>
+              <a:solidFill>
+                <a:schemeClr val="lt1"/>
+              </a:solidFill>
+              <a:ln w="12700">
+                <a:solidFill>
+                  <a:prstClr val="black"/>
+                </a:solidFill>
+              </a:ln>
+            </p:spPr>
+            <p:txBody>
+              <a:bodyPr rot="0" spcFirstLastPara="0" vert="horz" wrap="square" lIns="91440" tIns="45720" rIns="91440" bIns="45720" numCol="1" spcCol="0" rtlCol="0" fromWordArt="0" anchor="t" anchorCtr="0" forceAA="0" compatLnSpc="1">
+                <a:prstTxWarp prst="textNoShape">
+                  <a:avLst/>
+                </a:prstTxWarp>
+                <a:noAutofit/>
+              </a:bodyPr>
+              <a:lstStyle/>
+              <a:p>
+                <a:pPr algn="ctr">
+                  <a:lnSpc>
+                    <a:spcPct val="107000"/>
+                  </a:lnSpc>
+                  <a:spcAft>
+                    <a:spcPts val="800"/>
+                  </a:spcAft>
+                </a:pPr>
+                <a:r>
+                  <a:rPr lang="en-US" sz="1100" b="1">
+                    <a:effectLst/>
+                    <a:latin typeface="Calibri" panose="020F0502020204030204" pitchFamily="34" charset="0"/>
+                    <a:ea typeface="Calibri" panose="020F0502020204030204" pitchFamily="34" charset="0"/>
+                    <a:cs typeface="Times New Roman" panose="02020603050405020304" pitchFamily="18" charset="0"/>
+                  </a:rPr>
+                  <a:t>ALL FOUR (4) SPECIES</a:t>
+                </a:r>
+                <a:endParaRPr lang="nb-NO" sz="1100">
+                  <a:effectLst/>
+                  <a:latin typeface="Calibri" panose="020F0502020204030204" pitchFamily="34" charset="0"/>
+                  <a:ea typeface="Calibri" panose="020F0502020204030204" pitchFamily="34" charset="0"/>
+                  <a:cs typeface="Times New Roman" panose="02020603050405020304" pitchFamily="18" charset="0"/>
+                </a:endParaRPr>
+              </a:p>
+            </p:txBody>
+          </p:sp>
+        </p:grpSp>
+      </p:grpSp>
+      <p:sp>
+        <p:nvSpPr>
+          <p:cNvPr id="2083" name="Rectangle 184">
             <a:extLst>
               <a:ext uri="{FF2B5EF4-FFF2-40B4-BE49-F238E27FC236}">
-                <a16:creationId xmlns:a16="http://schemas.microsoft.com/office/drawing/2014/main" id="{2F335209-5596-4951-A288-4C665348E47F}"/>
+                <a16:creationId xmlns:a16="http://schemas.microsoft.com/office/drawing/2014/main" id="{BFE1B885-3079-40F2-A2B3-321D3FA18071}"/>
               </a:ext>
             </a:extLst>
           </p:cNvPr>
-          <p:cNvSpPr/>
-          <p:nvPr/>
-        </p:nvSpPr>
-        <p:spPr>
-          <a:xfrm>
-            <a:off x="1629220" y="1801015"/>
-            <a:ext cx="145742" cy="344113"/>
-          </a:xfrm>
-          <a:prstGeom prst="downArrow">
-            <a:avLst/>
-          </a:prstGeom>
-        </p:spPr>
-        <p:style>
-          <a:lnRef idx="2">
-            <a:schemeClr val="accent1">
-              <a:shade val="50000"/>
-            </a:schemeClr>
-          </a:lnRef>
-          <a:fillRef idx="1">
-            <a:schemeClr val="accent1"/>
-          </a:fillRef>
-          <a:effectRef idx="0">
-            <a:schemeClr val="accent1"/>
-          </a:effectRef>
-          <a:fontRef idx="minor">
-            <a:schemeClr val="lt1"/>
-          </a:fontRef>
-        </p:style>
-        <p:txBody>
-          <a:bodyPr rot="0" spcFirstLastPara="0" vert="horz" wrap="square" lIns="58297" tIns="29149" rIns="58297" bIns="29149" numCol="1" spcCol="0" rtlCol="0" fromWordArt="0" anchor="ctr" anchorCtr="0" forceAA="0" compatLnSpc="1">
-            <a:prstTxWarp prst="textNoShape">
-              <a:avLst/>
-            </a:prstTxWarp>
-            <a:noAutofit/>
-          </a:bodyPr>
-          <a:lstStyle/>
-          <a:p>
-            <a:endParaRPr lang="el-GR" sz="1149"/>
-          </a:p>
-        </p:txBody>
-      </p:sp>
-      <p:sp>
-        <p:nvSpPr>
-          <p:cNvPr id="40" name="Text Box 42">
-            <a:extLst>
-              <a:ext uri="{FF2B5EF4-FFF2-40B4-BE49-F238E27FC236}">
-                <a16:creationId xmlns:a16="http://schemas.microsoft.com/office/drawing/2014/main" id="{A0D3FFAB-EF0E-46DB-847D-27BE097E5418}"/>
-              </a:ext>
-            </a:extLst>
-          </p:cNvPr>
-          <p:cNvSpPr txBox="1">
+          <p:cNvSpPr>
             <a:spLocks noChangeArrowheads="1"/>
           </p:cNvSpPr>
           <p:nvPr/>
         </p:nvSpPr>
         <p:spPr bwMode="auto">
           <a:xfrm>
-            <a:off x="861363" y="3227687"/>
-            <a:ext cx="1263097" cy="554628"/>
-          </a:xfrm>
-          <a:prstGeom prst="rect">
-            <a:avLst/>
-          </a:prstGeom>
-          <a:solidFill>
-            <a:srgbClr val="FFFFFF"/>
-          </a:solidFill>
-          <a:ln w="9525">
-            <a:solidFill>
-              <a:srgbClr val="000000"/>
-            </a:solidFill>
-            <a:miter lim="800000"/>
-            <a:headEnd/>
-            <a:tailEnd/>
-          </a:ln>
-        </p:spPr>
-        <p:txBody>
-          <a:bodyPr vert="horz" wrap="square" lIns="58297" tIns="29149" rIns="58297" bIns="29149" numCol="1" anchor="t" anchorCtr="0" compatLnSpc="1">
-            <a:prstTxWarp prst="textNoShape">
-              <a:avLst/>
-            </a:prstTxWarp>
-          </a:bodyPr>
-          <a:lstStyle/>
-          <a:p>
-            <a:pPr algn="ctr" defTabSz="582962" eaLnBrk="0" fontAlgn="base" hangingPunct="0">
-              <a:spcBef>
-                <a:spcPct val="0"/>
-              </a:spcBef>
-              <a:spcAft>
-                <a:spcPct val="0"/>
-              </a:spcAft>
-            </a:pPr>
-            <a:r>
-              <a:rPr lang="en-US" altLang="el-GR" sz="1021">
-                <a:latin typeface="Arial" panose="020B0604020202020204" pitchFamily="34" charset="0"/>
-                <a:ea typeface="Times New Roman" panose="02020603050405020304" pitchFamily="18" charset="0"/>
-                <a:cs typeface="Arial" panose="020B0604020202020204" pitchFamily="34" charset="0"/>
-              </a:rPr>
-              <a:t>Priority species</a:t>
-            </a:r>
-            <a:endParaRPr lang="en-US" altLang="el-GR" sz="382"/>
-          </a:p>
-          <a:p>
-            <a:pPr algn="ctr" defTabSz="582962" eaLnBrk="0" fontAlgn="base" hangingPunct="0">
-              <a:spcBef>
-                <a:spcPct val="0"/>
-              </a:spcBef>
-              <a:spcAft>
-                <a:spcPct val="0"/>
-              </a:spcAft>
-            </a:pPr>
-            <a:r>
-              <a:rPr lang="en-US" altLang="el-GR" sz="766">
-                <a:latin typeface="Arial" panose="020B0604020202020204" pitchFamily="34" charset="0"/>
-                <a:ea typeface="Times New Roman" panose="02020603050405020304" pitchFamily="18" charset="0"/>
-                <a:cs typeface="Arial" panose="020B0604020202020204" pitchFamily="34" charset="0"/>
-              </a:rPr>
-              <a:t>Length/weight 100 ind</a:t>
-            </a:r>
-            <a:endParaRPr lang="en-US" altLang="el-GR" sz="382"/>
-          </a:p>
-          <a:p>
-            <a:pPr algn="ctr" defTabSz="582962" eaLnBrk="0" fontAlgn="base" hangingPunct="0">
-              <a:spcBef>
-                <a:spcPct val="0"/>
-              </a:spcBef>
-              <a:spcAft>
-                <a:spcPct val="0"/>
-              </a:spcAft>
-            </a:pPr>
-            <a:r>
-              <a:rPr lang="en-US" altLang="el-GR" sz="766">
-                <a:latin typeface="Arial" panose="020B0604020202020204" pitchFamily="34" charset="0"/>
-                <a:ea typeface="Times New Roman" panose="02020603050405020304" pitchFamily="18" charset="0"/>
-                <a:cs typeface="Arial" panose="020B0604020202020204" pitchFamily="34" charset="0"/>
-              </a:rPr>
-              <a:t>Sex/maturity 30 ind (see list for biological)</a:t>
-            </a:r>
-            <a:endParaRPr lang="en-US" altLang="el-GR" sz="1149">
-              <a:latin typeface="Arial" panose="020B0604020202020204" pitchFamily="34" charset="0"/>
-            </a:endParaRPr>
-          </a:p>
-        </p:txBody>
-      </p:sp>
-      <p:sp>
-        <p:nvSpPr>
-          <p:cNvPr id="41" name="Arrow: Down 40">
-            <a:extLst>
-              <a:ext uri="{FF2B5EF4-FFF2-40B4-BE49-F238E27FC236}">
-                <a16:creationId xmlns:a16="http://schemas.microsoft.com/office/drawing/2014/main" id="{6FEF930A-635B-4A30-810E-2CE9AC957977}"/>
-              </a:ext>
-            </a:extLst>
-          </p:cNvPr>
-          <p:cNvSpPr/>
-          <p:nvPr/>
-        </p:nvSpPr>
-        <p:spPr>
-          <a:xfrm>
-            <a:off x="2273017" y="2785688"/>
-            <a:ext cx="145740" cy="1156304"/>
-          </a:xfrm>
-          <a:prstGeom prst="downArrow">
-            <a:avLst/>
-          </a:prstGeom>
-        </p:spPr>
-        <p:style>
-          <a:lnRef idx="2">
-            <a:schemeClr val="accent1">
-              <a:shade val="50000"/>
-            </a:schemeClr>
-          </a:lnRef>
-          <a:fillRef idx="1">
-            <a:schemeClr val="accent1"/>
-          </a:fillRef>
-          <a:effectRef idx="0">
-            <a:schemeClr val="accent1"/>
-          </a:effectRef>
-          <a:fontRef idx="minor">
-            <a:schemeClr val="lt1"/>
-          </a:fontRef>
-        </p:style>
-        <p:txBody>
-          <a:bodyPr rot="0" spcFirstLastPara="0" vert="horz" wrap="square" lIns="58297" tIns="29149" rIns="58297" bIns="29149" numCol="1" spcCol="0" rtlCol="0" fromWordArt="0" anchor="ctr" anchorCtr="0" forceAA="0" compatLnSpc="1">
-            <a:prstTxWarp prst="textNoShape">
-              <a:avLst/>
-            </a:prstTxWarp>
-            <a:noAutofit/>
-          </a:bodyPr>
-          <a:lstStyle/>
-          <a:p>
-            <a:endParaRPr lang="el-GR" sz="1149"/>
-          </a:p>
-        </p:txBody>
-      </p:sp>
-      <p:sp>
-        <p:nvSpPr>
-          <p:cNvPr id="42" name="Text Box 1858232833">
-            <a:extLst>
-              <a:ext uri="{FF2B5EF4-FFF2-40B4-BE49-F238E27FC236}">
-                <a16:creationId xmlns:a16="http://schemas.microsoft.com/office/drawing/2014/main" id="{0BC7E624-731E-46EA-9B8F-DB7390D672C0}"/>
-              </a:ext>
-            </a:extLst>
-          </p:cNvPr>
-          <p:cNvSpPr txBox="1">
-            <a:spLocks noChangeArrowheads="1"/>
-          </p:cNvSpPr>
-          <p:nvPr/>
-        </p:nvSpPr>
-        <p:spPr bwMode="auto">
-          <a:xfrm>
-            <a:off x="1891470" y="4087056"/>
-            <a:ext cx="789436" cy="821824"/>
-          </a:xfrm>
-          <a:prstGeom prst="rect">
-            <a:avLst/>
-          </a:prstGeom>
-          <a:solidFill>
-            <a:srgbClr val="FFFFFF"/>
-          </a:solidFill>
-          <a:ln w="9525">
-            <a:solidFill>
-              <a:srgbClr val="000000"/>
-            </a:solidFill>
-            <a:miter lim="800000"/>
-            <a:headEnd/>
-            <a:tailEnd/>
-          </a:ln>
-        </p:spPr>
-        <p:txBody>
-          <a:bodyPr vert="horz" wrap="square" lIns="58297" tIns="29149" rIns="58297" bIns="29149" numCol="1" anchor="t" anchorCtr="0" compatLnSpc="1">
-            <a:prstTxWarp prst="textNoShape">
-              <a:avLst/>
-            </a:prstTxWarp>
-          </a:bodyPr>
-          <a:lstStyle/>
-          <a:p>
-            <a:pPr algn="ctr" defTabSz="582962" eaLnBrk="0" fontAlgn="base" hangingPunct="0">
-              <a:spcBef>
-                <a:spcPct val="0"/>
-              </a:spcBef>
-              <a:spcAft>
-                <a:spcPct val="0"/>
-              </a:spcAft>
-            </a:pPr>
-            <a:r>
-              <a:rPr lang="en-US" altLang="el-GR" sz="1021" dirty="0">
-                <a:latin typeface="Arial" panose="020B0604020202020204" pitchFamily="34" charset="0"/>
-                <a:ea typeface="Times New Roman" panose="02020603050405020304" pitchFamily="18" charset="0"/>
-                <a:cs typeface="Arial" panose="020B0604020202020204" pitchFamily="34" charset="0"/>
-              </a:rPr>
-              <a:t>All non-priority species</a:t>
-            </a:r>
-            <a:endParaRPr lang="en-US" altLang="el-GR" sz="382" dirty="0"/>
-          </a:p>
-          <a:p>
-            <a:pPr algn="ctr" defTabSz="582962" eaLnBrk="0" fontAlgn="base" hangingPunct="0">
-              <a:spcBef>
-                <a:spcPct val="0"/>
-              </a:spcBef>
-              <a:spcAft>
-                <a:spcPct val="0"/>
-              </a:spcAft>
-            </a:pPr>
-            <a:r>
-              <a:rPr lang="en-US" altLang="el-GR" sz="766" dirty="0">
-                <a:latin typeface="Arial" panose="020B0604020202020204" pitchFamily="34" charset="0"/>
-                <a:ea typeface="Times New Roman" panose="02020603050405020304" pitchFamily="18" charset="0"/>
-                <a:cs typeface="Arial" panose="020B0604020202020204" pitchFamily="34" charset="0"/>
-              </a:rPr>
-              <a:t>Length/weight 30 </a:t>
-            </a:r>
-            <a:r>
-              <a:rPr lang="en-US" altLang="el-GR" sz="766" dirty="0" err="1">
-                <a:latin typeface="Arial" panose="020B0604020202020204" pitchFamily="34" charset="0"/>
-                <a:ea typeface="Times New Roman" panose="02020603050405020304" pitchFamily="18" charset="0"/>
-                <a:cs typeface="Arial" panose="020B0604020202020204" pitchFamily="34" charset="0"/>
-              </a:rPr>
-              <a:t>ind</a:t>
-            </a:r>
-            <a:endParaRPr lang="en-US" altLang="el-GR" sz="382" dirty="0"/>
-          </a:p>
-          <a:p>
-            <a:pPr defTabSz="582962" eaLnBrk="0" fontAlgn="base" hangingPunct="0">
-              <a:spcBef>
-                <a:spcPct val="0"/>
-              </a:spcBef>
-              <a:spcAft>
-                <a:spcPct val="0"/>
-              </a:spcAft>
-            </a:pPr>
-            <a:endParaRPr lang="en-US" altLang="el-GR" sz="1149" dirty="0">
-              <a:latin typeface="Arial" panose="020B0604020202020204" pitchFamily="34" charset="0"/>
-            </a:endParaRPr>
-          </a:p>
-        </p:txBody>
-      </p:sp>
-      <p:sp>
-        <p:nvSpPr>
-          <p:cNvPr id="43" name="Arrow: Down 42">
-            <a:extLst>
-              <a:ext uri="{FF2B5EF4-FFF2-40B4-BE49-F238E27FC236}">
-                <a16:creationId xmlns:a16="http://schemas.microsoft.com/office/drawing/2014/main" id="{59035003-3E6E-44D3-97F4-C9C07F07B655}"/>
-              </a:ext>
-            </a:extLst>
-          </p:cNvPr>
-          <p:cNvSpPr/>
-          <p:nvPr/>
-        </p:nvSpPr>
-        <p:spPr>
-          <a:xfrm>
-            <a:off x="1370126" y="2783577"/>
-            <a:ext cx="145742" cy="344113"/>
-          </a:xfrm>
-          <a:prstGeom prst="downArrow">
-            <a:avLst/>
-          </a:prstGeom>
-        </p:spPr>
-        <p:style>
-          <a:lnRef idx="2">
-            <a:schemeClr val="accent1">
-              <a:shade val="50000"/>
-            </a:schemeClr>
-          </a:lnRef>
-          <a:fillRef idx="1">
-            <a:schemeClr val="accent1"/>
-          </a:fillRef>
-          <a:effectRef idx="0">
-            <a:schemeClr val="accent1"/>
-          </a:effectRef>
-          <a:fontRef idx="minor">
-            <a:schemeClr val="lt1"/>
-          </a:fontRef>
-        </p:style>
-        <p:txBody>
-          <a:bodyPr rot="0" spcFirstLastPara="0" vert="horz" wrap="square" lIns="58297" tIns="29149" rIns="58297" bIns="29149" numCol="1" spcCol="0" rtlCol="0" fromWordArt="0" anchor="ctr" anchorCtr="0" forceAA="0" compatLnSpc="1">
-            <a:prstTxWarp prst="textNoShape">
-              <a:avLst/>
-            </a:prstTxWarp>
-            <a:noAutofit/>
-          </a:bodyPr>
-          <a:lstStyle/>
-          <a:p>
-            <a:endParaRPr lang="el-GR" sz="1149"/>
-          </a:p>
-        </p:txBody>
-      </p:sp>
-      <p:sp>
-        <p:nvSpPr>
-          <p:cNvPr id="44" name="Text Box 52">
-            <a:extLst>
-              <a:ext uri="{FF2B5EF4-FFF2-40B4-BE49-F238E27FC236}">
-                <a16:creationId xmlns:a16="http://schemas.microsoft.com/office/drawing/2014/main" id="{A9613BC9-12BC-4754-8F62-2FA9E5617AE1}"/>
-              </a:ext>
-            </a:extLst>
-          </p:cNvPr>
-          <p:cNvSpPr txBox="1">
-            <a:spLocks noChangeArrowheads="1"/>
-          </p:cNvSpPr>
-          <p:nvPr/>
-        </p:nvSpPr>
-        <p:spPr bwMode="auto">
-          <a:xfrm>
-            <a:off x="1070554" y="5014817"/>
-            <a:ext cx="1263097" cy="348161"/>
-          </a:xfrm>
-          <a:prstGeom prst="rect">
-            <a:avLst/>
-          </a:prstGeom>
-          <a:solidFill>
-            <a:srgbClr val="FFFFFF"/>
-          </a:solidFill>
-          <a:ln w="9525">
-            <a:solidFill>
-              <a:srgbClr val="000000"/>
-            </a:solidFill>
-            <a:miter lim="800000"/>
-            <a:headEnd/>
-            <a:tailEnd/>
-          </a:ln>
-        </p:spPr>
-        <p:txBody>
-          <a:bodyPr vert="horz" wrap="square" lIns="58297" tIns="29149" rIns="58297" bIns="29149" numCol="1" anchor="t" anchorCtr="0" compatLnSpc="1">
-            <a:prstTxWarp prst="textNoShape">
-              <a:avLst/>
-            </a:prstTxWarp>
-          </a:bodyPr>
-          <a:lstStyle/>
-          <a:p>
-            <a:pPr algn="ctr" defTabSz="582962" eaLnBrk="0" fontAlgn="base" hangingPunct="0">
-              <a:spcBef>
-                <a:spcPct val="0"/>
-              </a:spcBef>
-              <a:spcAft>
-                <a:spcPct val="0"/>
-              </a:spcAft>
-            </a:pPr>
-            <a:r>
-              <a:rPr lang="en-US" altLang="el-GR" sz="1021">
-                <a:latin typeface="Arial" panose="020B0604020202020204" pitchFamily="34" charset="0"/>
-                <a:ea typeface="Times New Roman" panose="02020603050405020304" pitchFamily="18" charset="0"/>
-                <a:cs typeface="Arial" panose="020B0604020202020204" pitchFamily="34" charset="0"/>
-              </a:rPr>
-              <a:t>Genetics*</a:t>
-            </a:r>
-            <a:endParaRPr lang="en-US" altLang="el-GR" sz="382"/>
-          </a:p>
-          <a:p>
-            <a:pPr algn="ctr" defTabSz="582962" eaLnBrk="0" fontAlgn="base" hangingPunct="0">
-              <a:spcBef>
-                <a:spcPct val="0"/>
-              </a:spcBef>
-              <a:spcAft>
-                <a:spcPct val="0"/>
-              </a:spcAft>
-            </a:pPr>
-            <a:r>
-              <a:rPr lang="en-US" altLang="el-GR" sz="766">
-                <a:latin typeface="Arial" panose="020B0604020202020204" pitchFamily="34" charset="0"/>
-                <a:ea typeface="Times New Roman" panose="02020603050405020304" pitchFamily="18" charset="0"/>
-                <a:cs typeface="Arial" panose="020B0604020202020204" pitchFamily="34" charset="0"/>
-              </a:rPr>
-              <a:t>Pectoral finclip 50 ind total</a:t>
-            </a:r>
-            <a:endParaRPr lang="en-US" altLang="el-GR" sz="1149">
-              <a:latin typeface="Arial" panose="020B0604020202020204" pitchFamily="34" charset="0"/>
-            </a:endParaRPr>
-          </a:p>
-        </p:txBody>
-      </p:sp>
-      <p:sp>
-        <p:nvSpPr>
-          <p:cNvPr id="45" name="Arrow: Down 44">
-            <a:extLst>
-              <a:ext uri="{FF2B5EF4-FFF2-40B4-BE49-F238E27FC236}">
-                <a16:creationId xmlns:a16="http://schemas.microsoft.com/office/drawing/2014/main" id="{7D602642-8E83-4C5F-856B-ADB31BA3C44F}"/>
-              </a:ext>
-            </a:extLst>
-          </p:cNvPr>
-          <p:cNvSpPr/>
-          <p:nvPr/>
-        </p:nvSpPr>
-        <p:spPr>
-          <a:xfrm>
-            <a:off x="1448560" y="5415437"/>
-            <a:ext cx="145742" cy="344113"/>
-          </a:xfrm>
-          <a:prstGeom prst="downArrow">
-            <a:avLst/>
-          </a:prstGeom>
-        </p:spPr>
-        <p:style>
-          <a:lnRef idx="2">
-            <a:schemeClr val="accent1">
-              <a:shade val="50000"/>
-            </a:schemeClr>
-          </a:lnRef>
-          <a:fillRef idx="1">
-            <a:schemeClr val="accent1"/>
-          </a:fillRef>
-          <a:effectRef idx="0">
-            <a:schemeClr val="accent1"/>
-          </a:effectRef>
-          <a:fontRef idx="minor">
-            <a:schemeClr val="lt1"/>
-          </a:fontRef>
-        </p:style>
-        <p:txBody>
-          <a:bodyPr rot="0" spcFirstLastPara="0" vert="horz" wrap="square" lIns="58297" tIns="29149" rIns="58297" bIns="29149" numCol="1" spcCol="0" rtlCol="0" fromWordArt="0" anchor="ctr" anchorCtr="0" forceAA="0" compatLnSpc="1">
-            <a:prstTxWarp prst="textNoShape">
-              <a:avLst/>
-            </a:prstTxWarp>
-            <a:noAutofit/>
-          </a:bodyPr>
-          <a:lstStyle/>
-          <a:p>
-            <a:endParaRPr lang="el-GR" sz="1149"/>
-          </a:p>
-        </p:txBody>
-      </p:sp>
-      <p:sp>
-        <p:nvSpPr>
-          <p:cNvPr id="46" name="Text Box 50">
-            <a:extLst>
-              <a:ext uri="{FF2B5EF4-FFF2-40B4-BE49-F238E27FC236}">
-                <a16:creationId xmlns:a16="http://schemas.microsoft.com/office/drawing/2014/main" id="{7FF76FBF-06D1-490C-9E66-FBA6E85FE34F}"/>
-              </a:ext>
-            </a:extLst>
-          </p:cNvPr>
-          <p:cNvSpPr txBox="1">
-            <a:spLocks noChangeArrowheads="1"/>
-          </p:cNvSpPr>
-          <p:nvPr/>
-        </p:nvSpPr>
-        <p:spPr bwMode="auto">
-          <a:xfrm>
-            <a:off x="861360" y="5898212"/>
-            <a:ext cx="2242807" cy="364355"/>
-          </a:xfrm>
-          <a:prstGeom prst="rect">
-            <a:avLst/>
-          </a:prstGeom>
-          <a:solidFill>
-            <a:srgbClr val="FFFFFF"/>
-          </a:solidFill>
-          <a:ln w="9525">
-            <a:solidFill>
-              <a:srgbClr val="000000"/>
-            </a:solidFill>
-            <a:miter lim="800000"/>
-            <a:headEnd/>
-            <a:tailEnd/>
-          </a:ln>
-        </p:spPr>
-        <p:txBody>
-          <a:bodyPr vert="horz" wrap="square" lIns="58297" tIns="29149" rIns="58297" bIns="29149" numCol="1" anchor="t" anchorCtr="0" compatLnSpc="1">
-            <a:prstTxWarp prst="textNoShape">
-              <a:avLst/>
-            </a:prstTxWarp>
-          </a:bodyPr>
-          <a:lstStyle/>
-          <a:p>
-            <a:pPr algn="ctr" defTabSz="582962" eaLnBrk="0" fontAlgn="base" hangingPunct="0">
-              <a:spcBef>
-                <a:spcPct val="0"/>
-              </a:spcBef>
-              <a:spcAft>
-                <a:spcPct val="0"/>
-              </a:spcAft>
-            </a:pPr>
-            <a:r>
-              <a:rPr lang="en-US" altLang="el-GR" sz="1021">
-                <a:latin typeface="Arial" panose="020B0604020202020204" pitchFamily="34" charset="0"/>
-                <a:ea typeface="Times New Roman" panose="02020603050405020304" pitchFamily="18" charset="0"/>
-                <a:cs typeface="Arial" panose="020B0604020202020204" pitchFamily="34" charset="0"/>
-              </a:rPr>
-              <a:t>Food safety^</a:t>
-            </a:r>
-            <a:endParaRPr lang="en-US" altLang="el-GR" sz="382"/>
-          </a:p>
-          <a:p>
-            <a:pPr algn="ctr" defTabSz="582962" eaLnBrk="0" fontAlgn="base" hangingPunct="0">
-              <a:spcBef>
-                <a:spcPct val="0"/>
-              </a:spcBef>
-              <a:spcAft>
-                <a:spcPct val="0"/>
-              </a:spcAft>
-            </a:pPr>
-            <a:r>
-              <a:rPr lang="en-US" altLang="el-GR" sz="766">
-                <a:latin typeface="Arial" panose="020B0604020202020204" pitchFamily="34" charset="0"/>
-                <a:ea typeface="Times New Roman" panose="02020603050405020304" pitchFamily="18" charset="0"/>
-                <a:cs typeface="Arial" panose="020B0604020202020204" pitchFamily="34" charset="0"/>
-              </a:rPr>
-              <a:t>25 ind per station/3 stations total</a:t>
-            </a:r>
-            <a:endParaRPr lang="en-US" altLang="el-GR" sz="1149">
-              <a:latin typeface="Arial" panose="020B0604020202020204" pitchFamily="34" charset="0"/>
-            </a:endParaRPr>
-          </a:p>
-        </p:txBody>
-      </p:sp>
-      <p:sp>
-        <p:nvSpPr>
-          <p:cNvPr id="47" name="Arrow: Down 46">
-            <a:extLst>
-              <a:ext uri="{FF2B5EF4-FFF2-40B4-BE49-F238E27FC236}">
-                <a16:creationId xmlns:a16="http://schemas.microsoft.com/office/drawing/2014/main" id="{F13C4F14-3673-4D5F-9A67-43C018DC3593}"/>
-              </a:ext>
-            </a:extLst>
-          </p:cNvPr>
-          <p:cNvSpPr/>
-          <p:nvPr/>
-        </p:nvSpPr>
-        <p:spPr>
-          <a:xfrm>
-            <a:off x="1428051" y="3882312"/>
-            <a:ext cx="143794" cy="1037363"/>
-          </a:xfrm>
-          <a:prstGeom prst="downArrow">
-            <a:avLst/>
-          </a:prstGeom>
-        </p:spPr>
-        <p:style>
-          <a:lnRef idx="2">
-            <a:schemeClr val="accent1">
-              <a:shade val="50000"/>
-            </a:schemeClr>
-          </a:lnRef>
-          <a:fillRef idx="1">
-            <a:schemeClr val="accent1"/>
-          </a:fillRef>
-          <a:effectRef idx="0">
-            <a:schemeClr val="accent1"/>
-          </a:effectRef>
-          <a:fontRef idx="minor">
-            <a:schemeClr val="lt1"/>
-          </a:fontRef>
-        </p:style>
-        <p:txBody>
-          <a:bodyPr rot="0" spcFirstLastPara="0" vert="horz" wrap="square" lIns="58297" tIns="29149" rIns="58297" bIns="29149" numCol="1" spcCol="0" rtlCol="0" fromWordArt="0" anchor="ctr" anchorCtr="0" forceAA="0" compatLnSpc="1">
-            <a:prstTxWarp prst="textNoShape">
-              <a:avLst/>
-            </a:prstTxWarp>
-            <a:noAutofit/>
-          </a:bodyPr>
-          <a:lstStyle/>
-          <a:p>
-            <a:endParaRPr lang="el-GR" sz="1149"/>
-          </a:p>
-        </p:txBody>
-      </p:sp>
-      <p:sp>
-        <p:nvSpPr>
-          <p:cNvPr id="48" name="Arrow: Down 47">
-            <a:extLst>
-              <a:ext uri="{FF2B5EF4-FFF2-40B4-BE49-F238E27FC236}">
-                <a16:creationId xmlns:a16="http://schemas.microsoft.com/office/drawing/2014/main" id="{218C5C63-013F-4FC5-BA69-484AC37CB8B3}"/>
-              </a:ext>
-            </a:extLst>
-          </p:cNvPr>
-          <p:cNvSpPr/>
-          <p:nvPr/>
-        </p:nvSpPr>
-        <p:spPr>
-          <a:xfrm>
-            <a:off x="909741" y="3879922"/>
-            <a:ext cx="160803" cy="1879630"/>
-          </a:xfrm>
-          <a:prstGeom prst="downArrow">
-            <a:avLst/>
-          </a:prstGeom>
-        </p:spPr>
-        <p:style>
-          <a:lnRef idx="2">
-            <a:schemeClr val="accent1">
-              <a:shade val="50000"/>
-            </a:schemeClr>
-          </a:lnRef>
-          <a:fillRef idx="1">
-            <a:schemeClr val="accent1"/>
-          </a:fillRef>
-          <a:effectRef idx="0">
-            <a:schemeClr val="accent1"/>
-          </a:effectRef>
-          <a:fontRef idx="minor">
-            <a:schemeClr val="lt1"/>
-          </a:fontRef>
-        </p:style>
-        <p:txBody>
-          <a:bodyPr rot="0" spcFirstLastPara="0" vert="horz" wrap="square" lIns="58297" tIns="29149" rIns="58297" bIns="29149" numCol="1" spcCol="0" rtlCol="0" fromWordArt="0" anchor="ctr" anchorCtr="0" forceAA="0" compatLnSpc="1">
-            <a:prstTxWarp prst="textNoShape">
-              <a:avLst/>
-            </a:prstTxWarp>
-            <a:noAutofit/>
-          </a:bodyPr>
-          <a:lstStyle/>
-          <a:p>
-            <a:endParaRPr lang="el-GR" sz="1149"/>
-          </a:p>
-        </p:txBody>
-      </p:sp>
-      <p:sp>
-        <p:nvSpPr>
-          <p:cNvPr id="49" name="Arrow: Down 48">
-            <a:extLst>
-              <a:ext uri="{FF2B5EF4-FFF2-40B4-BE49-F238E27FC236}">
-                <a16:creationId xmlns:a16="http://schemas.microsoft.com/office/drawing/2014/main" id="{8AE2C506-6616-4B54-A889-B59303EB6698}"/>
-              </a:ext>
-            </a:extLst>
-          </p:cNvPr>
-          <p:cNvSpPr/>
-          <p:nvPr/>
-        </p:nvSpPr>
-        <p:spPr>
-          <a:xfrm>
-            <a:off x="3803207" y="1802026"/>
-            <a:ext cx="145742" cy="344113"/>
-          </a:xfrm>
-          <a:prstGeom prst="downArrow">
-            <a:avLst/>
-          </a:prstGeom>
-        </p:spPr>
-        <p:style>
-          <a:lnRef idx="2">
-            <a:schemeClr val="accent1">
-              <a:shade val="50000"/>
-            </a:schemeClr>
-          </a:lnRef>
-          <a:fillRef idx="1">
-            <a:schemeClr val="accent1"/>
-          </a:fillRef>
-          <a:effectRef idx="0">
-            <a:schemeClr val="accent1"/>
-          </a:effectRef>
-          <a:fontRef idx="minor">
-            <a:schemeClr val="lt1"/>
-          </a:fontRef>
-        </p:style>
-        <p:txBody>
-          <a:bodyPr rot="0" spcFirstLastPara="0" vert="horz" wrap="square" lIns="58297" tIns="29149" rIns="58297" bIns="29149" numCol="1" spcCol="0" rtlCol="0" fromWordArt="0" anchor="ctr" anchorCtr="0" forceAA="0" compatLnSpc="1">
-            <a:prstTxWarp prst="textNoShape">
-              <a:avLst/>
-            </a:prstTxWarp>
-            <a:noAutofit/>
-          </a:bodyPr>
-          <a:lstStyle/>
-          <a:p>
-            <a:endParaRPr lang="el-GR" sz="1149"/>
-          </a:p>
-        </p:txBody>
-      </p:sp>
-      <p:sp>
-        <p:nvSpPr>
-          <p:cNvPr id="50" name="Text Box 9">
-            <a:extLst>
-              <a:ext uri="{FF2B5EF4-FFF2-40B4-BE49-F238E27FC236}">
-                <a16:creationId xmlns:a16="http://schemas.microsoft.com/office/drawing/2014/main" id="{75DB6D38-EABB-4331-B903-D1BEB1C1CEE7}"/>
-              </a:ext>
-            </a:extLst>
-          </p:cNvPr>
-          <p:cNvSpPr txBox="1">
-            <a:spLocks noChangeArrowheads="1"/>
-          </p:cNvSpPr>
-          <p:nvPr/>
-        </p:nvSpPr>
-        <p:spPr bwMode="auto">
-          <a:xfrm>
-            <a:off x="861360" y="6328516"/>
-            <a:ext cx="3889626" cy="1992595"/>
-          </a:xfrm>
-          <a:prstGeom prst="rect">
-            <a:avLst/>
-          </a:prstGeom>
-          <a:solidFill>
-            <a:srgbClr val="FFFFFF"/>
-          </a:solidFill>
-          <a:ln w="6350">
-            <a:solidFill>
-              <a:srgbClr val="000000"/>
-            </a:solidFill>
-            <a:miter lim="800000"/>
-            <a:headEnd/>
-            <a:tailEnd/>
-          </a:ln>
-        </p:spPr>
-        <p:txBody>
-          <a:bodyPr vert="horz" wrap="square" lIns="58297" tIns="29149" rIns="58297" bIns="29149" numCol="1" anchor="t" anchorCtr="0" compatLnSpc="1">
-            <a:prstTxWarp prst="textNoShape">
-              <a:avLst/>
-            </a:prstTxWarp>
-          </a:bodyPr>
-          <a:lstStyle/>
-          <a:p>
-            <a:pPr defTabSz="582962" eaLnBrk="0" fontAlgn="base" hangingPunct="0">
-              <a:spcBef>
-                <a:spcPct val="0"/>
-              </a:spcBef>
-              <a:spcAft>
-                <a:spcPct val="0"/>
-              </a:spcAft>
-            </a:pPr>
-            <a:r>
-              <a:rPr lang="en-GB" altLang="el-GR" sz="1021">
-                <a:latin typeface="Arial" panose="020B0604020202020204" pitchFamily="34" charset="0"/>
-                <a:ea typeface="Times New Roman" panose="02020603050405020304" pitchFamily="18" charset="0"/>
-                <a:cs typeface="Arial" panose="020B0604020202020204" pitchFamily="34" charset="0"/>
-              </a:rPr>
-              <a:t>Biological</a:t>
-            </a:r>
-            <a:endParaRPr lang="en-GB" altLang="el-GR" sz="382"/>
-          </a:p>
-          <a:p>
-            <a:pPr defTabSz="582962" eaLnBrk="0" fontAlgn="base" hangingPunct="0">
-              <a:spcBef>
-                <a:spcPct val="0"/>
-              </a:spcBef>
-              <a:spcAft>
-                <a:spcPct val="0"/>
-              </a:spcAft>
-            </a:pPr>
-            <a:endParaRPr lang="en-GB" altLang="el-GR" sz="1149">
-              <a:latin typeface="Arial" panose="020B0604020202020204" pitchFamily="34" charset="0"/>
-            </a:endParaRPr>
-          </a:p>
-        </p:txBody>
-      </p:sp>
-      <p:sp>
-        <p:nvSpPr>
-          <p:cNvPr id="52" name="Text Box 47">
-            <a:extLst>
-              <a:ext uri="{FF2B5EF4-FFF2-40B4-BE49-F238E27FC236}">
-                <a16:creationId xmlns:a16="http://schemas.microsoft.com/office/drawing/2014/main" id="{478216B5-3849-4ACE-9AAF-3F8AD595008E}"/>
-              </a:ext>
-            </a:extLst>
-          </p:cNvPr>
-          <p:cNvSpPr txBox="1">
-            <a:spLocks noChangeArrowheads="1"/>
-          </p:cNvSpPr>
-          <p:nvPr/>
-        </p:nvSpPr>
-        <p:spPr bwMode="auto">
-          <a:xfrm>
-            <a:off x="3270147" y="2282793"/>
-            <a:ext cx="1169984" cy="465565"/>
-          </a:xfrm>
-          <a:prstGeom prst="rect">
-            <a:avLst/>
-          </a:prstGeom>
-          <a:solidFill>
-            <a:srgbClr val="FFFFFF"/>
-          </a:solidFill>
-          <a:ln w="9525">
-            <a:solidFill>
-              <a:srgbClr val="000000"/>
-            </a:solidFill>
-            <a:miter lim="800000"/>
-            <a:headEnd/>
-            <a:tailEnd/>
-          </a:ln>
-        </p:spPr>
-        <p:txBody>
-          <a:bodyPr vert="horz" wrap="square" lIns="58297" tIns="29149" rIns="58297" bIns="29149" numCol="1" anchor="t" anchorCtr="0" compatLnSpc="1">
-            <a:prstTxWarp prst="textNoShape">
-              <a:avLst/>
-            </a:prstTxWarp>
-          </a:bodyPr>
-          <a:lstStyle/>
-          <a:p>
-            <a:pPr algn="ctr" defTabSz="582962" eaLnBrk="0" fontAlgn="base" hangingPunct="0">
-              <a:spcBef>
-                <a:spcPct val="0"/>
-              </a:spcBef>
-              <a:spcAft>
-                <a:spcPct val="0"/>
-              </a:spcAft>
-            </a:pPr>
-            <a:r>
-              <a:rPr lang="en-US" altLang="el-GR" sz="1021" dirty="0">
-                <a:latin typeface="Arial" panose="020B0604020202020204" pitchFamily="34" charset="0"/>
-                <a:ea typeface="Times New Roman" panose="02020603050405020304" pitchFamily="18" charset="0"/>
-                <a:cs typeface="Arial" panose="020B0604020202020204" pitchFamily="34" charset="0"/>
-              </a:rPr>
-              <a:t>Vulnerable species</a:t>
-            </a:r>
-            <a:endParaRPr lang="en-US" altLang="el-GR" sz="382" dirty="0"/>
-          </a:p>
-          <a:p>
-            <a:pPr algn="ctr" defTabSz="582962" eaLnBrk="0" fontAlgn="base" hangingPunct="0">
-              <a:spcBef>
-                <a:spcPct val="0"/>
-              </a:spcBef>
-              <a:spcAft>
-                <a:spcPct val="0"/>
-              </a:spcAft>
-            </a:pPr>
-            <a:r>
-              <a:rPr lang="en-US" altLang="el-GR" sz="766" dirty="0">
-                <a:latin typeface="Arial" panose="020B0604020202020204" pitchFamily="34" charset="0"/>
-                <a:ea typeface="Times New Roman" panose="02020603050405020304" pitchFamily="18" charset="0"/>
-                <a:cs typeface="Arial" panose="020B0604020202020204" pitchFamily="34" charset="0"/>
-              </a:rPr>
-              <a:t>Measure/photo/release</a:t>
-            </a:r>
-            <a:endParaRPr lang="en-US" altLang="el-GR" sz="382" dirty="0"/>
-          </a:p>
-          <a:p>
-            <a:pPr defTabSz="582962" eaLnBrk="0" fontAlgn="base" hangingPunct="0">
-              <a:spcBef>
-                <a:spcPct val="0"/>
-              </a:spcBef>
-              <a:spcAft>
-                <a:spcPct val="0"/>
-              </a:spcAft>
-            </a:pPr>
-            <a:endParaRPr lang="en-US" altLang="el-GR" sz="1149" dirty="0">
-              <a:latin typeface="Arial" panose="020B0604020202020204" pitchFamily="34" charset="0"/>
-            </a:endParaRPr>
-          </a:p>
-        </p:txBody>
-      </p:sp>
-      <p:sp>
-        <p:nvSpPr>
-          <p:cNvPr id="54" name="Rectangle 60">
-            <a:extLst>
-              <a:ext uri="{FF2B5EF4-FFF2-40B4-BE49-F238E27FC236}">
-                <a16:creationId xmlns:a16="http://schemas.microsoft.com/office/drawing/2014/main" id="{1E1530DB-6EE2-4F96-AB4E-395BCF046DAD}"/>
-              </a:ext>
-            </a:extLst>
-          </p:cNvPr>
-          <p:cNvSpPr>
-            <a:spLocks noChangeArrowheads="1"/>
-          </p:cNvSpPr>
-          <p:nvPr/>
-        </p:nvSpPr>
-        <p:spPr bwMode="auto">
-          <a:xfrm>
-            <a:off x="857937" y="678683"/>
-            <a:ext cx="1759657" cy="628126"/>
+            <a:off x="0" y="0"/>
+            <a:ext cx="12192000" cy="457200"/>
           </a:xfrm>
           <a:prstGeom prst="rect">
             <a:avLst/>
@@ -4227,7 +5742,7 @@
           </a:extLst>
         </p:spPr>
         <p:txBody>
-          <a:bodyPr vert="horz" wrap="none" lIns="58297" tIns="29149" rIns="58297" bIns="29149" numCol="1" anchor="ctr" anchorCtr="0" compatLnSpc="1">
+          <a:bodyPr vert="horz" wrap="none" lIns="91440" tIns="45720" rIns="91440" bIns="45720" numCol="1" anchor="ctr" anchorCtr="0" compatLnSpc="1">
             <a:prstTxWarp prst="textNoShape">
               <a:avLst/>
             </a:prstTxWarp>
@@ -4235,716 +5750,54 @@
           </a:bodyPr>
           <a:lstStyle/>
           <a:p>
-            <a:pPr defTabSz="582962" eaLnBrk="0" fontAlgn="base" hangingPunct="0">
-              <a:spcBef>
-                <a:spcPct val="0"/>
-              </a:spcBef>
-              <a:spcAft>
-                <a:spcPct val="0"/>
-              </a:spcAft>
-            </a:pPr>
-            <a:endParaRPr lang="en-GB" altLang="el-GR" sz="1275" dirty="0">
-              <a:latin typeface="Calibri Light" panose="020F0302020204030204" pitchFamily="34" charset="0"/>
-              <a:ea typeface="Times New Roman" panose="02020603050405020304" pitchFamily="18" charset="0"/>
-              <a:cs typeface="Calibri Light" panose="020F0302020204030204" pitchFamily="34" charset="0"/>
-            </a:endParaRPr>
-          </a:p>
-          <a:p>
-            <a:pPr defTabSz="582962" eaLnBrk="0" fontAlgn="base" hangingPunct="0">
-              <a:spcBef>
-                <a:spcPct val="0"/>
-              </a:spcBef>
-              <a:spcAft>
-                <a:spcPct val="0"/>
-              </a:spcAft>
-            </a:pPr>
-            <a:r>
-              <a:rPr lang="en-GB" altLang="el-GR" sz="1275" dirty="0">
-                <a:latin typeface="Calibri Light" panose="020F0302020204030204" pitchFamily="34" charset="0"/>
-                <a:ea typeface="Times New Roman" panose="02020603050405020304" pitchFamily="18" charset="0"/>
-                <a:cs typeface="Calibri Light" panose="020F0302020204030204" pitchFamily="34" charset="0"/>
-              </a:rPr>
-              <a:t>Catch sampling workflow</a:t>
-            </a:r>
-            <a:endParaRPr lang="el-GR" altLang="el-GR" sz="382" dirty="0"/>
-          </a:p>
-          <a:p>
-            <a:pPr defTabSz="582962" eaLnBrk="0" fontAlgn="base" hangingPunct="0">
-              <a:spcBef>
-                <a:spcPct val="0"/>
-              </a:spcBef>
-              <a:spcAft>
-                <a:spcPct val="0"/>
-              </a:spcAft>
-            </a:pPr>
-            <a:endParaRPr lang="el-GR" altLang="el-GR" sz="1149" dirty="0">
-              <a:latin typeface="Arial" panose="020B0604020202020204" pitchFamily="34" charset="0"/>
-            </a:endParaRPr>
-          </a:p>
-        </p:txBody>
-      </p:sp>
-      <p:graphicFrame>
-        <p:nvGraphicFramePr>
-          <p:cNvPr id="60" name="Table 59">
+            <a:endParaRPr lang="nb-NO"/>
+          </a:p>
+        </p:txBody>
+      </p:sp>
+      <p:sp>
+        <p:nvSpPr>
+          <p:cNvPr id="2085" name="TextBox 2084">
             <a:extLst>
               <a:ext uri="{FF2B5EF4-FFF2-40B4-BE49-F238E27FC236}">
-                <a16:creationId xmlns:a16="http://schemas.microsoft.com/office/drawing/2014/main" id="{5D7C8488-5F2D-48A8-8470-FE12C90C0C61}"/>
+                <a16:creationId xmlns:a16="http://schemas.microsoft.com/office/drawing/2014/main" id="{995E24DB-DDE6-48C2-9FEC-3743407E02E8}"/>
               </a:ext>
             </a:extLst>
           </p:cNvPr>
-          <p:cNvGraphicFramePr>
-            <a:graphicFrameLocks noGrp="1"/>
-          </p:cNvGraphicFramePr>
-          <p:nvPr>
-            <p:extLst>
-              <p:ext uri="{D42A27DB-BD31-4B8C-83A1-F6EECF244321}">
-                <p14:modId xmlns:p14="http://schemas.microsoft.com/office/powerpoint/2010/main" val="1996018323"/>
-              </p:ext>
-            </p:extLst>
-          </p:nvPr>
-        </p:nvGraphicFramePr>
-        <p:xfrm>
-          <a:off x="909739" y="6595464"/>
-          <a:ext cx="3530388" cy="1404482"/>
-        </p:xfrm>
-        <a:graphic>
-          <a:graphicData uri="http://schemas.openxmlformats.org/drawingml/2006/table">
-            <a:tbl>
-              <a:tblPr firstRow="1" firstCol="1" bandRow="1">
-                <a:tableStyleId>{5C22544A-7EE6-4342-B048-85BDC9FD1C3A}</a:tableStyleId>
-              </a:tblPr>
-              <a:tblGrid>
-                <a:gridCol w="1765194">
-                  <a:extLst>
-                    <a:ext uri="{9D8B030D-6E8A-4147-A177-3AD203B41FA5}">
-                      <a16:colId xmlns:a16="http://schemas.microsoft.com/office/drawing/2014/main" val="2569081813"/>
-                    </a:ext>
-                  </a:extLst>
-                </a:gridCol>
-                <a:gridCol w="1765194">
-                  <a:extLst>
-                    <a:ext uri="{9D8B030D-6E8A-4147-A177-3AD203B41FA5}">
-                      <a16:colId xmlns:a16="http://schemas.microsoft.com/office/drawing/2014/main" val="1448597730"/>
-                    </a:ext>
-                  </a:extLst>
-                </a:gridCol>
-              </a:tblGrid>
-              <a:tr h="141014">
-                <a:tc>
-                  <a:txBody>
-                    <a:bodyPr/>
-                    <a:lstStyle/>
-                    <a:p>
-                      <a:pPr fontAlgn="base"/>
-                      <a:r>
-                        <a:rPr lang="fr-FR" sz="900" b="0" i="1" dirty="0" err="1">
-                          <a:solidFill>
-                            <a:sysClr val="windowText" lastClr="000000"/>
-                          </a:solidFill>
-                          <a:effectLst/>
-                        </a:rPr>
-                        <a:t>Merluccius</a:t>
-                      </a:r>
-                      <a:r>
-                        <a:rPr lang="fr-FR" sz="900" b="0" i="1" dirty="0">
-                          <a:solidFill>
-                            <a:sysClr val="windowText" lastClr="000000"/>
-                          </a:solidFill>
-                          <a:effectLst/>
-                        </a:rPr>
-                        <a:t> </a:t>
-                      </a:r>
-                      <a:r>
-                        <a:rPr lang="fr-FR" sz="900" b="0" i="1" dirty="0" err="1">
-                          <a:solidFill>
-                            <a:sysClr val="windowText" lastClr="000000"/>
-                          </a:solidFill>
-                          <a:effectLst/>
-                        </a:rPr>
-                        <a:t>merluccius</a:t>
-                      </a:r>
-                      <a:r>
-                        <a:rPr lang="en-GB" sz="900" b="0" i="1" dirty="0">
-                          <a:solidFill>
-                            <a:sysClr val="windowText" lastClr="000000"/>
-                          </a:solidFill>
-                          <a:effectLst/>
-                        </a:rPr>
-                        <a:t> </a:t>
-                      </a:r>
-                      <a:endParaRPr lang="el-GR" sz="900" b="0" i="1" dirty="0">
-                        <a:solidFill>
-                          <a:sysClr val="windowText" lastClr="000000"/>
-                        </a:solidFill>
-                        <a:effectLst/>
-                        <a:latin typeface="Arial" panose="020B0604020202020204" pitchFamily="34" charset="0"/>
-                        <a:ea typeface="Times New Roman" panose="02020603050405020304" pitchFamily="18" charset="0"/>
-                        <a:cs typeface="Times New Roman" panose="02020603050405020304" pitchFamily="18" charset="0"/>
-                      </a:endParaRPr>
-                    </a:p>
-                  </a:txBody>
-                  <a:tcPr marL="0" marR="0" marT="0" marB="0">
-                    <a:noFill/>
-                  </a:tcPr>
-                </a:tc>
-                <a:tc>
-                  <a:txBody>
-                    <a:bodyPr/>
-                    <a:lstStyle/>
-                    <a:p>
-                      <a:pPr fontAlgn="base"/>
-                      <a:endParaRPr lang="el-GR" sz="900" b="0" i="1" dirty="0">
-                        <a:solidFill>
-                          <a:sysClr val="windowText" lastClr="000000"/>
-                        </a:solidFill>
-                        <a:effectLst/>
-                        <a:latin typeface="Arial" panose="020B0604020202020204" pitchFamily="34" charset="0"/>
-                        <a:ea typeface="Times New Roman" panose="02020603050405020304" pitchFamily="18" charset="0"/>
-                        <a:cs typeface="Times New Roman" panose="02020603050405020304" pitchFamily="18" charset="0"/>
-                      </a:endParaRPr>
-                    </a:p>
-                  </a:txBody>
-                  <a:tcPr marL="0" marR="0" marT="0" marB="0">
-                    <a:noFill/>
-                  </a:tcPr>
-                </a:tc>
-                <a:extLst>
-                  <a:ext uri="{0D108BD9-81ED-4DB2-BD59-A6C34878D82A}">
-                    <a16:rowId xmlns:a16="http://schemas.microsoft.com/office/drawing/2014/main" val="1495035689"/>
-                  </a:ext>
-                </a:extLst>
-              </a:tr>
-              <a:tr h="141014">
-                <a:tc>
-                  <a:txBody>
-                    <a:bodyPr/>
-                    <a:lstStyle/>
-                    <a:p>
-                      <a:pPr fontAlgn="base"/>
-                      <a:r>
-                        <a:rPr lang="fr-FR" sz="900" b="0" i="1" dirty="0" err="1">
-                          <a:solidFill>
-                            <a:sysClr val="windowText" lastClr="000000"/>
-                          </a:solidFill>
-                          <a:effectLst/>
-                        </a:rPr>
-                        <a:t>Merluccius</a:t>
-                      </a:r>
-                      <a:r>
-                        <a:rPr lang="fr-FR" sz="900" b="0" i="1" dirty="0">
-                          <a:solidFill>
-                            <a:sysClr val="windowText" lastClr="000000"/>
-                          </a:solidFill>
-                          <a:effectLst/>
-                        </a:rPr>
-                        <a:t> </a:t>
-                      </a:r>
-                      <a:r>
-                        <a:rPr lang="fr-FR" sz="900" b="0" i="1" dirty="0" err="1">
-                          <a:solidFill>
-                            <a:sysClr val="windowText" lastClr="000000"/>
-                          </a:solidFill>
-                          <a:effectLst/>
-                        </a:rPr>
-                        <a:t>polli</a:t>
-                      </a:r>
-                      <a:endParaRPr lang="el-GR" sz="900" b="0" i="1" dirty="0">
-                        <a:solidFill>
-                          <a:sysClr val="windowText" lastClr="000000"/>
-                        </a:solidFill>
-                        <a:effectLst/>
-                        <a:latin typeface="Arial" panose="020B0604020202020204" pitchFamily="34" charset="0"/>
-                        <a:ea typeface="Times New Roman" panose="02020603050405020304" pitchFamily="18" charset="0"/>
-                        <a:cs typeface="Times New Roman" panose="02020603050405020304" pitchFamily="18" charset="0"/>
-                      </a:endParaRPr>
-                    </a:p>
-                  </a:txBody>
-                  <a:tcPr marL="0" marR="0" marT="0" marB="0">
-                    <a:noFill/>
-                  </a:tcPr>
-                </a:tc>
-                <a:tc>
-                  <a:txBody>
-                    <a:bodyPr/>
-                    <a:lstStyle/>
-                    <a:p>
-                      <a:pPr fontAlgn="base"/>
-                      <a:endParaRPr lang="el-GR" sz="900" b="0" i="1" dirty="0">
-                        <a:solidFill>
-                          <a:sysClr val="windowText" lastClr="000000"/>
-                        </a:solidFill>
-                        <a:effectLst/>
-                        <a:latin typeface="Arial" panose="020B0604020202020204" pitchFamily="34" charset="0"/>
-                        <a:ea typeface="Times New Roman" panose="02020603050405020304" pitchFamily="18" charset="0"/>
-                        <a:cs typeface="Times New Roman" panose="02020603050405020304" pitchFamily="18" charset="0"/>
-                      </a:endParaRPr>
-                    </a:p>
-                  </a:txBody>
-                  <a:tcPr marL="0" marR="0" marT="0" marB="0">
-                    <a:noFill/>
-                  </a:tcPr>
-                </a:tc>
-                <a:extLst>
-                  <a:ext uri="{0D108BD9-81ED-4DB2-BD59-A6C34878D82A}">
-                    <a16:rowId xmlns:a16="http://schemas.microsoft.com/office/drawing/2014/main" val="2383215193"/>
-                  </a:ext>
-                </a:extLst>
-              </a:tr>
-              <a:tr h="141014">
-                <a:tc>
-                  <a:txBody>
-                    <a:bodyPr/>
-                    <a:lstStyle/>
-                    <a:p>
-                      <a:pPr fontAlgn="base"/>
-                      <a:r>
-                        <a:rPr lang="fr-FR" sz="900" b="0" i="1" dirty="0" err="1">
-                          <a:solidFill>
-                            <a:sysClr val="windowText" lastClr="000000"/>
-                          </a:solidFill>
-                          <a:effectLst/>
-                        </a:rPr>
-                        <a:t>Merluccius</a:t>
-                      </a:r>
-                      <a:r>
-                        <a:rPr lang="fr-FR" sz="900" b="0" i="1" dirty="0">
-                          <a:solidFill>
-                            <a:sysClr val="windowText" lastClr="000000"/>
-                          </a:solidFill>
-                          <a:effectLst/>
-                        </a:rPr>
-                        <a:t> senegalensis</a:t>
-                      </a:r>
-                      <a:endParaRPr lang="el-GR" sz="900" b="0" i="1" dirty="0">
-                        <a:solidFill>
-                          <a:sysClr val="windowText" lastClr="000000"/>
-                        </a:solidFill>
-                        <a:effectLst/>
-                        <a:latin typeface="Arial" panose="020B0604020202020204" pitchFamily="34" charset="0"/>
-                        <a:ea typeface="Times New Roman" panose="02020603050405020304" pitchFamily="18" charset="0"/>
-                        <a:cs typeface="Times New Roman" panose="02020603050405020304" pitchFamily="18" charset="0"/>
-                      </a:endParaRPr>
-                    </a:p>
-                  </a:txBody>
-                  <a:tcPr marL="0" marR="0" marT="0" marB="0">
-                    <a:noFill/>
-                  </a:tcPr>
-                </a:tc>
-                <a:tc>
-                  <a:txBody>
-                    <a:bodyPr/>
-                    <a:lstStyle/>
-                    <a:p>
-                      <a:pPr fontAlgn="base"/>
-                      <a:endParaRPr lang="el-GR" sz="900" b="0" i="1">
-                        <a:solidFill>
-                          <a:sysClr val="windowText" lastClr="000000"/>
-                        </a:solidFill>
-                        <a:effectLst/>
-                        <a:latin typeface="Arial" panose="020B0604020202020204" pitchFamily="34" charset="0"/>
-                        <a:ea typeface="Times New Roman" panose="02020603050405020304" pitchFamily="18" charset="0"/>
-                        <a:cs typeface="Times New Roman" panose="02020603050405020304" pitchFamily="18" charset="0"/>
-                      </a:endParaRPr>
-                    </a:p>
-                  </a:txBody>
-                  <a:tcPr marL="0" marR="0" marT="0" marB="0">
-                    <a:noFill/>
-                  </a:tcPr>
-                </a:tc>
-                <a:extLst>
-                  <a:ext uri="{0D108BD9-81ED-4DB2-BD59-A6C34878D82A}">
-                    <a16:rowId xmlns:a16="http://schemas.microsoft.com/office/drawing/2014/main" val="877575621"/>
-                  </a:ext>
-                </a:extLst>
-              </a:tr>
-              <a:tr h="141014">
-                <a:tc>
-                  <a:txBody>
-                    <a:bodyPr/>
-                    <a:lstStyle/>
-                    <a:p>
-                      <a:pPr fontAlgn="base"/>
-                      <a:r>
-                        <a:rPr lang="fr-FR" sz="900" b="0" i="1" dirty="0" err="1">
-                          <a:solidFill>
-                            <a:sysClr val="windowText" lastClr="000000"/>
-                          </a:solidFill>
-                          <a:effectLst/>
-                        </a:rPr>
-                        <a:t>Pagellus</a:t>
-                      </a:r>
-                      <a:r>
-                        <a:rPr lang="fr-FR" sz="900" b="0" i="1" dirty="0">
-                          <a:solidFill>
-                            <a:sysClr val="windowText" lastClr="000000"/>
-                          </a:solidFill>
-                          <a:effectLst/>
-                        </a:rPr>
-                        <a:t> </a:t>
-                      </a:r>
-                      <a:r>
-                        <a:rPr lang="fr-FR" sz="900" b="0" i="1" dirty="0" err="1">
-                          <a:solidFill>
-                            <a:sysClr val="windowText" lastClr="000000"/>
-                          </a:solidFill>
-                          <a:effectLst/>
-                        </a:rPr>
-                        <a:t>bellotti</a:t>
-                      </a:r>
-                      <a:r>
-                        <a:rPr lang="en-GB" sz="900" b="0" i="1" dirty="0">
-                          <a:solidFill>
-                            <a:sysClr val="windowText" lastClr="000000"/>
-                          </a:solidFill>
-                          <a:effectLst/>
-                        </a:rPr>
-                        <a:t> </a:t>
-                      </a:r>
-                      <a:endParaRPr lang="el-GR" sz="900" b="0" i="1" dirty="0">
-                        <a:solidFill>
-                          <a:sysClr val="windowText" lastClr="000000"/>
-                        </a:solidFill>
-                        <a:effectLst/>
-                        <a:latin typeface="Arial" panose="020B0604020202020204" pitchFamily="34" charset="0"/>
-                        <a:ea typeface="Times New Roman" panose="02020603050405020304" pitchFamily="18" charset="0"/>
-                        <a:cs typeface="Times New Roman" panose="02020603050405020304" pitchFamily="18" charset="0"/>
-                      </a:endParaRPr>
-                    </a:p>
-                  </a:txBody>
-                  <a:tcPr marL="0" marR="0" marT="0" marB="0">
-                    <a:noFill/>
-                  </a:tcPr>
-                </a:tc>
-                <a:tc>
-                  <a:txBody>
-                    <a:bodyPr/>
-                    <a:lstStyle/>
-                    <a:p>
-                      <a:pPr fontAlgn="base"/>
-                      <a:endParaRPr lang="el-GR" sz="900" b="0" i="1">
-                        <a:solidFill>
-                          <a:sysClr val="windowText" lastClr="000000"/>
-                        </a:solidFill>
-                        <a:effectLst/>
-                        <a:latin typeface="Arial" panose="020B0604020202020204" pitchFamily="34" charset="0"/>
-                        <a:ea typeface="Times New Roman" panose="02020603050405020304" pitchFamily="18" charset="0"/>
-                        <a:cs typeface="Times New Roman" panose="02020603050405020304" pitchFamily="18" charset="0"/>
-                      </a:endParaRPr>
-                    </a:p>
-                  </a:txBody>
-                  <a:tcPr marL="0" marR="0" marT="0" marB="0">
-                    <a:noFill/>
-                  </a:tcPr>
-                </a:tc>
-                <a:extLst>
-                  <a:ext uri="{0D108BD9-81ED-4DB2-BD59-A6C34878D82A}">
-                    <a16:rowId xmlns:a16="http://schemas.microsoft.com/office/drawing/2014/main" val="4223723628"/>
-                  </a:ext>
-                </a:extLst>
-              </a:tr>
-              <a:tr h="141014">
-                <a:tc>
-                  <a:txBody>
-                    <a:bodyPr/>
-                    <a:lstStyle/>
-                    <a:p>
-                      <a:pPr fontAlgn="base"/>
-                      <a:r>
-                        <a:rPr lang="fr-FR" sz="900" b="0" i="1" dirty="0" err="1">
-                          <a:solidFill>
-                            <a:sysClr val="windowText" lastClr="000000"/>
-                          </a:solidFill>
-                          <a:effectLst/>
-                        </a:rPr>
-                        <a:t>Pagellus</a:t>
-                      </a:r>
-                      <a:r>
-                        <a:rPr lang="fr-FR" sz="900" b="0" i="1" dirty="0">
-                          <a:solidFill>
-                            <a:sysClr val="windowText" lastClr="000000"/>
-                          </a:solidFill>
-                          <a:effectLst/>
-                        </a:rPr>
-                        <a:t> acarne</a:t>
-                      </a:r>
-                      <a:endParaRPr lang="el-GR" sz="900" b="0" i="1" dirty="0">
-                        <a:solidFill>
-                          <a:sysClr val="windowText" lastClr="000000"/>
-                        </a:solidFill>
-                        <a:effectLst/>
-                        <a:latin typeface="Arial" panose="020B0604020202020204" pitchFamily="34" charset="0"/>
-                        <a:ea typeface="Times New Roman" panose="02020603050405020304" pitchFamily="18" charset="0"/>
-                        <a:cs typeface="Times New Roman" panose="02020603050405020304" pitchFamily="18" charset="0"/>
-                      </a:endParaRPr>
-                    </a:p>
-                  </a:txBody>
-                  <a:tcPr marL="0" marR="0" marT="0" marB="0">
-                    <a:noFill/>
-                  </a:tcPr>
-                </a:tc>
-                <a:tc>
-                  <a:txBody>
-                    <a:bodyPr/>
-                    <a:lstStyle/>
-                    <a:p>
-                      <a:pPr fontAlgn="base"/>
-                      <a:endParaRPr lang="el-GR" sz="900" b="0" i="1">
-                        <a:solidFill>
-                          <a:sysClr val="windowText" lastClr="000000"/>
-                        </a:solidFill>
-                        <a:effectLst/>
-                        <a:latin typeface="Arial" panose="020B0604020202020204" pitchFamily="34" charset="0"/>
-                        <a:ea typeface="Times New Roman" panose="02020603050405020304" pitchFamily="18" charset="0"/>
-                        <a:cs typeface="Times New Roman" panose="02020603050405020304" pitchFamily="18" charset="0"/>
-                      </a:endParaRPr>
-                    </a:p>
-                  </a:txBody>
-                  <a:tcPr marL="0" marR="0" marT="0" marB="0">
-                    <a:noFill/>
-                  </a:tcPr>
-                </a:tc>
-                <a:extLst>
-                  <a:ext uri="{0D108BD9-81ED-4DB2-BD59-A6C34878D82A}">
-                    <a16:rowId xmlns:a16="http://schemas.microsoft.com/office/drawing/2014/main" val="3380674350"/>
-                  </a:ext>
-                </a:extLst>
-              </a:tr>
-              <a:tr h="141014">
-                <a:tc>
-                  <a:txBody>
-                    <a:bodyPr/>
-                    <a:lstStyle/>
-                    <a:p>
-                      <a:pPr fontAlgn="base"/>
-                      <a:r>
-                        <a:rPr lang="fr-FR" sz="900" b="0" i="1" dirty="0">
-                          <a:solidFill>
-                            <a:sysClr val="windowText" lastClr="000000"/>
-                          </a:solidFill>
-                          <a:effectLst/>
-                        </a:rPr>
-                        <a:t>Dentex </a:t>
-                      </a:r>
-                      <a:r>
-                        <a:rPr lang="fr-FR" sz="900" b="0" i="1" dirty="0" err="1">
-                          <a:solidFill>
-                            <a:sysClr val="windowText" lastClr="000000"/>
-                          </a:solidFill>
-                          <a:effectLst/>
-                        </a:rPr>
-                        <a:t>macrocephalus</a:t>
-                      </a:r>
-                      <a:endParaRPr lang="el-GR" sz="900" b="0" i="1" dirty="0">
-                        <a:solidFill>
-                          <a:sysClr val="windowText" lastClr="000000"/>
-                        </a:solidFill>
-                        <a:effectLst/>
-                        <a:latin typeface="Arial" panose="020B0604020202020204" pitchFamily="34" charset="0"/>
-                        <a:ea typeface="Times New Roman" panose="02020603050405020304" pitchFamily="18" charset="0"/>
-                        <a:cs typeface="Times New Roman" panose="02020603050405020304" pitchFamily="18" charset="0"/>
-                      </a:endParaRPr>
-                    </a:p>
-                  </a:txBody>
-                  <a:tcPr marL="0" marR="0" marT="0" marB="0">
-                    <a:noFill/>
-                  </a:tcPr>
-                </a:tc>
-                <a:tc>
-                  <a:txBody>
-                    <a:bodyPr/>
-                    <a:lstStyle/>
-                    <a:p>
-                      <a:pPr fontAlgn="base"/>
-                      <a:endParaRPr lang="el-GR" sz="900" b="0" i="1">
-                        <a:solidFill>
-                          <a:sysClr val="windowText" lastClr="000000"/>
-                        </a:solidFill>
-                        <a:effectLst/>
-                        <a:latin typeface="Arial" panose="020B0604020202020204" pitchFamily="34" charset="0"/>
-                        <a:ea typeface="Times New Roman" panose="02020603050405020304" pitchFamily="18" charset="0"/>
-                        <a:cs typeface="Times New Roman" panose="02020603050405020304" pitchFamily="18" charset="0"/>
-                      </a:endParaRPr>
-                    </a:p>
-                  </a:txBody>
-                  <a:tcPr marL="0" marR="0" marT="0" marB="0">
-                    <a:noFill/>
-                  </a:tcPr>
-                </a:tc>
-                <a:extLst>
-                  <a:ext uri="{0D108BD9-81ED-4DB2-BD59-A6C34878D82A}">
-                    <a16:rowId xmlns:a16="http://schemas.microsoft.com/office/drawing/2014/main" val="4117983769"/>
-                  </a:ext>
-                </a:extLst>
-              </a:tr>
-              <a:tr h="276370">
-                <a:tc>
-                  <a:txBody>
-                    <a:bodyPr/>
-                    <a:lstStyle/>
-                    <a:p>
-                      <a:pPr fontAlgn="base"/>
-                      <a:r>
-                        <a:rPr lang="it-IT" sz="900" b="0" i="1" dirty="0">
-                          <a:solidFill>
-                            <a:sysClr val="windowText" lastClr="000000"/>
-                          </a:solidFill>
-                          <a:effectLst/>
-                        </a:rPr>
-                        <a:t>Parapeneaus longirostris (sex only) Aristeus varidens (sex only) </a:t>
-                      </a:r>
-                      <a:endParaRPr lang="el-GR" sz="900" b="0" i="1" dirty="0">
-                        <a:solidFill>
-                          <a:sysClr val="windowText" lastClr="000000"/>
-                        </a:solidFill>
-                        <a:effectLst/>
-                        <a:latin typeface="Arial" panose="020B0604020202020204" pitchFamily="34" charset="0"/>
-                        <a:ea typeface="Times New Roman" panose="02020603050405020304" pitchFamily="18" charset="0"/>
-                        <a:cs typeface="Times New Roman" panose="02020603050405020304" pitchFamily="18" charset="0"/>
-                      </a:endParaRPr>
-                    </a:p>
-                  </a:txBody>
-                  <a:tcPr marL="0" marR="0" marT="0" marB="0">
-                    <a:noFill/>
-                  </a:tcPr>
-                </a:tc>
-                <a:tc>
-                  <a:txBody>
-                    <a:bodyPr/>
-                    <a:lstStyle/>
-                    <a:p>
-                      <a:pPr fontAlgn="base"/>
-                      <a:endParaRPr lang="el-GR" sz="900" b="0" i="1">
-                        <a:solidFill>
-                          <a:sysClr val="windowText" lastClr="000000"/>
-                        </a:solidFill>
-                        <a:effectLst/>
-                        <a:latin typeface="Arial" panose="020B0604020202020204" pitchFamily="34" charset="0"/>
-                        <a:ea typeface="Times New Roman" panose="02020603050405020304" pitchFamily="18" charset="0"/>
-                        <a:cs typeface="Times New Roman" panose="02020603050405020304" pitchFamily="18" charset="0"/>
-                      </a:endParaRPr>
-                    </a:p>
-                  </a:txBody>
-                  <a:tcPr marL="0" marR="0" marT="0" marB="0">
-                    <a:noFill/>
-                  </a:tcPr>
-                </a:tc>
-                <a:extLst>
-                  <a:ext uri="{0D108BD9-81ED-4DB2-BD59-A6C34878D82A}">
-                    <a16:rowId xmlns:a16="http://schemas.microsoft.com/office/drawing/2014/main" val="775684897"/>
-                  </a:ext>
-                </a:extLst>
-              </a:tr>
-              <a:tr h="141014">
-                <a:tc>
-                  <a:txBody>
-                    <a:bodyPr/>
-                    <a:lstStyle/>
-                    <a:p>
-                      <a:pPr fontAlgn="base"/>
-                      <a:r>
-                        <a:rPr lang="it-IT" sz="900" b="0" i="1" dirty="0">
-                          <a:solidFill>
-                            <a:sysClr val="windowText" lastClr="000000"/>
-                          </a:solidFill>
-                          <a:effectLst/>
-                        </a:rPr>
-                        <a:t>+ opther priority species</a:t>
-                      </a:r>
-                      <a:endParaRPr lang="el-GR" sz="900" b="0" i="1" dirty="0">
-                        <a:solidFill>
-                          <a:sysClr val="windowText" lastClr="000000"/>
-                        </a:solidFill>
-                        <a:effectLst/>
-                        <a:latin typeface="Arial" panose="020B0604020202020204" pitchFamily="34" charset="0"/>
-                        <a:ea typeface="Times New Roman" panose="02020603050405020304" pitchFamily="18" charset="0"/>
-                        <a:cs typeface="Times New Roman" panose="02020603050405020304" pitchFamily="18" charset="0"/>
-                      </a:endParaRPr>
-                    </a:p>
-                  </a:txBody>
-                  <a:tcPr marL="0" marR="0" marT="0" marB="0">
-                    <a:noFill/>
-                  </a:tcPr>
-                </a:tc>
-                <a:tc>
-                  <a:txBody>
-                    <a:bodyPr/>
-                    <a:lstStyle/>
-                    <a:p>
-                      <a:pPr fontAlgn="base"/>
-                      <a:endParaRPr lang="el-GR" sz="900" b="0" i="1" dirty="0">
-                        <a:solidFill>
-                          <a:sysClr val="windowText" lastClr="000000"/>
-                        </a:solidFill>
-                        <a:effectLst/>
-                        <a:latin typeface="Arial" panose="020B0604020202020204" pitchFamily="34" charset="0"/>
-                        <a:ea typeface="Times New Roman" panose="02020603050405020304" pitchFamily="18" charset="0"/>
-                        <a:cs typeface="Times New Roman" panose="02020603050405020304" pitchFamily="18" charset="0"/>
-                      </a:endParaRPr>
-                    </a:p>
-                  </a:txBody>
-                  <a:tcPr marL="0" marR="0" marT="0" marB="0">
-                    <a:noFill/>
-                  </a:tcPr>
-                </a:tc>
-                <a:extLst>
-                  <a:ext uri="{0D108BD9-81ED-4DB2-BD59-A6C34878D82A}">
-                    <a16:rowId xmlns:a16="http://schemas.microsoft.com/office/drawing/2014/main" val="1535176768"/>
-                  </a:ext>
-                </a:extLst>
-              </a:tr>
-              <a:tr h="141014">
-                <a:tc>
-                  <a:txBody>
-                    <a:bodyPr/>
-                    <a:lstStyle/>
-                    <a:p>
-                      <a:endParaRPr lang="el-GR" sz="900" i="1" dirty="0">
-                        <a:solidFill>
-                          <a:sysClr val="windowText" lastClr="000000"/>
-                        </a:solidFill>
-                        <a:effectLst/>
-                        <a:latin typeface="Calibri" panose="020F0502020204030204" pitchFamily="34" charset="0"/>
-                        <a:cs typeface="Times New Roman" panose="02020603050405020304" pitchFamily="18" charset="0"/>
-                      </a:endParaRPr>
-                    </a:p>
-                  </a:txBody>
-                  <a:tcPr marL="0" marR="0" marT="0" marB="0">
-                    <a:noFill/>
-                  </a:tcPr>
-                </a:tc>
-                <a:tc>
-                  <a:txBody>
-                    <a:bodyPr/>
-                    <a:lstStyle/>
-                    <a:p>
-                      <a:endParaRPr lang="el-GR" sz="900" i="1" dirty="0">
-                        <a:solidFill>
-                          <a:sysClr val="windowText" lastClr="000000"/>
-                        </a:solidFill>
-                        <a:effectLst/>
-                        <a:latin typeface="Calibri" panose="020F0502020204030204" pitchFamily="34" charset="0"/>
-                        <a:cs typeface="Times New Roman" panose="02020603050405020304" pitchFamily="18" charset="0"/>
-                      </a:endParaRPr>
-                    </a:p>
-                  </a:txBody>
-                  <a:tcPr marL="0" marR="0" marT="0" marB="0">
-                    <a:noFill/>
-                  </a:tcPr>
-                </a:tc>
-                <a:extLst>
-                  <a:ext uri="{0D108BD9-81ED-4DB2-BD59-A6C34878D82A}">
-                    <a16:rowId xmlns:a16="http://schemas.microsoft.com/office/drawing/2014/main" val="1782622642"/>
-                  </a:ext>
-                </a:extLst>
-              </a:tr>
-            </a:tbl>
-          </a:graphicData>
-        </a:graphic>
-      </p:graphicFrame>
+          <p:cNvSpPr txBox="1"/>
+          <p:nvPr/>
+        </p:nvSpPr>
+        <p:spPr>
+          <a:xfrm>
+            <a:off x="1689904" y="694481"/>
+            <a:ext cx="8380071" cy="369332"/>
+          </a:xfrm>
+          <a:prstGeom prst="rect">
+            <a:avLst/>
+          </a:prstGeom>
+          <a:noFill/>
+        </p:spPr>
+        <p:txBody>
+          <a:bodyPr wrap="square" rtlCol="0">
+            <a:spAutoFit/>
+          </a:bodyPr>
+          <a:lstStyle/>
+          <a:p>
+            <a:r>
+              <a:rPr lang="nb-NO" dirty="0"/>
+              <a:t>Catch sampling </a:t>
+            </a:r>
+            <a:r>
+              <a:rPr lang="nb-NO" dirty="0" err="1"/>
+              <a:t>workflow</a:t>
+            </a:r>
+            <a:endParaRPr lang="nb-NO" dirty="0"/>
+          </a:p>
+        </p:txBody>
+      </p:sp>
     </p:spTree>
     <p:extLst>
       <p:ext uri="{BB962C8B-B14F-4D97-AF65-F5344CB8AC3E}">
-        <p14:creationId xmlns:p14="http://schemas.microsoft.com/office/powerpoint/2010/main" val="2872363821"/>
+        <p14:creationId xmlns:p14="http://schemas.microsoft.com/office/powerpoint/2010/main" val="1491856495"/>
       </p:ext>
     </p:extLst>
   </p:cSld>
@@ -5213,254 +6066,4 @@
     </a:ext>
   </a:extLst>
 </a:theme>
-</file>
-
-<file path=customXml/item1.xml><?xml version="1.0" encoding="utf-8"?>
-<ct:contentTypeSchema xmlns:ct="http://schemas.microsoft.com/office/2006/metadata/contentType" xmlns:ma="http://schemas.microsoft.com/office/2006/metadata/properties/metaAttributes" ct:_="" ma:_="" ma:contentTypeName="Document" ma:contentTypeID="0x010100B79A833CF10F444BBAB252802BF889FD" ma:contentTypeVersion="13" ma:contentTypeDescription="Create a new document." ma:contentTypeScope="" ma:versionID="64f677fd2253f5247049a9cf21871e2a">
-  <xsd:schema xmlns:xsd="http://www.w3.org/2001/XMLSchema" xmlns:xs="http://www.w3.org/2001/XMLSchema" xmlns:p="http://schemas.microsoft.com/office/2006/metadata/properties" xmlns:ns2="c01e712b-8f9b-4625-8219-31b20605feb3" xmlns:ns3="2b166a80-dccc-42cc-be33-87bca7e0d87c" targetNamespace="http://schemas.microsoft.com/office/2006/metadata/properties" ma:root="true" ma:fieldsID="2fddc4c226a27c0868f3cab2348c32e7" ns2:_="" ns3:_="">
-    <xsd:import namespace="c01e712b-8f9b-4625-8219-31b20605feb3"/>
-    <xsd:import namespace="2b166a80-dccc-42cc-be33-87bca7e0d87c"/>
-    <xsd:element name="properties">
-      <xsd:complexType>
-        <xsd:sequence>
-          <xsd:element name="documentManagement">
-            <xsd:complexType>
-              <xsd:all>
-                <xsd:element ref="ns2:MediaServiceMetadata" minOccurs="0"/>
-                <xsd:element ref="ns2:MediaServiceFastMetadata" minOccurs="0"/>
-                <xsd:element ref="ns2:MediaServiceAutoKeyPoints" minOccurs="0"/>
-                <xsd:element ref="ns2:MediaServiceKeyPoints" minOccurs="0"/>
-                <xsd:element ref="ns2:MediaServiceDateTaken" minOccurs="0"/>
-                <xsd:element ref="ns2:MediaLengthInSeconds" minOccurs="0"/>
-                <xsd:element ref="ns2:MediaServiceAutoTags" minOccurs="0"/>
-                <xsd:element ref="ns2:MediaServiceOCR" minOccurs="0"/>
-                <xsd:element ref="ns2:MediaServiceGenerationTime" minOccurs="0"/>
-                <xsd:element ref="ns2:MediaServiceEventHashCode" minOccurs="0"/>
-                <xsd:element ref="ns2:MediaServiceLocation" minOccurs="0"/>
-                <xsd:element ref="ns3:SharedWithUsers" minOccurs="0"/>
-                <xsd:element ref="ns3:SharedWithDetails" minOccurs="0"/>
-              </xsd:all>
-            </xsd:complexType>
-          </xsd:element>
-        </xsd:sequence>
-      </xsd:complexType>
-    </xsd:element>
-  </xsd:schema>
-  <xsd:schema xmlns:xsd="http://www.w3.org/2001/XMLSchema" xmlns:xs="http://www.w3.org/2001/XMLSchema" xmlns:dms="http://schemas.microsoft.com/office/2006/documentManagement/types" xmlns:pc="http://schemas.microsoft.com/office/infopath/2007/PartnerControls" targetNamespace="c01e712b-8f9b-4625-8219-31b20605feb3" elementFormDefault="qualified">
-    <xsd:import namespace="http://schemas.microsoft.com/office/2006/documentManagement/types"/>
-    <xsd:import namespace="http://schemas.microsoft.com/office/infopath/2007/PartnerControls"/>
-    <xsd:element name="MediaServiceMetadata" ma:index="8" nillable="true" ma:displayName="MediaServiceMetadata" ma:hidden="true" ma:internalName="MediaServiceMetadata" ma:readOnly="true">
-      <xsd:simpleType>
-        <xsd:restriction base="dms:Note"/>
-      </xsd:simpleType>
-    </xsd:element>
-    <xsd:element name="MediaServiceFastMetadata" ma:index="9" nillable="true" ma:displayName="MediaServiceFastMetadata" ma:hidden="true" ma:internalName="MediaServiceFastMetadata" ma:readOnly="true">
-      <xsd:simpleType>
-        <xsd:restriction base="dms:Note"/>
-      </xsd:simpleType>
-    </xsd:element>
-    <xsd:element name="MediaServiceAutoKeyPoints" ma:index="10" nillable="true" ma:displayName="MediaServiceAutoKeyPoints" ma:hidden="true" ma:internalName="MediaServiceAutoKeyPoints" ma:readOnly="true">
-      <xsd:simpleType>
-        <xsd:restriction base="dms:Note"/>
-      </xsd:simpleType>
-    </xsd:element>
-    <xsd:element name="MediaServiceKeyPoints" ma:index="11" nillable="true" ma:displayName="KeyPoints" ma:internalName="MediaServiceKeyPoints" ma:readOnly="true">
-      <xsd:simpleType>
-        <xsd:restriction base="dms:Note">
-          <xsd:maxLength value="255"/>
-        </xsd:restriction>
-      </xsd:simpleType>
-    </xsd:element>
-    <xsd:element name="MediaServiceDateTaken" ma:index="12" nillable="true" ma:displayName="MediaServiceDateTaken" ma:hidden="true" ma:internalName="MediaServiceDateTaken" ma:readOnly="true">
-      <xsd:simpleType>
-        <xsd:restriction base="dms:Text"/>
-      </xsd:simpleType>
-    </xsd:element>
-    <xsd:element name="MediaLengthInSeconds" ma:index="13" nillable="true" ma:displayName="Length (seconds)" ma:internalName="MediaLengthInSeconds" ma:readOnly="true">
-      <xsd:simpleType>
-        <xsd:restriction base="dms:Unknown"/>
-      </xsd:simpleType>
-    </xsd:element>
-    <xsd:element name="MediaServiceAutoTags" ma:index="14" nillable="true" ma:displayName="Tags" ma:internalName="MediaServiceAutoTags" ma:readOnly="true">
-      <xsd:simpleType>
-        <xsd:restriction base="dms:Text"/>
-      </xsd:simpleType>
-    </xsd:element>
-    <xsd:element name="MediaServiceOCR" ma:index="15" nillable="true" ma:displayName="Extracted Text" ma:internalName="MediaServiceOCR" ma:readOnly="true">
-      <xsd:simpleType>
-        <xsd:restriction base="dms:Note">
-          <xsd:maxLength value="255"/>
-        </xsd:restriction>
-      </xsd:simpleType>
-    </xsd:element>
-    <xsd:element name="MediaServiceGenerationTime" ma:index="16" nillable="true" ma:displayName="MediaServiceGenerationTime" ma:hidden="true" ma:internalName="MediaServiceGenerationTime" ma:readOnly="true">
-      <xsd:simpleType>
-        <xsd:restriction base="dms:Text"/>
-      </xsd:simpleType>
-    </xsd:element>
-    <xsd:element name="MediaServiceEventHashCode" ma:index="17" nillable="true" ma:displayName="MediaServiceEventHashCode" ma:hidden="true" ma:internalName="MediaServiceEventHashCode" ma:readOnly="true">
-      <xsd:simpleType>
-        <xsd:restriction base="dms:Text"/>
-      </xsd:simpleType>
-    </xsd:element>
-    <xsd:element name="MediaServiceLocation" ma:index="18" nillable="true" ma:displayName="Location" ma:internalName="MediaServiceLocation" ma:readOnly="true">
-      <xsd:simpleType>
-        <xsd:restriction base="dms:Text"/>
-      </xsd:simpleType>
-    </xsd:element>
-  </xsd:schema>
-  <xsd:schema xmlns:xsd="http://www.w3.org/2001/XMLSchema" xmlns:xs="http://www.w3.org/2001/XMLSchema" xmlns:dms="http://schemas.microsoft.com/office/2006/documentManagement/types" xmlns:pc="http://schemas.microsoft.com/office/infopath/2007/PartnerControls" targetNamespace="2b166a80-dccc-42cc-be33-87bca7e0d87c" elementFormDefault="qualified">
-    <xsd:import namespace="http://schemas.microsoft.com/office/2006/documentManagement/types"/>
-    <xsd:import namespace="http://schemas.microsoft.com/office/infopath/2007/PartnerControls"/>
-    <xsd:element name="SharedWithUsers" ma:index="19" nillable="true" ma:displayName="Shared With" ma:internalName="SharedWithUsers" ma:readOnly="true">
-      <xsd:complexType>
-        <xsd:complexContent>
-          <xsd:extension base="dms:UserMulti">
-            <xsd:sequence>
-              <xsd:element name="UserInfo" minOccurs="0" maxOccurs="unbounded">
-                <xsd:complexType>
-                  <xsd:sequence>
-                    <xsd:element name="DisplayName" type="xsd:string" minOccurs="0"/>
-                    <xsd:element name="AccountId" type="dms:UserId" minOccurs="0" nillable="true"/>
-                    <xsd:element name="AccountType" type="xsd:string" minOccurs="0"/>
-                  </xsd:sequence>
-                </xsd:complexType>
-              </xsd:element>
-            </xsd:sequence>
-          </xsd:extension>
-        </xsd:complexContent>
-      </xsd:complexType>
-    </xsd:element>
-    <xsd:element name="SharedWithDetails" ma:index="20" nillable="true" ma:displayName="Shared With Details" ma:internalName="SharedWithDetails" ma:readOnly="true">
-      <xsd:simpleType>
-        <xsd:restriction base="dms:Note">
-          <xsd:maxLength value="255"/>
-        </xsd:restriction>
-      </xsd:simpleType>
-    </xsd:element>
-  </xsd:schema>
-  <xsd:schema xmlns="http://schemas.openxmlformats.org/package/2006/metadata/core-properties" xmlns:xsd="http://www.w3.org/2001/XMLSchema" xmlns:xsi="http://www.w3.org/2001/XMLSchema-instance" xmlns:dc="http://purl.org/dc/elements/1.1/" xmlns:dcterms="http://purl.org/dc/terms/" xmlns:odoc="http://schemas.microsoft.com/internal/obd" targetNamespace="http://schemas.openxmlformats.org/package/2006/metadata/core-properties" elementFormDefault="qualified" attributeFormDefault="unqualified" blockDefault="#all">
-    <xsd:import namespace="http://purl.org/dc/elements/1.1/" schemaLocation="http://dublincore.org/schemas/xmls/qdc/2003/04/02/dc.xsd"/>
-    <xsd:import namespace="http://purl.org/dc/terms/" schemaLocation="http://dublincore.org/schemas/xmls/qdc/2003/04/02/dcterms.xsd"/>
-    <xsd:element name="coreProperties" type="CT_coreProperties"/>
-    <xsd:complexType name="CT_coreProperties">
-      <xsd:all>
-        <xsd:element ref="dc:creator" minOccurs="0" maxOccurs="1"/>
-        <xsd:element ref="dcterms:created" minOccurs="0" maxOccurs="1"/>
-        <xsd:element ref="dc:identifier" minOccurs="0" maxOccurs="1"/>
-        <xsd:element name="contentType" minOccurs="0" maxOccurs="1" type="xsd:string" ma:index="0" ma:displayName="Content Type"/>
-        <xsd:element ref="dc:title" minOccurs="0" maxOccurs="1" ma:index="4" ma:displayName="Title"/>
-        <xsd:element ref="dc:subject" minOccurs="0" maxOccurs="1"/>
-        <xsd:element ref="dc:description" minOccurs="0" maxOccurs="1"/>
-        <xsd:element name="keywords" minOccurs="0" maxOccurs="1" type="xsd:string"/>
-        <xsd:element ref="dc:language" minOccurs="0" maxOccurs="1"/>
-        <xsd:element name="category" minOccurs="0" maxOccurs="1" type="xsd:string"/>
-        <xsd:element name="version" minOccurs="0" maxOccurs="1" type="xsd:string"/>
-        <xsd:element name="revision" minOccurs="0" maxOccurs="1" type="xsd:string">
-          <xsd:annotation>
-            <xsd:documentation>
-                        This value indicates the number of saves or revisions. The application is responsible for updating this value after each revision.
-                    </xsd:documentation>
-          </xsd:annotation>
-        </xsd:element>
-        <xsd:element name="lastModifiedBy" minOccurs="0" maxOccurs="1" type="xsd:string"/>
-        <xsd:element ref="dcterms:modified" minOccurs="0" maxOccurs="1"/>
-        <xsd:element name="contentStatus" minOccurs="0" maxOccurs="1" type="xsd:string"/>
-      </xsd:all>
-    </xsd:complexType>
-  </xsd:schema>
-  <xs:schema xmlns:pc="http://schemas.microsoft.com/office/infopath/2007/PartnerControls" xmlns:xs="http://www.w3.org/2001/XMLSchema" targetNamespace="http://schemas.microsoft.com/office/infopath/2007/PartnerControls" elementFormDefault="qualified" attributeFormDefault="unqualified">
-    <xs:element name="Person">
-      <xs:complexType>
-        <xs:sequence>
-          <xs:element ref="pc:DisplayName" minOccurs="0"/>
-          <xs:element ref="pc:AccountId" minOccurs="0"/>
-          <xs:element ref="pc:AccountType" minOccurs="0"/>
-        </xs:sequence>
-      </xs:complexType>
-    </xs:element>
-    <xs:element name="DisplayName" type="xs:string"/>
-    <xs:element name="AccountId" type="xs:string"/>
-    <xs:element name="AccountType" type="xs:string"/>
-    <xs:element name="BDCAssociatedEntity">
-      <xs:complexType>
-        <xs:sequence>
-          <xs:element ref="pc:BDCEntity" minOccurs="0" maxOccurs="unbounded"/>
-        </xs:sequence>
-        <xs:attribute ref="pc:EntityNamespace"/>
-        <xs:attribute ref="pc:EntityName"/>
-        <xs:attribute ref="pc:SystemInstanceName"/>
-        <xs:attribute ref="pc:AssociationName"/>
-      </xs:complexType>
-    </xs:element>
-    <xs:attribute name="EntityNamespace" type="xs:string"/>
-    <xs:attribute name="EntityName" type="xs:string"/>
-    <xs:attribute name="SystemInstanceName" type="xs:string"/>
-    <xs:attribute name="AssociationName" type="xs:string"/>
-    <xs:element name="BDCEntity">
-      <xs:complexType>
-        <xs:sequence>
-          <xs:element ref="pc:EntityDisplayName" minOccurs="0"/>
-          <xs:element ref="pc:EntityInstanceReference" minOccurs="0"/>
-          <xs:element ref="pc:EntityId1" minOccurs="0"/>
-          <xs:element ref="pc:EntityId2" minOccurs="0"/>
-          <xs:element ref="pc:EntityId3" minOccurs="0"/>
-          <xs:element ref="pc:EntityId4" minOccurs="0"/>
-          <xs:element ref="pc:EntityId5" minOccurs="0"/>
-        </xs:sequence>
-      </xs:complexType>
-    </xs:element>
-    <xs:element name="EntityDisplayName" type="xs:string"/>
-    <xs:element name="EntityInstanceReference" type="xs:string"/>
-    <xs:element name="EntityId1" type="xs:string"/>
-    <xs:element name="EntityId2" type="xs:string"/>
-    <xs:element name="EntityId3" type="xs:string"/>
-    <xs:element name="EntityId4" type="xs:string"/>
-    <xs:element name="EntityId5" type="xs:string"/>
-    <xs:element name="Terms">
-      <xs:complexType>
-        <xs:sequence>
-          <xs:element ref="pc:TermInfo" minOccurs="0" maxOccurs="unbounded"/>
-        </xs:sequence>
-      </xs:complexType>
-    </xs:element>
-    <xs:element name="TermInfo">
-      <xs:complexType>
-        <xs:sequence>
-          <xs:element ref="pc:TermName" minOccurs="0"/>
-          <xs:element ref="pc:TermId" minOccurs="0"/>
-        </xs:sequence>
-      </xs:complexType>
-    </xs:element>
-    <xs:element name="TermName" type="xs:string"/>
-    <xs:element name="TermId" type="xs:string"/>
-  </xs:schema>
-</ct:contentTypeSchema>
-</file>
-
-<file path=customXml/item2.xml><?xml version="1.0" encoding="utf-8"?>
-<?mso-contentType ?>
-<FormTemplates xmlns="http://schemas.microsoft.com/sharepoint/v3/contenttype/forms">
-  <Display>DocumentLibraryForm</Display>
-  <Edit>DocumentLibraryForm</Edit>
-  <New>DocumentLibraryForm</New>
-</FormTemplates>
-</file>
-
-<file path=customXml/item3.xml><?xml version="1.0" encoding="utf-8"?>
-<p:properties xmlns:p="http://schemas.microsoft.com/office/2006/metadata/properties" xmlns:xsi="http://www.w3.org/2001/XMLSchema-instance" xmlns:pc="http://schemas.microsoft.com/office/infopath/2007/PartnerControls">
-  <documentManagement/>
-</p:properties>
-</file>
-
-<file path=customXml/itemProps1.xml><?xml version="1.0" encoding="utf-8"?>
-<ds:datastoreItem xmlns:ds="http://schemas.openxmlformats.org/officeDocument/2006/customXml" ds:itemID="{D97905F4-3D47-463F-9DA1-CA6D37FC938C}"/>
-</file>
-
-<file path=customXml/itemProps2.xml><?xml version="1.0" encoding="utf-8"?>
-<ds:datastoreItem xmlns:ds="http://schemas.openxmlformats.org/officeDocument/2006/customXml" ds:itemID="{EF8CF7F2-AF22-46EE-89BD-3147FAB5A9CC}"/>
-</file>
-
-<file path=customXml/itemProps3.xml><?xml version="1.0" encoding="utf-8"?>
-<ds:datastoreItem xmlns:ds="http://schemas.openxmlformats.org/officeDocument/2006/customXml" ds:itemID="{BC7EDAC7-547A-4BBF-9B74-E65552FEE379}"/>
 </file>
--- a/_images/catchsamplingworkflow.pptx
+++ b/_images/catchsamplingworkflow.pptx
@@ -104,6 +104,11 @@
       </a:defRPr>
     </a:lvl9pPr>
   </p:defaultTextStyle>
+  <p:extLst>
+    <p:ext uri="{EFAFB233-063F-42B5-8137-9DF3F51BA10A}">
+      <p15:sldGuideLst xmlns:p15="http://schemas.microsoft.com/office/powerpoint/2012/main"/>
+    </p:ext>
+  </p:extLst>
 </p:presentation>
 </file>
 
@@ -3037,7 +3042,38 @@
                 <a:ea typeface="Calibri" panose="020F0502020204030204" pitchFamily="34" charset="0"/>
                 <a:cs typeface="Times New Roman" panose="02020603050405020304" pitchFamily="18" charset="0"/>
               </a:rPr>
-              <a:t>Pollutant -&gt; whole fish frozen</a:t>
+              <a:t>Pollutant </a:t>
+            </a:r>
+            <a:r>
+              <a:rPr kumimoji="0" lang="en-US" altLang="nb-NO" sz="1100" b="0" i="0" u="none" strike="noStrike" cap="none" normalizeH="0" baseline="0" dirty="0">
+                <a:ln>
+                  <a:noFill/>
+                </a:ln>
+                <a:solidFill>
+                  <a:schemeClr val="tx1"/>
+                </a:solidFill>
+                <a:effectLst/>
+                <a:latin typeface="Calibri" panose="020F0502020204030204" pitchFamily="34" charset="0"/>
+                <a:ea typeface="Calibri" panose="020F0502020204030204" pitchFamily="34" charset="0"/>
+                <a:cs typeface="Times New Roman" panose="02020603050405020304" pitchFamily="18" charset="0"/>
+                <a:sym typeface="Wingdings" panose="05000000000000000000" pitchFamily="2" charset="2"/>
+              </a:rPr>
+              <a:t></a:t>
+            </a:r>
+            <a:r>
+              <a:rPr kumimoji="0" lang="en-US" altLang="nb-NO" sz="1100" b="0" i="0" u="none" strike="noStrike" cap="none" normalizeH="0" baseline="0" dirty="0">
+                <a:ln>
+                  <a:noFill/>
+                </a:ln>
+                <a:solidFill>
+                  <a:schemeClr val="tx1"/>
+                </a:solidFill>
+                <a:effectLst/>
+                <a:latin typeface="Calibri" panose="020F0502020204030204" pitchFamily="34" charset="0"/>
+                <a:ea typeface="Calibri" panose="020F0502020204030204" pitchFamily="34" charset="0"/>
+                <a:cs typeface="Times New Roman" panose="02020603050405020304" pitchFamily="18" charset="0"/>
+              </a:rPr>
+              <a:t> whole fish frozen</a:t>
             </a:r>
             <a:endParaRPr kumimoji="0" lang="en-US" altLang="nb-NO" sz="1800" b="0" i="0" u="none" strike="noStrike" cap="none" normalizeH="0" baseline="0" dirty="0">
               <a:ln>
@@ -3123,7 +3159,38 @@
                 <a:ea typeface="Calibri" panose="020F0502020204030204" pitchFamily="34" charset="0"/>
                 <a:cs typeface="Times New Roman" panose="02020603050405020304" pitchFamily="18" charset="0"/>
               </a:rPr>
-              <a:t>Parasites -&gt; whole fish frozen</a:t>
+              <a:t>Parasites </a:t>
+            </a:r>
+            <a:r>
+              <a:rPr kumimoji="0" lang="en-US" altLang="nb-NO" sz="1100" b="0" i="0" u="none" strike="noStrike" cap="none" normalizeH="0" baseline="0" dirty="0">
+                <a:ln>
+                  <a:noFill/>
+                </a:ln>
+                <a:solidFill>
+                  <a:schemeClr val="tx1"/>
+                </a:solidFill>
+                <a:effectLst/>
+                <a:latin typeface="Calibri" panose="020F0502020204030204" pitchFamily="34" charset="0"/>
+                <a:ea typeface="Calibri" panose="020F0502020204030204" pitchFamily="34" charset="0"/>
+                <a:cs typeface="Times New Roman" panose="02020603050405020304" pitchFamily="18" charset="0"/>
+                <a:sym typeface="Wingdings" panose="05000000000000000000" pitchFamily="2" charset="2"/>
+              </a:rPr>
+              <a:t></a:t>
+            </a:r>
+            <a:r>
+              <a:rPr kumimoji="0" lang="en-US" altLang="nb-NO" sz="1100" b="0" i="0" u="none" strike="noStrike" cap="none" normalizeH="0" baseline="0" dirty="0">
+                <a:ln>
+                  <a:noFill/>
+                </a:ln>
+                <a:solidFill>
+                  <a:schemeClr val="tx1"/>
+                </a:solidFill>
+                <a:effectLst/>
+                <a:latin typeface="Calibri" panose="020F0502020204030204" pitchFamily="34" charset="0"/>
+                <a:ea typeface="Calibri" panose="020F0502020204030204" pitchFamily="34" charset="0"/>
+                <a:cs typeface="Times New Roman" panose="02020603050405020304" pitchFamily="18" charset="0"/>
+              </a:rPr>
+              <a:t> whole fish frozen</a:t>
             </a:r>
             <a:endParaRPr kumimoji="0" lang="en-US" altLang="nb-NO" sz="1800" b="0" i="0" u="none" strike="noStrike" cap="none" normalizeH="0" baseline="0" dirty="0">
               <a:ln>
@@ -3567,7 +3634,7 @@
                 </a:spcAft>
               </a:pPr>
               <a:r>
-                <a:rPr lang="en-US" sz="1100" b="1">
+                <a:rPr lang="en-US" sz="1100" b="1" dirty="0">
                   <a:solidFill>
                     <a:srgbClr val="FF0000"/>
                   </a:solidFill>
@@ -3579,15 +3646,15 @@
                 <a:t>3x10</a:t>
               </a:r>
               <a:r>
-                <a:rPr lang="en-US" sz="1100">
+                <a:rPr lang="en-US" sz="1100" dirty="0">
                   <a:effectLst/>
                   <a:latin typeface="Calibri" panose="020F0502020204030204" pitchFamily="34" charset="0"/>
                   <a:ea typeface="Calibri" panose="020F0502020204030204" pitchFamily="34" charset="0"/>
                   <a:cs typeface="Times New Roman" panose="02020603050405020304" pitchFamily="18" charset="0"/>
                 </a:rPr>
-                <a:t> 0</a:t>
+                <a:t> </a:t>
               </a:r>
-              <a:endParaRPr lang="nb-NO" sz="1100">
+              <a:endParaRPr lang="nb-NO" sz="1100" dirty="0">
                 <a:effectLst/>
                 <a:latin typeface="Calibri" panose="020F0502020204030204" pitchFamily="34" charset="0"/>
                 <a:ea typeface="Calibri" panose="020F0502020204030204" pitchFamily="34" charset="0"/>
@@ -3726,9 +3793,9 @@
         <p:grpSpPr>
           <a:xfrm>
             <a:off x="838940" y="1916112"/>
-            <a:ext cx="10907012" cy="4448175"/>
+            <a:ext cx="10941728" cy="4448175"/>
             <a:chOff x="-94569" y="0"/>
-            <a:chExt cx="10907012" cy="4448175"/>
+            <a:chExt cx="10941728" cy="4448175"/>
           </a:xfrm>
         </p:grpSpPr>
         <p:sp>
@@ -3746,7 +3813,7 @@
           <p:spPr>
             <a:xfrm>
               <a:off x="4533900" y="1666875"/>
-              <a:ext cx="2000250" cy="304800"/>
+              <a:ext cx="2025344" cy="304800"/>
             </a:xfrm>
             <a:prstGeom prst="rect">
               <a:avLst/>
@@ -3778,16 +3845,34 @@
                 </a:spcAft>
               </a:pPr>
               <a:r>
-                <a:rPr lang="en-US" sz="1100" i="1">
+                <a:rPr lang="en-US" sz="1100" i="1" dirty="0" err="1">
                   <a:effectLst/>
                   <a:latin typeface="Calibri" panose="020F0502020204030204" pitchFamily="34" charset="0"/>
                   <a:ea typeface="Calibri" panose="020F0502020204030204" pitchFamily="34" charset="0"/>
                   <a:cs typeface="Times New Roman" panose="02020603050405020304" pitchFamily="18" charset="0"/>
                 </a:rPr>
-                <a:t>Engraulis encasicolus</a:t>
+                <a:t>Engraulis</a:t>
               </a:r>
               <a:r>
-                <a:rPr lang="en-US" sz="1100">
+                <a:rPr lang="en-US" sz="1100" i="1" dirty="0">
+                  <a:effectLst/>
+                  <a:latin typeface="Calibri" panose="020F0502020204030204" pitchFamily="34" charset="0"/>
+                  <a:ea typeface="Calibri" panose="020F0502020204030204" pitchFamily="34" charset="0"/>
+                  <a:cs typeface="Times New Roman" panose="02020603050405020304" pitchFamily="18" charset="0"/>
+                </a:rPr>
+                <a:t> </a:t>
+              </a:r>
+              <a:r>
+                <a:rPr lang="en-US" sz="1100" i="1" dirty="0" err="1">
+                  <a:effectLst/>
+                  <a:latin typeface="Calibri" panose="020F0502020204030204" pitchFamily="34" charset="0"/>
+                  <a:ea typeface="Calibri" panose="020F0502020204030204" pitchFamily="34" charset="0"/>
+                  <a:cs typeface="Times New Roman" panose="02020603050405020304" pitchFamily="18" charset="0"/>
+                </a:rPr>
+                <a:t>encrasicolus</a:t>
+              </a:r>
+              <a:r>
+                <a:rPr lang="en-US" sz="1100" dirty="0">
                   <a:effectLst/>
                   <a:latin typeface="Calibri" panose="020F0502020204030204" pitchFamily="34" charset="0"/>
                   <a:ea typeface="Calibri" panose="020F0502020204030204" pitchFamily="34" charset="0"/>
@@ -3795,7 +3880,7 @@
                 </a:rPr>
                 <a:t> (anchovy)</a:t>
               </a:r>
-              <a:endParaRPr lang="nb-NO" sz="1100">
+              <a:endParaRPr lang="nb-NO" sz="1100" dirty="0">
                 <a:effectLst/>
                 <a:latin typeface="Calibri" panose="020F0502020204030204" pitchFamily="34" charset="0"/>
                 <a:ea typeface="Calibri" panose="020F0502020204030204" pitchFamily="34" charset="0"/>
@@ -3924,16 +4009,34 @@
                 </a:spcAft>
               </a:pPr>
               <a:r>
-                <a:rPr lang="en-US" sz="1100" i="1">
+                <a:rPr lang="en-US" sz="1100" i="1" dirty="0" err="1">
                   <a:effectLst/>
                   <a:latin typeface="Calibri" panose="020F0502020204030204" pitchFamily="34" charset="0"/>
                   <a:ea typeface="Calibri" panose="020F0502020204030204" pitchFamily="34" charset="0"/>
                   <a:cs typeface="Times New Roman" panose="02020603050405020304" pitchFamily="18" charset="0"/>
                 </a:rPr>
-                <a:t>Sardinops sagax</a:t>
+                <a:t>Sardinops</a:t>
               </a:r>
               <a:r>
-                <a:rPr lang="en-US" sz="1100">
+                <a:rPr lang="en-US" sz="1100" i="1" dirty="0">
+                  <a:effectLst/>
+                  <a:latin typeface="Calibri" panose="020F0502020204030204" pitchFamily="34" charset="0"/>
+                  <a:ea typeface="Calibri" panose="020F0502020204030204" pitchFamily="34" charset="0"/>
+                  <a:cs typeface="Times New Roman" panose="02020603050405020304" pitchFamily="18" charset="0"/>
+                </a:rPr>
+                <a:t> </a:t>
+              </a:r>
+              <a:r>
+                <a:rPr lang="en-US" sz="1100" i="1" dirty="0" err="1">
+                  <a:effectLst/>
+                  <a:latin typeface="Calibri" panose="020F0502020204030204" pitchFamily="34" charset="0"/>
+                  <a:ea typeface="Calibri" panose="020F0502020204030204" pitchFamily="34" charset="0"/>
+                  <a:cs typeface="Times New Roman" panose="02020603050405020304" pitchFamily="18" charset="0"/>
+                </a:rPr>
+                <a:t>sagax</a:t>
+              </a:r>
+              <a:r>
+                <a:rPr lang="en-US" sz="1100" dirty="0">
                   <a:effectLst/>
                   <a:latin typeface="Calibri" panose="020F0502020204030204" pitchFamily="34" charset="0"/>
                   <a:ea typeface="Calibri" panose="020F0502020204030204" pitchFamily="34" charset="0"/>
@@ -3941,7 +4044,7 @@
                 </a:rPr>
                 <a:t> (sardine)</a:t>
               </a:r>
-              <a:endParaRPr lang="nb-NO" sz="1100">
+              <a:endParaRPr lang="nb-NO" sz="1100" dirty="0">
                 <a:effectLst/>
                 <a:latin typeface="Calibri" panose="020F0502020204030204" pitchFamily="34" charset="0"/>
                 <a:ea typeface="Calibri" panose="020F0502020204030204" pitchFamily="34" charset="0"/>
@@ -4457,8 +4560,8 @@
           </p:nvSpPr>
           <p:spPr>
             <a:xfrm>
-              <a:off x="2186801" y="3896489"/>
-              <a:ext cx="1758930" cy="304800"/>
+              <a:off x="2186800" y="3896489"/>
+              <a:ext cx="1789041" cy="304800"/>
             </a:xfrm>
             <a:prstGeom prst="rect">
               <a:avLst/>
@@ -4496,7 +4599,26 @@
                   <a:ea typeface="Calibri" panose="020F0502020204030204" pitchFamily="34" charset="0"/>
                   <a:cs typeface="Times New Roman" panose="02020603050405020304" pitchFamily="18" charset="0"/>
                 </a:rPr>
-                <a:t>Biology -&gt; whole fish frozen</a:t>
+                <a:t>Biology </a:t>
+              </a:r>
+              <a:r>
+                <a:rPr lang="en-US" sz="1100" dirty="0">
+                  <a:effectLst/>
+                  <a:latin typeface="Calibri" panose="020F0502020204030204" pitchFamily="34" charset="0"/>
+                  <a:ea typeface="Calibri" panose="020F0502020204030204" pitchFamily="34" charset="0"/>
+                  <a:cs typeface="Times New Roman" panose="02020603050405020304" pitchFamily="18" charset="0"/>
+                  <a:sym typeface="Wingdings" panose="05000000000000000000" pitchFamily="2" charset="2"/>
+                </a:rPr>
+                <a:t></a:t>
+              </a:r>
+              <a:r>
+                <a:rPr lang="en-US" sz="1100" dirty="0">
+                  <a:effectLst/>
+                  <a:latin typeface="Calibri" panose="020F0502020204030204" pitchFamily="34" charset="0"/>
+                  <a:ea typeface="Calibri" panose="020F0502020204030204" pitchFamily="34" charset="0"/>
+                  <a:cs typeface="Times New Roman" panose="02020603050405020304" pitchFamily="18" charset="0"/>
+                </a:rPr>
+                <a:t> whole fish frozen</a:t>
               </a:r>
               <a:endParaRPr lang="nb-NO" sz="1100" dirty="0">
                 <a:effectLst/>
@@ -4622,12 +4744,38 @@
               </a:pPr>
               <a:r>
                 <a:rPr lang="en-US" sz="1100" dirty="0">
+                  <a:latin typeface="Calibri" panose="020F0502020204030204" pitchFamily="34" charset="0"/>
+                  <a:ea typeface="Calibri" panose="020F0502020204030204" pitchFamily="34" charset="0"/>
+                  <a:cs typeface="Times New Roman" panose="02020603050405020304" pitchFamily="18" charset="0"/>
+                </a:rPr>
+                <a:t>M</a:t>
+              </a:r>
+              <a:r>
+                <a:rPr lang="en-US" sz="1100" dirty="0">
                   <a:effectLst/>
                   <a:latin typeface="Calibri" panose="020F0502020204030204" pitchFamily="34" charset="0"/>
                   <a:ea typeface="Calibri" panose="020F0502020204030204" pitchFamily="34" charset="0"/>
                   <a:cs typeface="Times New Roman" panose="02020603050405020304" pitchFamily="18" charset="0"/>
                 </a:rPr>
-                <a:t>meristic -&gt; whole fish frozen</a:t>
+                <a:t>eristic </a:t>
+              </a:r>
+              <a:r>
+                <a:rPr lang="en-US" sz="1100" dirty="0">
+                  <a:latin typeface="Calibri" panose="020F0502020204030204" pitchFamily="34" charset="0"/>
+                  <a:ea typeface="Calibri" panose="020F0502020204030204" pitchFamily="34" charset="0"/>
+                  <a:cs typeface="Times New Roman" panose="02020603050405020304" pitchFamily="18" charset="0"/>
+                  <a:sym typeface="Wingdings" panose="05000000000000000000" pitchFamily="2" charset="2"/>
+                </a:rPr>
+                <a:t></a:t>
+              </a:r>
+              <a:r>
+                <a:rPr lang="en-US" sz="1100" dirty="0">
+                  <a:effectLst/>
+                  <a:latin typeface="Calibri" panose="020F0502020204030204" pitchFamily="34" charset="0"/>
+                  <a:ea typeface="Calibri" panose="020F0502020204030204" pitchFamily="34" charset="0"/>
+                  <a:cs typeface="Times New Roman" panose="02020603050405020304" pitchFamily="18" charset="0"/>
+                </a:rPr>
+                <a:t> whole fish frozen</a:t>
               </a:r>
               <a:endParaRPr lang="nb-NO" sz="1100" dirty="0">
                 <a:effectLst/>
@@ -4770,7 +4918,7 @@
           <p:spPr>
             <a:xfrm>
               <a:off x="8725925" y="1310162"/>
-              <a:ext cx="2086518" cy="276225"/>
+              <a:ext cx="2121234" cy="276225"/>
             </a:xfrm>
             <a:prstGeom prst="rect">
               <a:avLst/>
@@ -4808,9 +4956,28 @@
                   <a:ea typeface="Calibri" panose="020F0502020204030204" pitchFamily="34" charset="0"/>
                   <a:cs typeface="Times New Roman" panose="02020603050405020304" pitchFamily="18" charset="0"/>
                 </a:rPr>
-                <a:t>Micro-plastic -&gt; whole fish frozen</a:t>
+                <a:t>Microplastic </a:t>
               </a:r>
-              <a:endParaRPr lang="nb-NO" sz="1100">
+              <a:r>
+                <a:rPr lang="en-US" sz="1100" dirty="0">
+                  <a:effectLst/>
+                  <a:latin typeface="Calibri" panose="020F0502020204030204" pitchFamily="34" charset="0"/>
+                  <a:ea typeface="Calibri" panose="020F0502020204030204" pitchFamily="34" charset="0"/>
+                  <a:cs typeface="Times New Roman" panose="02020603050405020304" pitchFamily="18" charset="0"/>
+                  <a:sym typeface="Wingdings" panose="05000000000000000000" pitchFamily="2" charset="2"/>
+                </a:rPr>
+                <a:t></a:t>
+              </a:r>
+              <a:r>
+                <a:rPr lang="en-US" sz="1100" dirty="0">
+                  <a:effectLst/>
+                  <a:latin typeface="Calibri" panose="020F0502020204030204" pitchFamily="34" charset="0"/>
+                  <a:ea typeface="Calibri" panose="020F0502020204030204" pitchFamily="34" charset="0"/>
+                  <a:cs typeface="Times New Roman" panose="02020603050405020304" pitchFamily="18" charset="0"/>
+                </a:rPr>
+                <a:t> whole fish frozen</a:t>
+              </a:r>
+              <a:endParaRPr lang="nb-NO" sz="1100" dirty="0">
                 <a:effectLst/>
                 <a:latin typeface="Calibri" panose="020F0502020204030204" pitchFamily="34" charset="0"/>
                 <a:ea typeface="Calibri" panose="020F0502020204030204" pitchFamily="34" charset="0"/>
@@ -5068,9 +5235,9 @@
           <p:grpSpPr>
             <a:xfrm>
               <a:off x="638175" y="0"/>
-              <a:ext cx="7991475" cy="1181259"/>
+              <a:ext cx="7991475" cy="1064895"/>
               <a:chOff x="0" y="0"/>
-              <a:chExt cx="7991475" cy="1181259"/>
+              <a:chExt cx="7991475" cy="1064895"/>
             </a:xfrm>
           </p:grpSpPr>
           <p:sp>
@@ -5184,56 +5351,6 @@
                   <a:ea typeface="Calibri" panose="020F0502020204030204" pitchFamily="34" charset="0"/>
                   <a:cs typeface="Times New Roman" panose="02020603050405020304" pitchFamily="18" charset="0"/>
                 </a:endParaRPr>
-              </a:p>
-            </p:txBody>
-          </p:sp>
-          <p:sp>
-            <p:nvSpPr>
-              <p:cNvPr id="123" name="Arrow: Bent 122">
-                <a:extLst>
-                  <a:ext uri="{FF2B5EF4-FFF2-40B4-BE49-F238E27FC236}">
-                    <a16:creationId xmlns:a16="http://schemas.microsoft.com/office/drawing/2014/main" id="{F1C34568-58F9-4D4D-B22C-D0406EBBF467}"/>
-                  </a:ext>
-                </a:extLst>
-              </p:cNvPr>
-              <p:cNvSpPr/>
-              <p:nvPr/>
-            </p:nvSpPr>
-            <p:spPr>
-              <a:xfrm rot="5400000">
-                <a:off x="5459730" y="211455"/>
-                <a:ext cx="813435" cy="1126173"/>
-              </a:xfrm>
-              <a:prstGeom prst="bentArrow">
-                <a:avLst/>
-              </a:prstGeom>
-            </p:spPr>
-            <p:style>
-              <a:lnRef idx="2">
-                <a:schemeClr val="accent1">
-                  <a:shade val="50000"/>
-                </a:schemeClr>
-              </a:lnRef>
-              <a:fillRef idx="1">
-                <a:schemeClr val="accent1"/>
-              </a:fillRef>
-              <a:effectRef idx="0">
-                <a:schemeClr val="accent1"/>
-              </a:effectRef>
-              <a:fontRef idx="minor">
-                <a:schemeClr val="lt1"/>
-              </a:fontRef>
-            </p:style>
-            <p:txBody>
-              <a:bodyPr rot="0" spcFirstLastPara="0" vert="horz" wrap="square" lIns="91440" tIns="45720" rIns="91440" bIns="45720" numCol="1" spcCol="0" rtlCol="0" fromWordArt="0" anchor="ctr" anchorCtr="0" forceAA="0" compatLnSpc="1">
-                <a:prstTxWarp prst="textNoShape">
-                  <a:avLst/>
-                </a:prstTxWarp>
-                <a:noAutofit/>
-              </a:bodyPr>
-              <a:lstStyle/>
-              <a:p>
-                <a:endParaRPr lang="nb-NO"/>
               </a:p>
             </p:txBody>
           </p:sp>
@@ -5368,7 +5485,7 @@
             </p:nvSpPr>
             <p:spPr>
               <a:xfrm>
-                <a:off x="6391275" y="352425"/>
+                <a:off x="6305550" y="342900"/>
                 <a:ext cx="419100" cy="238125"/>
               </a:xfrm>
               <a:prstGeom prst="rect">
@@ -5401,7 +5518,7 @@
                   </a:spcAft>
                 </a:pPr>
                 <a:r>
-                  <a:rPr lang="en-US" sz="1100" b="1">
+                  <a:rPr lang="en-US" sz="1100" b="1" dirty="0">
                     <a:solidFill>
                       <a:srgbClr val="FF0000"/>
                     </a:solidFill>
@@ -5412,7 +5529,7 @@
                   </a:rPr>
                   <a:t>100</a:t>
                 </a:r>
-                <a:endParaRPr lang="nb-NO" sz="1100">
+                <a:endParaRPr lang="nb-NO" sz="1100" dirty="0">
                   <a:effectLst/>
                   <a:latin typeface="Calibri" panose="020F0502020204030204" pitchFamily="34" charset="0"/>
                   <a:ea typeface="Calibri" panose="020F0502020204030204" pitchFamily="34" charset="0"/>
@@ -5791,6 +5908,56 @@
               <a:t>workflow</a:t>
             </a:r>
             <a:endParaRPr lang="nb-NO" dirty="0"/>
+          </a:p>
+        </p:txBody>
+      </p:sp>
+      <p:sp>
+        <p:nvSpPr>
+          <p:cNvPr id="45" name="Arrow: Bent-Up 44">
+            <a:extLst>
+              <a:ext uri="{FF2B5EF4-FFF2-40B4-BE49-F238E27FC236}">
+                <a16:creationId xmlns:a16="http://schemas.microsoft.com/office/drawing/2014/main" id="{EB53DB35-A390-4760-B825-FAE6E99BF735}"/>
+              </a:ext>
+            </a:extLst>
+          </p:cNvPr>
+          <p:cNvSpPr/>
+          <p:nvPr/>
+        </p:nvSpPr>
+        <p:spPr>
+          <a:xfrm flipV="1">
+            <a:off x="6839009" y="2284864"/>
+            <a:ext cx="1047750" cy="731520"/>
+          </a:xfrm>
+          <a:prstGeom prst="bentUpArrow">
+            <a:avLst/>
+          </a:prstGeom>
+        </p:spPr>
+        <p:style>
+          <a:lnRef idx="2">
+            <a:schemeClr val="accent1">
+              <a:shade val="50000"/>
+            </a:schemeClr>
+          </a:lnRef>
+          <a:fillRef idx="1">
+            <a:schemeClr val="accent1"/>
+          </a:fillRef>
+          <a:effectRef idx="0">
+            <a:schemeClr val="accent1"/>
+          </a:effectRef>
+          <a:fontRef idx="minor">
+            <a:schemeClr val="lt1"/>
+          </a:fontRef>
+        </p:style>
+        <p:txBody>
+          <a:bodyPr rot="0" spcFirstLastPara="0" vert="horz" wrap="square" lIns="91440" tIns="45720" rIns="91440" bIns="45720" numCol="1" spcCol="0" rtlCol="0" fromWordArt="0" anchor="ctr" anchorCtr="0" forceAA="0" compatLnSpc="1">
+            <a:prstTxWarp prst="textNoShape">
+              <a:avLst/>
+            </a:prstTxWarp>
+            <a:noAutofit/>
+          </a:bodyPr>
+          <a:lstStyle/>
+          <a:p>
+            <a:endParaRPr lang="nb-NO"/>
           </a:p>
         </p:txBody>
       </p:sp>
